--- a/exports/pptx/lessons/middle-module-07-eleven-multiplication/day-08-tirthaji-context.pptx
+++ b/exports/pptx/lessons/middle-module-07-eleven-multiplication/day-08-tirthaji-context.pptx
@@ -16,9 +16,21 @@
     <p:sldId id="264" r:id="rId10"/>
     <p:sldId id="265" r:id="rId11"/>
     <p:sldId id="266" r:id="rId12"/>
+    <p:sldId id="267" r:id="rId13"/>
+    <p:sldId id="268" r:id="rId14"/>
+    <p:sldId id="269" r:id="rId15"/>
+    <p:sldId id="270" r:id="rId16"/>
+    <p:sldId id="271" r:id="rId17"/>
+    <p:sldId id="272" r:id="rId18"/>
+    <p:sldId id="273" r:id="rId19"/>
+    <p:sldId id="274" r:id="rId20"/>
+    <p:sldId id="275" r:id="rId21"/>
+    <p:sldId id="276" r:id="rId22"/>
+    <p:sldId id="277" r:id="rId23"/>
+    <p:sldId id="278" r:id="rId24"/>
   </p:sldIdLst>
   <p:notesMasterIdLst>
-    <p:notesMasterId r:id="rId13"/>
+    <p:notesMasterId r:id="rId25"/>
   </p:notesMasterIdLst>
   <p:sldSz cx="9144000" cy="5143500"/>
   <p:notesSz cx="5143500" cy="9144000"/>
@@ -730,6 +742,710 @@
 </p:notes>
 </file>
 
+<file path=ppt/notesSlides/notesSlide12.xml><?xml version="1.0" encoding="utf-8"?>
+<p:notes xmlns:a="http://schemas.openxmlformats.org/drawingml/2006/main" xmlns:r="http://schemas.openxmlformats.org/officeDocument/2006/relationships" xmlns:p="http://schemas.openxmlformats.org/presentationml/2006/main">
+  <p:cSld>
+    <p:spTree>
+      <p:nvGrpSpPr>
+        <p:cNvPr id="1" name=""/>
+        <p:cNvGrpSpPr/>
+        <p:nvPr/>
+      </p:nvGrpSpPr>
+      <p:grpSpPr>
+        <a:xfrm>
+          <a:off x="0" y="0"/>
+          <a:ext cx="0" cy="0"/>
+          <a:chOff x="0" y="0"/>
+          <a:chExt cx="0" cy="0"/>
+        </a:xfrm>
+      </p:grpSpPr>
+      <p:sp>
+        <p:nvSpPr>
+          <p:cNvPr id="2" name="Slide Image Placeholder 1"/>
+          <p:cNvSpPr>
+            <a:spLocks noGrp="1" noRot="1" noChangeAspect="1"/>
+          </p:cNvSpPr>
+          <p:nvPr>
+            <p:ph type="sldImg"/>
+          </p:nvPr>
+        </p:nvSpPr>
+        <p:spPr/>
+      </p:sp>
+      <p:sp>
+        <p:nvSpPr>
+          <p:cNvPr id="3" name="Notes Placeholder 2"/>
+          <p:cNvSpPr>
+            <a:spLocks noGrp="1"/>
+          </p:cNvSpPr>
+          <p:nvPr>
+            <p:ph type="body" idx="1"/>
+          </p:nvPr>
+        </p:nvSpPr>
+        <p:spPr/>
+        <p:txBody>
+          <a:bodyPr/>
+          <a:lstStyle/>
+          <a:p>
+            <a:r>
+              <a:rPr lang="en-US" dirty="0"/>
+              <a:t/>
+            </a:r>
+            <a:endParaRPr lang="en-US" dirty="0"/>
+          </a:p>
+        </p:txBody>
+      </p:sp>
+      <p:sp>
+        <p:nvSpPr>
+          <p:cNvPr id="4" name="Slide Number Placeholder 3"/>
+          <p:cNvSpPr>
+            <a:spLocks noGrp="1"/>
+          </p:cNvSpPr>
+          <p:nvPr>
+            <p:ph type="sldNum" sz="quarter" idx="10"/>
+          </p:nvPr>
+        </p:nvSpPr>
+        <p:spPr/>
+        <p:txBody>
+          <a:bodyPr/>
+          <a:lstStyle/>
+          <a:p>
+            <a:fld id="{F7021451-1387-4CA6-816F-3879F97B5CBC}" type="slidenum">
+              <a:rPr lang="en-US"/>
+              <a:t>12</a:t>
+            </a:fld>
+            <a:endParaRPr lang="en-US"/>
+          </a:p>
+        </p:txBody>
+      </p:sp>
+    </p:spTree>
+    <p:extLst>
+      <p:ext uri="{BB962C8B-B14F-4D97-AF65-F5344CB8AC3E}">
+        <p14:creationId xmlns:p14="http://schemas.microsoft.com/office/powerpoint/2010/main" val="1024086991"/>
+      </p:ext>
+    </p:extLst>
+  </p:cSld>
+  <p:clrMapOvr>
+    <a:masterClrMapping/>
+  </p:clrMapOvr>
+</p:notes>
+</file>
+
+<file path=ppt/notesSlides/notesSlide13.xml><?xml version="1.0" encoding="utf-8"?>
+<p:notes xmlns:a="http://schemas.openxmlformats.org/drawingml/2006/main" xmlns:r="http://schemas.openxmlformats.org/officeDocument/2006/relationships" xmlns:p="http://schemas.openxmlformats.org/presentationml/2006/main">
+  <p:cSld>
+    <p:spTree>
+      <p:nvGrpSpPr>
+        <p:cNvPr id="1" name=""/>
+        <p:cNvGrpSpPr/>
+        <p:nvPr/>
+      </p:nvGrpSpPr>
+      <p:grpSpPr>
+        <a:xfrm>
+          <a:off x="0" y="0"/>
+          <a:ext cx="0" cy="0"/>
+          <a:chOff x="0" y="0"/>
+          <a:chExt cx="0" cy="0"/>
+        </a:xfrm>
+      </p:grpSpPr>
+      <p:sp>
+        <p:nvSpPr>
+          <p:cNvPr id="2" name="Slide Image Placeholder 1"/>
+          <p:cNvSpPr>
+            <a:spLocks noGrp="1" noRot="1" noChangeAspect="1"/>
+          </p:cNvSpPr>
+          <p:nvPr>
+            <p:ph type="sldImg"/>
+          </p:nvPr>
+        </p:nvSpPr>
+        <p:spPr/>
+      </p:sp>
+      <p:sp>
+        <p:nvSpPr>
+          <p:cNvPr id="3" name="Notes Placeholder 2"/>
+          <p:cNvSpPr>
+            <a:spLocks noGrp="1"/>
+          </p:cNvSpPr>
+          <p:nvPr>
+            <p:ph type="body" idx="1"/>
+          </p:nvPr>
+        </p:nvSpPr>
+        <p:spPr/>
+        <p:txBody>
+          <a:bodyPr/>
+          <a:lstStyle/>
+          <a:p>
+            <a:r>
+              <a:rPr lang="en-US" dirty="0"/>
+              <a:t/>
+            </a:r>
+            <a:endParaRPr lang="en-US" dirty="0"/>
+          </a:p>
+        </p:txBody>
+      </p:sp>
+      <p:sp>
+        <p:nvSpPr>
+          <p:cNvPr id="4" name="Slide Number Placeholder 3"/>
+          <p:cNvSpPr>
+            <a:spLocks noGrp="1"/>
+          </p:cNvSpPr>
+          <p:nvPr>
+            <p:ph type="sldNum" sz="quarter" idx="10"/>
+          </p:nvPr>
+        </p:nvSpPr>
+        <p:spPr/>
+        <p:txBody>
+          <a:bodyPr/>
+          <a:lstStyle/>
+          <a:p>
+            <a:fld id="{F7021451-1387-4CA6-816F-3879F97B5CBC}" type="slidenum">
+              <a:rPr lang="en-US"/>
+              <a:t>13</a:t>
+            </a:fld>
+            <a:endParaRPr lang="en-US"/>
+          </a:p>
+        </p:txBody>
+      </p:sp>
+    </p:spTree>
+    <p:extLst>
+      <p:ext uri="{BB962C8B-B14F-4D97-AF65-F5344CB8AC3E}">
+        <p14:creationId xmlns:p14="http://schemas.microsoft.com/office/powerpoint/2010/main" val="1024086991"/>
+      </p:ext>
+    </p:extLst>
+  </p:cSld>
+  <p:clrMapOvr>
+    <a:masterClrMapping/>
+  </p:clrMapOvr>
+</p:notes>
+</file>
+
+<file path=ppt/notesSlides/notesSlide14.xml><?xml version="1.0" encoding="utf-8"?>
+<p:notes xmlns:a="http://schemas.openxmlformats.org/drawingml/2006/main" xmlns:r="http://schemas.openxmlformats.org/officeDocument/2006/relationships" xmlns:p="http://schemas.openxmlformats.org/presentationml/2006/main">
+  <p:cSld>
+    <p:spTree>
+      <p:nvGrpSpPr>
+        <p:cNvPr id="1" name=""/>
+        <p:cNvGrpSpPr/>
+        <p:nvPr/>
+      </p:nvGrpSpPr>
+      <p:grpSpPr>
+        <a:xfrm>
+          <a:off x="0" y="0"/>
+          <a:ext cx="0" cy="0"/>
+          <a:chOff x="0" y="0"/>
+          <a:chExt cx="0" cy="0"/>
+        </a:xfrm>
+      </p:grpSpPr>
+      <p:sp>
+        <p:nvSpPr>
+          <p:cNvPr id="2" name="Slide Image Placeholder 1"/>
+          <p:cNvSpPr>
+            <a:spLocks noGrp="1" noRot="1" noChangeAspect="1"/>
+          </p:cNvSpPr>
+          <p:nvPr>
+            <p:ph type="sldImg"/>
+          </p:nvPr>
+        </p:nvSpPr>
+        <p:spPr/>
+      </p:sp>
+      <p:sp>
+        <p:nvSpPr>
+          <p:cNvPr id="3" name="Notes Placeholder 2"/>
+          <p:cNvSpPr>
+            <a:spLocks noGrp="1"/>
+          </p:cNvSpPr>
+          <p:nvPr>
+            <p:ph type="body" idx="1"/>
+          </p:nvPr>
+        </p:nvSpPr>
+        <p:spPr/>
+        <p:txBody>
+          <a:bodyPr/>
+          <a:lstStyle/>
+          <a:p>
+            <a:r>
+              <a:rPr lang="en-US" dirty="0"/>
+              <a:t/>
+            </a:r>
+            <a:endParaRPr lang="en-US" dirty="0"/>
+          </a:p>
+        </p:txBody>
+      </p:sp>
+      <p:sp>
+        <p:nvSpPr>
+          <p:cNvPr id="4" name="Slide Number Placeholder 3"/>
+          <p:cNvSpPr>
+            <a:spLocks noGrp="1"/>
+          </p:cNvSpPr>
+          <p:nvPr>
+            <p:ph type="sldNum" sz="quarter" idx="10"/>
+          </p:nvPr>
+        </p:nvSpPr>
+        <p:spPr/>
+        <p:txBody>
+          <a:bodyPr/>
+          <a:lstStyle/>
+          <a:p>
+            <a:fld id="{F7021451-1387-4CA6-816F-3879F97B5CBC}" type="slidenum">
+              <a:rPr lang="en-US"/>
+              <a:t>14</a:t>
+            </a:fld>
+            <a:endParaRPr lang="en-US"/>
+          </a:p>
+        </p:txBody>
+      </p:sp>
+    </p:spTree>
+    <p:extLst>
+      <p:ext uri="{BB962C8B-B14F-4D97-AF65-F5344CB8AC3E}">
+        <p14:creationId xmlns:p14="http://schemas.microsoft.com/office/powerpoint/2010/main" val="1024086991"/>
+      </p:ext>
+    </p:extLst>
+  </p:cSld>
+  <p:clrMapOvr>
+    <a:masterClrMapping/>
+  </p:clrMapOvr>
+</p:notes>
+</file>
+
+<file path=ppt/notesSlides/notesSlide15.xml><?xml version="1.0" encoding="utf-8"?>
+<p:notes xmlns:a="http://schemas.openxmlformats.org/drawingml/2006/main" xmlns:r="http://schemas.openxmlformats.org/officeDocument/2006/relationships" xmlns:p="http://schemas.openxmlformats.org/presentationml/2006/main">
+  <p:cSld>
+    <p:spTree>
+      <p:nvGrpSpPr>
+        <p:cNvPr id="1" name=""/>
+        <p:cNvGrpSpPr/>
+        <p:nvPr/>
+      </p:nvGrpSpPr>
+      <p:grpSpPr>
+        <a:xfrm>
+          <a:off x="0" y="0"/>
+          <a:ext cx="0" cy="0"/>
+          <a:chOff x="0" y="0"/>
+          <a:chExt cx="0" cy="0"/>
+        </a:xfrm>
+      </p:grpSpPr>
+      <p:sp>
+        <p:nvSpPr>
+          <p:cNvPr id="2" name="Slide Image Placeholder 1"/>
+          <p:cNvSpPr>
+            <a:spLocks noGrp="1" noRot="1" noChangeAspect="1"/>
+          </p:cNvSpPr>
+          <p:nvPr>
+            <p:ph type="sldImg"/>
+          </p:nvPr>
+        </p:nvSpPr>
+        <p:spPr/>
+      </p:sp>
+      <p:sp>
+        <p:nvSpPr>
+          <p:cNvPr id="3" name="Notes Placeholder 2"/>
+          <p:cNvSpPr>
+            <a:spLocks noGrp="1"/>
+          </p:cNvSpPr>
+          <p:nvPr>
+            <p:ph type="body" idx="1"/>
+          </p:nvPr>
+        </p:nvSpPr>
+        <p:spPr/>
+        <p:txBody>
+          <a:bodyPr/>
+          <a:lstStyle/>
+          <a:p>
+            <a:r>
+              <a:rPr lang="en-US" dirty="0"/>
+              <a:t/>
+            </a:r>
+            <a:endParaRPr lang="en-US" dirty="0"/>
+          </a:p>
+        </p:txBody>
+      </p:sp>
+      <p:sp>
+        <p:nvSpPr>
+          <p:cNvPr id="4" name="Slide Number Placeholder 3"/>
+          <p:cNvSpPr>
+            <a:spLocks noGrp="1"/>
+          </p:cNvSpPr>
+          <p:nvPr>
+            <p:ph type="sldNum" sz="quarter" idx="10"/>
+          </p:nvPr>
+        </p:nvSpPr>
+        <p:spPr/>
+        <p:txBody>
+          <a:bodyPr/>
+          <a:lstStyle/>
+          <a:p>
+            <a:fld id="{F7021451-1387-4CA6-816F-3879F97B5CBC}" type="slidenum">
+              <a:rPr lang="en-US"/>
+              <a:t>15</a:t>
+            </a:fld>
+            <a:endParaRPr lang="en-US"/>
+          </a:p>
+        </p:txBody>
+      </p:sp>
+    </p:spTree>
+    <p:extLst>
+      <p:ext uri="{BB962C8B-B14F-4D97-AF65-F5344CB8AC3E}">
+        <p14:creationId xmlns:p14="http://schemas.microsoft.com/office/powerpoint/2010/main" val="1024086991"/>
+      </p:ext>
+    </p:extLst>
+  </p:cSld>
+  <p:clrMapOvr>
+    <a:masterClrMapping/>
+  </p:clrMapOvr>
+</p:notes>
+</file>
+
+<file path=ppt/notesSlides/notesSlide16.xml><?xml version="1.0" encoding="utf-8"?>
+<p:notes xmlns:a="http://schemas.openxmlformats.org/drawingml/2006/main" xmlns:r="http://schemas.openxmlformats.org/officeDocument/2006/relationships" xmlns:p="http://schemas.openxmlformats.org/presentationml/2006/main">
+  <p:cSld>
+    <p:spTree>
+      <p:nvGrpSpPr>
+        <p:cNvPr id="1" name=""/>
+        <p:cNvGrpSpPr/>
+        <p:nvPr/>
+      </p:nvGrpSpPr>
+      <p:grpSpPr>
+        <a:xfrm>
+          <a:off x="0" y="0"/>
+          <a:ext cx="0" cy="0"/>
+          <a:chOff x="0" y="0"/>
+          <a:chExt cx="0" cy="0"/>
+        </a:xfrm>
+      </p:grpSpPr>
+      <p:sp>
+        <p:nvSpPr>
+          <p:cNvPr id="2" name="Slide Image Placeholder 1"/>
+          <p:cNvSpPr>
+            <a:spLocks noGrp="1" noRot="1" noChangeAspect="1"/>
+          </p:cNvSpPr>
+          <p:nvPr>
+            <p:ph type="sldImg"/>
+          </p:nvPr>
+        </p:nvSpPr>
+        <p:spPr/>
+      </p:sp>
+      <p:sp>
+        <p:nvSpPr>
+          <p:cNvPr id="3" name="Notes Placeholder 2"/>
+          <p:cNvSpPr>
+            <a:spLocks noGrp="1"/>
+          </p:cNvSpPr>
+          <p:nvPr>
+            <p:ph type="body" idx="1"/>
+          </p:nvPr>
+        </p:nvSpPr>
+        <p:spPr/>
+        <p:txBody>
+          <a:bodyPr/>
+          <a:lstStyle/>
+          <a:p>
+            <a:r>
+              <a:rPr lang="en-US" dirty="0"/>
+              <a:t/>
+            </a:r>
+            <a:endParaRPr lang="en-US" dirty="0"/>
+          </a:p>
+        </p:txBody>
+      </p:sp>
+      <p:sp>
+        <p:nvSpPr>
+          <p:cNvPr id="4" name="Slide Number Placeholder 3"/>
+          <p:cNvSpPr>
+            <a:spLocks noGrp="1"/>
+          </p:cNvSpPr>
+          <p:nvPr>
+            <p:ph type="sldNum" sz="quarter" idx="10"/>
+          </p:nvPr>
+        </p:nvSpPr>
+        <p:spPr/>
+        <p:txBody>
+          <a:bodyPr/>
+          <a:lstStyle/>
+          <a:p>
+            <a:fld id="{F7021451-1387-4CA6-816F-3879F97B5CBC}" type="slidenum">
+              <a:rPr lang="en-US"/>
+              <a:t>16</a:t>
+            </a:fld>
+            <a:endParaRPr lang="en-US"/>
+          </a:p>
+        </p:txBody>
+      </p:sp>
+    </p:spTree>
+    <p:extLst>
+      <p:ext uri="{BB962C8B-B14F-4D97-AF65-F5344CB8AC3E}">
+        <p14:creationId xmlns:p14="http://schemas.microsoft.com/office/powerpoint/2010/main" val="1024086991"/>
+      </p:ext>
+    </p:extLst>
+  </p:cSld>
+  <p:clrMapOvr>
+    <a:masterClrMapping/>
+  </p:clrMapOvr>
+</p:notes>
+</file>
+
+<file path=ppt/notesSlides/notesSlide17.xml><?xml version="1.0" encoding="utf-8"?>
+<p:notes xmlns:a="http://schemas.openxmlformats.org/drawingml/2006/main" xmlns:r="http://schemas.openxmlformats.org/officeDocument/2006/relationships" xmlns:p="http://schemas.openxmlformats.org/presentationml/2006/main">
+  <p:cSld>
+    <p:spTree>
+      <p:nvGrpSpPr>
+        <p:cNvPr id="1" name=""/>
+        <p:cNvGrpSpPr/>
+        <p:nvPr/>
+      </p:nvGrpSpPr>
+      <p:grpSpPr>
+        <a:xfrm>
+          <a:off x="0" y="0"/>
+          <a:ext cx="0" cy="0"/>
+          <a:chOff x="0" y="0"/>
+          <a:chExt cx="0" cy="0"/>
+        </a:xfrm>
+      </p:grpSpPr>
+      <p:sp>
+        <p:nvSpPr>
+          <p:cNvPr id="2" name="Slide Image Placeholder 1"/>
+          <p:cNvSpPr>
+            <a:spLocks noGrp="1" noRot="1" noChangeAspect="1"/>
+          </p:cNvSpPr>
+          <p:nvPr>
+            <p:ph type="sldImg"/>
+          </p:nvPr>
+        </p:nvSpPr>
+        <p:spPr/>
+      </p:sp>
+      <p:sp>
+        <p:nvSpPr>
+          <p:cNvPr id="3" name="Notes Placeholder 2"/>
+          <p:cNvSpPr>
+            <a:spLocks noGrp="1"/>
+          </p:cNvSpPr>
+          <p:nvPr>
+            <p:ph type="body" idx="1"/>
+          </p:nvPr>
+        </p:nvSpPr>
+        <p:spPr/>
+        <p:txBody>
+          <a:bodyPr/>
+          <a:lstStyle/>
+          <a:p>
+            <a:r>
+              <a:rPr lang="en-US" dirty="0"/>
+              <a:t/>
+            </a:r>
+            <a:endParaRPr lang="en-US" dirty="0"/>
+          </a:p>
+        </p:txBody>
+      </p:sp>
+      <p:sp>
+        <p:nvSpPr>
+          <p:cNvPr id="4" name="Slide Number Placeholder 3"/>
+          <p:cNvSpPr>
+            <a:spLocks noGrp="1"/>
+          </p:cNvSpPr>
+          <p:nvPr>
+            <p:ph type="sldNum" sz="quarter" idx="10"/>
+          </p:nvPr>
+        </p:nvSpPr>
+        <p:spPr/>
+        <p:txBody>
+          <a:bodyPr/>
+          <a:lstStyle/>
+          <a:p>
+            <a:fld id="{F7021451-1387-4CA6-816F-3879F97B5CBC}" type="slidenum">
+              <a:rPr lang="en-US"/>
+              <a:t>17</a:t>
+            </a:fld>
+            <a:endParaRPr lang="en-US"/>
+          </a:p>
+        </p:txBody>
+      </p:sp>
+    </p:spTree>
+    <p:extLst>
+      <p:ext uri="{BB962C8B-B14F-4D97-AF65-F5344CB8AC3E}">
+        <p14:creationId xmlns:p14="http://schemas.microsoft.com/office/powerpoint/2010/main" val="1024086991"/>
+      </p:ext>
+    </p:extLst>
+  </p:cSld>
+  <p:clrMapOvr>
+    <a:masterClrMapping/>
+  </p:clrMapOvr>
+</p:notes>
+</file>
+
+<file path=ppt/notesSlides/notesSlide18.xml><?xml version="1.0" encoding="utf-8"?>
+<p:notes xmlns:a="http://schemas.openxmlformats.org/drawingml/2006/main" xmlns:r="http://schemas.openxmlformats.org/officeDocument/2006/relationships" xmlns:p="http://schemas.openxmlformats.org/presentationml/2006/main">
+  <p:cSld>
+    <p:spTree>
+      <p:nvGrpSpPr>
+        <p:cNvPr id="1" name=""/>
+        <p:cNvGrpSpPr/>
+        <p:nvPr/>
+      </p:nvGrpSpPr>
+      <p:grpSpPr>
+        <a:xfrm>
+          <a:off x="0" y="0"/>
+          <a:ext cx="0" cy="0"/>
+          <a:chOff x="0" y="0"/>
+          <a:chExt cx="0" cy="0"/>
+        </a:xfrm>
+      </p:grpSpPr>
+      <p:sp>
+        <p:nvSpPr>
+          <p:cNvPr id="2" name="Slide Image Placeholder 1"/>
+          <p:cNvSpPr>
+            <a:spLocks noGrp="1" noRot="1" noChangeAspect="1"/>
+          </p:cNvSpPr>
+          <p:nvPr>
+            <p:ph type="sldImg"/>
+          </p:nvPr>
+        </p:nvSpPr>
+        <p:spPr/>
+      </p:sp>
+      <p:sp>
+        <p:nvSpPr>
+          <p:cNvPr id="3" name="Notes Placeholder 2"/>
+          <p:cNvSpPr>
+            <a:spLocks noGrp="1"/>
+          </p:cNvSpPr>
+          <p:nvPr>
+            <p:ph type="body" idx="1"/>
+          </p:nvPr>
+        </p:nvSpPr>
+        <p:spPr/>
+        <p:txBody>
+          <a:bodyPr/>
+          <a:lstStyle/>
+          <a:p>
+            <a:r>
+              <a:rPr lang="en-US" dirty="0"/>
+              <a:t/>
+            </a:r>
+            <a:endParaRPr lang="en-US" dirty="0"/>
+          </a:p>
+        </p:txBody>
+      </p:sp>
+      <p:sp>
+        <p:nvSpPr>
+          <p:cNvPr id="4" name="Slide Number Placeholder 3"/>
+          <p:cNvSpPr>
+            <a:spLocks noGrp="1"/>
+          </p:cNvSpPr>
+          <p:nvPr>
+            <p:ph type="sldNum" sz="quarter" idx="10"/>
+          </p:nvPr>
+        </p:nvSpPr>
+        <p:spPr/>
+        <p:txBody>
+          <a:bodyPr/>
+          <a:lstStyle/>
+          <a:p>
+            <a:fld id="{F7021451-1387-4CA6-816F-3879F97B5CBC}" type="slidenum">
+              <a:rPr lang="en-US"/>
+              <a:t>18</a:t>
+            </a:fld>
+            <a:endParaRPr lang="en-US"/>
+          </a:p>
+        </p:txBody>
+      </p:sp>
+    </p:spTree>
+    <p:extLst>
+      <p:ext uri="{BB962C8B-B14F-4D97-AF65-F5344CB8AC3E}">
+        <p14:creationId xmlns:p14="http://schemas.microsoft.com/office/powerpoint/2010/main" val="1024086991"/>
+      </p:ext>
+    </p:extLst>
+  </p:cSld>
+  <p:clrMapOvr>
+    <a:masterClrMapping/>
+  </p:clrMapOvr>
+</p:notes>
+</file>
+
+<file path=ppt/notesSlides/notesSlide19.xml><?xml version="1.0" encoding="utf-8"?>
+<p:notes xmlns:a="http://schemas.openxmlformats.org/drawingml/2006/main" xmlns:r="http://schemas.openxmlformats.org/officeDocument/2006/relationships" xmlns:p="http://schemas.openxmlformats.org/presentationml/2006/main">
+  <p:cSld>
+    <p:spTree>
+      <p:nvGrpSpPr>
+        <p:cNvPr id="1" name=""/>
+        <p:cNvGrpSpPr/>
+        <p:nvPr/>
+      </p:nvGrpSpPr>
+      <p:grpSpPr>
+        <a:xfrm>
+          <a:off x="0" y="0"/>
+          <a:ext cx="0" cy="0"/>
+          <a:chOff x="0" y="0"/>
+          <a:chExt cx="0" cy="0"/>
+        </a:xfrm>
+      </p:grpSpPr>
+      <p:sp>
+        <p:nvSpPr>
+          <p:cNvPr id="2" name="Slide Image Placeholder 1"/>
+          <p:cNvSpPr>
+            <a:spLocks noGrp="1" noRot="1" noChangeAspect="1"/>
+          </p:cNvSpPr>
+          <p:nvPr>
+            <p:ph type="sldImg"/>
+          </p:nvPr>
+        </p:nvSpPr>
+        <p:spPr/>
+      </p:sp>
+      <p:sp>
+        <p:nvSpPr>
+          <p:cNvPr id="3" name="Notes Placeholder 2"/>
+          <p:cNvSpPr>
+            <a:spLocks noGrp="1"/>
+          </p:cNvSpPr>
+          <p:nvPr>
+            <p:ph type="body" idx="1"/>
+          </p:nvPr>
+        </p:nvSpPr>
+        <p:spPr/>
+        <p:txBody>
+          <a:bodyPr/>
+          <a:lstStyle/>
+          <a:p>
+            <a:r>
+              <a:rPr lang="en-US" dirty="0"/>
+              <a:t/>
+            </a:r>
+            <a:endParaRPr lang="en-US" dirty="0"/>
+          </a:p>
+        </p:txBody>
+      </p:sp>
+      <p:sp>
+        <p:nvSpPr>
+          <p:cNvPr id="4" name="Slide Number Placeholder 3"/>
+          <p:cNvSpPr>
+            <a:spLocks noGrp="1"/>
+          </p:cNvSpPr>
+          <p:nvPr>
+            <p:ph type="sldNum" sz="quarter" idx="10"/>
+          </p:nvPr>
+        </p:nvSpPr>
+        <p:spPr/>
+        <p:txBody>
+          <a:bodyPr/>
+          <a:lstStyle/>
+          <a:p>
+            <a:fld id="{F7021451-1387-4CA6-816F-3879F97B5CBC}" type="slidenum">
+              <a:rPr lang="en-US"/>
+              <a:t>19</a:t>
+            </a:fld>
+            <a:endParaRPr lang="en-US"/>
+          </a:p>
+        </p:txBody>
+      </p:sp>
+    </p:spTree>
+    <p:extLst>
+      <p:ext uri="{BB962C8B-B14F-4D97-AF65-F5344CB8AC3E}">
+        <p14:creationId xmlns:p14="http://schemas.microsoft.com/office/powerpoint/2010/main" val="1024086991"/>
+      </p:ext>
+    </p:extLst>
+  </p:cSld>
+  <p:clrMapOvr>
+    <a:masterClrMapping/>
+  </p:clrMapOvr>
+</p:notes>
+</file>
+
 <file path=ppt/notesSlides/notesSlide2.xml><?xml version="1.0" encoding="utf-8"?>
 <p:notes xmlns:a="http://schemas.openxmlformats.org/drawingml/2006/main" xmlns:r="http://schemas.openxmlformats.org/officeDocument/2006/relationships" xmlns:p="http://schemas.openxmlformats.org/presentationml/2006/main">
   <p:cSld>
@@ -800,6 +1516,358 @@
             <a:fld id="{F7021451-1387-4CA6-816F-3879F97B5CBC}" type="slidenum">
               <a:rPr lang="en-US"/>
               <a:t>2</a:t>
+            </a:fld>
+            <a:endParaRPr lang="en-US"/>
+          </a:p>
+        </p:txBody>
+      </p:sp>
+    </p:spTree>
+    <p:extLst>
+      <p:ext uri="{BB962C8B-B14F-4D97-AF65-F5344CB8AC3E}">
+        <p14:creationId xmlns:p14="http://schemas.microsoft.com/office/powerpoint/2010/main" val="1024086991"/>
+      </p:ext>
+    </p:extLst>
+  </p:cSld>
+  <p:clrMapOvr>
+    <a:masterClrMapping/>
+  </p:clrMapOvr>
+</p:notes>
+</file>
+
+<file path=ppt/notesSlides/notesSlide20.xml><?xml version="1.0" encoding="utf-8"?>
+<p:notes xmlns:a="http://schemas.openxmlformats.org/drawingml/2006/main" xmlns:r="http://schemas.openxmlformats.org/officeDocument/2006/relationships" xmlns:p="http://schemas.openxmlformats.org/presentationml/2006/main">
+  <p:cSld>
+    <p:spTree>
+      <p:nvGrpSpPr>
+        <p:cNvPr id="1" name=""/>
+        <p:cNvGrpSpPr/>
+        <p:nvPr/>
+      </p:nvGrpSpPr>
+      <p:grpSpPr>
+        <a:xfrm>
+          <a:off x="0" y="0"/>
+          <a:ext cx="0" cy="0"/>
+          <a:chOff x="0" y="0"/>
+          <a:chExt cx="0" cy="0"/>
+        </a:xfrm>
+      </p:grpSpPr>
+      <p:sp>
+        <p:nvSpPr>
+          <p:cNvPr id="2" name="Slide Image Placeholder 1"/>
+          <p:cNvSpPr>
+            <a:spLocks noGrp="1" noRot="1" noChangeAspect="1"/>
+          </p:cNvSpPr>
+          <p:nvPr>
+            <p:ph type="sldImg"/>
+          </p:nvPr>
+        </p:nvSpPr>
+        <p:spPr/>
+      </p:sp>
+      <p:sp>
+        <p:nvSpPr>
+          <p:cNvPr id="3" name="Notes Placeholder 2"/>
+          <p:cNvSpPr>
+            <a:spLocks noGrp="1"/>
+          </p:cNvSpPr>
+          <p:nvPr>
+            <p:ph type="body" idx="1"/>
+          </p:nvPr>
+        </p:nvSpPr>
+        <p:spPr/>
+        <p:txBody>
+          <a:bodyPr/>
+          <a:lstStyle/>
+          <a:p>
+            <a:r>
+              <a:rPr lang="en-US" dirty="0"/>
+              <a:t/>
+            </a:r>
+            <a:endParaRPr lang="en-US" dirty="0"/>
+          </a:p>
+        </p:txBody>
+      </p:sp>
+      <p:sp>
+        <p:nvSpPr>
+          <p:cNvPr id="4" name="Slide Number Placeholder 3"/>
+          <p:cNvSpPr>
+            <a:spLocks noGrp="1"/>
+          </p:cNvSpPr>
+          <p:nvPr>
+            <p:ph type="sldNum" sz="quarter" idx="10"/>
+          </p:nvPr>
+        </p:nvSpPr>
+        <p:spPr/>
+        <p:txBody>
+          <a:bodyPr/>
+          <a:lstStyle/>
+          <a:p>
+            <a:fld id="{F7021451-1387-4CA6-816F-3879F97B5CBC}" type="slidenum">
+              <a:rPr lang="en-US"/>
+              <a:t>20</a:t>
+            </a:fld>
+            <a:endParaRPr lang="en-US"/>
+          </a:p>
+        </p:txBody>
+      </p:sp>
+    </p:spTree>
+    <p:extLst>
+      <p:ext uri="{BB962C8B-B14F-4D97-AF65-F5344CB8AC3E}">
+        <p14:creationId xmlns:p14="http://schemas.microsoft.com/office/powerpoint/2010/main" val="1024086991"/>
+      </p:ext>
+    </p:extLst>
+  </p:cSld>
+  <p:clrMapOvr>
+    <a:masterClrMapping/>
+  </p:clrMapOvr>
+</p:notes>
+</file>
+
+<file path=ppt/notesSlides/notesSlide21.xml><?xml version="1.0" encoding="utf-8"?>
+<p:notes xmlns:a="http://schemas.openxmlformats.org/drawingml/2006/main" xmlns:r="http://schemas.openxmlformats.org/officeDocument/2006/relationships" xmlns:p="http://schemas.openxmlformats.org/presentationml/2006/main">
+  <p:cSld>
+    <p:spTree>
+      <p:nvGrpSpPr>
+        <p:cNvPr id="1" name=""/>
+        <p:cNvGrpSpPr/>
+        <p:nvPr/>
+      </p:nvGrpSpPr>
+      <p:grpSpPr>
+        <a:xfrm>
+          <a:off x="0" y="0"/>
+          <a:ext cx="0" cy="0"/>
+          <a:chOff x="0" y="0"/>
+          <a:chExt cx="0" cy="0"/>
+        </a:xfrm>
+      </p:grpSpPr>
+      <p:sp>
+        <p:nvSpPr>
+          <p:cNvPr id="2" name="Slide Image Placeholder 1"/>
+          <p:cNvSpPr>
+            <a:spLocks noGrp="1" noRot="1" noChangeAspect="1"/>
+          </p:cNvSpPr>
+          <p:nvPr>
+            <p:ph type="sldImg"/>
+          </p:nvPr>
+        </p:nvSpPr>
+        <p:spPr/>
+      </p:sp>
+      <p:sp>
+        <p:nvSpPr>
+          <p:cNvPr id="3" name="Notes Placeholder 2"/>
+          <p:cNvSpPr>
+            <a:spLocks noGrp="1"/>
+          </p:cNvSpPr>
+          <p:nvPr>
+            <p:ph type="body" idx="1"/>
+          </p:nvPr>
+        </p:nvSpPr>
+        <p:spPr/>
+        <p:txBody>
+          <a:bodyPr/>
+          <a:lstStyle/>
+          <a:p>
+            <a:r>
+              <a:rPr lang="en-US" dirty="0"/>
+              <a:t/>
+            </a:r>
+            <a:endParaRPr lang="en-US" dirty="0"/>
+          </a:p>
+        </p:txBody>
+      </p:sp>
+      <p:sp>
+        <p:nvSpPr>
+          <p:cNvPr id="4" name="Slide Number Placeholder 3"/>
+          <p:cNvSpPr>
+            <a:spLocks noGrp="1"/>
+          </p:cNvSpPr>
+          <p:nvPr>
+            <p:ph type="sldNum" sz="quarter" idx="10"/>
+          </p:nvPr>
+        </p:nvSpPr>
+        <p:spPr/>
+        <p:txBody>
+          <a:bodyPr/>
+          <a:lstStyle/>
+          <a:p>
+            <a:fld id="{F7021451-1387-4CA6-816F-3879F97B5CBC}" type="slidenum">
+              <a:rPr lang="en-US"/>
+              <a:t>21</a:t>
+            </a:fld>
+            <a:endParaRPr lang="en-US"/>
+          </a:p>
+        </p:txBody>
+      </p:sp>
+    </p:spTree>
+    <p:extLst>
+      <p:ext uri="{BB962C8B-B14F-4D97-AF65-F5344CB8AC3E}">
+        <p14:creationId xmlns:p14="http://schemas.microsoft.com/office/powerpoint/2010/main" val="1024086991"/>
+      </p:ext>
+    </p:extLst>
+  </p:cSld>
+  <p:clrMapOvr>
+    <a:masterClrMapping/>
+  </p:clrMapOvr>
+</p:notes>
+</file>
+
+<file path=ppt/notesSlides/notesSlide22.xml><?xml version="1.0" encoding="utf-8"?>
+<p:notes xmlns:a="http://schemas.openxmlformats.org/drawingml/2006/main" xmlns:r="http://schemas.openxmlformats.org/officeDocument/2006/relationships" xmlns:p="http://schemas.openxmlformats.org/presentationml/2006/main">
+  <p:cSld>
+    <p:spTree>
+      <p:nvGrpSpPr>
+        <p:cNvPr id="1" name=""/>
+        <p:cNvGrpSpPr/>
+        <p:nvPr/>
+      </p:nvGrpSpPr>
+      <p:grpSpPr>
+        <a:xfrm>
+          <a:off x="0" y="0"/>
+          <a:ext cx="0" cy="0"/>
+          <a:chOff x="0" y="0"/>
+          <a:chExt cx="0" cy="0"/>
+        </a:xfrm>
+      </p:grpSpPr>
+      <p:sp>
+        <p:nvSpPr>
+          <p:cNvPr id="2" name="Slide Image Placeholder 1"/>
+          <p:cNvSpPr>
+            <a:spLocks noGrp="1" noRot="1" noChangeAspect="1"/>
+          </p:cNvSpPr>
+          <p:nvPr>
+            <p:ph type="sldImg"/>
+          </p:nvPr>
+        </p:nvSpPr>
+        <p:spPr/>
+      </p:sp>
+      <p:sp>
+        <p:nvSpPr>
+          <p:cNvPr id="3" name="Notes Placeholder 2"/>
+          <p:cNvSpPr>
+            <a:spLocks noGrp="1"/>
+          </p:cNvSpPr>
+          <p:nvPr>
+            <p:ph type="body" idx="1"/>
+          </p:nvPr>
+        </p:nvSpPr>
+        <p:spPr/>
+        <p:txBody>
+          <a:bodyPr/>
+          <a:lstStyle/>
+          <a:p>
+            <a:r>
+              <a:rPr lang="en-US" dirty="0"/>
+              <a:t/>
+            </a:r>
+            <a:endParaRPr lang="en-US" dirty="0"/>
+          </a:p>
+        </p:txBody>
+      </p:sp>
+      <p:sp>
+        <p:nvSpPr>
+          <p:cNvPr id="4" name="Slide Number Placeholder 3"/>
+          <p:cNvSpPr>
+            <a:spLocks noGrp="1"/>
+          </p:cNvSpPr>
+          <p:nvPr>
+            <p:ph type="sldNum" sz="quarter" idx="10"/>
+          </p:nvPr>
+        </p:nvSpPr>
+        <p:spPr/>
+        <p:txBody>
+          <a:bodyPr/>
+          <a:lstStyle/>
+          <a:p>
+            <a:fld id="{F7021451-1387-4CA6-816F-3879F97B5CBC}" type="slidenum">
+              <a:rPr lang="en-US"/>
+              <a:t>22</a:t>
+            </a:fld>
+            <a:endParaRPr lang="en-US"/>
+          </a:p>
+        </p:txBody>
+      </p:sp>
+    </p:spTree>
+    <p:extLst>
+      <p:ext uri="{BB962C8B-B14F-4D97-AF65-F5344CB8AC3E}">
+        <p14:creationId xmlns:p14="http://schemas.microsoft.com/office/powerpoint/2010/main" val="1024086991"/>
+      </p:ext>
+    </p:extLst>
+  </p:cSld>
+  <p:clrMapOvr>
+    <a:masterClrMapping/>
+  </p:clrMapOvr>
+</p:notes>
+</file>
+
+<file path=ppt/notesSlides/notesSlide23.xml><?xml version="1.0" encoding="utf-8"?>
+<p:notes xmlns:a="http://schemas.openxmlformats.org/drawingml/2006/main" xmlns:r="http://schemas.openxmlformats.org/officeDocument/2006/relationships" xmlns:p="http://schemas.openxmlformats.org/presentationml/2006/main">
+  <p:cSld>
+    <p:spTree>
+      <p:nvGrpSpPr>
+        <p:cNvPr id="1" name=""/>
+        <p:cNvGrpSpPr/>
+        <p:nvPr/>
+      </p:nvGrpSpPr>
+      <p:grpSpPr>
+        <a:xfrm>
+          <a:off x="0" y="0"/>
+          <a:ext cx="0" cy="0"/>
+          <a:chOff x="0" y="0"/>
+          <a:chExt cx="0" cy="0"/>
+        </a:xfrm>
+      </p:grpSpPr>
+      <p:sp>
+        <p:nvSpPr>
+          <p:cNvPr id="2" name="Slide Image Placeholder 1"/>
+          <p:cNvSpPr>
+            <a:spLocks noGrp="1" noRot="1" noChangeAspect="1"/>
+          </p:cNvSpPr>
+          <p:nvPr>
+            <p:ph type="sldImg"/>
+          </p:nvPr>
+        </p:nvSpPr>
+        <p:spPr/>
+      </p:sp>
+      <p:sp>
+        <p:nvSpPr>
+          <p:cNvPr id="3" name="Notes Placeholder 2"/>
+          <p:cNvSpPr>
+            <a:spLocks noGrp="1"/>
+          </p:cNvSpPr>
+          <p:nvPr>
+            <p:ph type="body" idx="1"/>
+          </p:nvPr>
+        </p:nvSpPr>
+        <p:spPr/>
+        <p:txBody>
+          <a:bodyPr/>
+          <a:lstStyle/>
+          <a:p>
+            <a:r>
+              <a:rPr lang="en-US" dirty="0"/>
+              <a:t/>
+            </a:r>
+            <a:endParaRPr lang="en-US" dirty="0"/>
+          </a:p>
+        </p:txBody>
+      </p:sp>
+      <p:sp>
+        <p:nvSpPr>
+          <p:cNvPr id="4" name="Slide Number Placeholder 3"/>
+          <p:cNvSpPr>
+            <a:spLocks noGrp="1"/>
+          </p:cNvSpPr>
+          <p:nvPr>
+            <p:ph type="sldNum" sz="quarter" idx="10"/>
+          </p:nvPr>
+        </p:nvSpPr>
+        <p:spPr/>
+        <p:txBody>
+          <a:bodyPr/>
+          <a:lstStyle/>
+          <a:p>
+            <a:fld id="{F7021451-1387-4CA6-816F-3879F97B5CBC}" type="slidenum">
+              <a:rPr lang="en-US"/>
+              <a:t>23</a:t>
             </a:fld>
             <a:endParaRPr lang="en-US"/>
           </a:p>
@@ -2057,148 +3125,6 @@
         </p:nvSpPr>
         <p:spPr>
           <a:xfrm>
-            <a:off x="406301" y="1223963"/>
-            <a:ext cx="8498026" cy="274290"/>
-          </a:xfrm>
-          <a:prstGeom prst="rect">
-            <a:avLst/>
-          </a:prstGeom>
-          <a:noFill/>
-          <a:ln/>
-        </p:spPr>
-        <p:txBody>
-          <a:bodyPr wrap="square" lIns="0" tIns="0" rIns="0" bIns="0" rtlCol="0" anchor="t"/>
-          <a:lstStyle/>
-          <a:p>
-            <a:pPr algn="l" indent="0" marL="0">
-              <a:lnSpc>
-                <a:spcPts val="2160"/>
-              </a:lnSpc>
-              <a:spcBef>
-                <a:spcPts val="600"/>
-              </a:spcBef>
-              <a:spcAft>
-                <a:spcPts val="800"/>
-              </a:spcAft>
-              <a:buNone/>
-            </a:pPr>
-            <a:r>
-              <a:rPr lang="en-US" sz="1800" b="1" dirty="0">
-                <a:solidFill>
-                  <a:srgbClr val="FE4447"/>
-                </a:solidFill>
-                <a:latin typeface="Georgia" pitchFamily="34" charset="0"/>
-                <a:ea typeface="Georgia" pitchFamily="34" charset="-122"/>
-                <a:cs typeface="Georgia" pitchFamily="34" charset="-120"/>
-              </a:rPr>
-              <a:t>Learning objective</a:t>
-            </a:r>
-            <a:endParaRPr lang="en-US" sz="1800" dirty="0"/>
-          </a:p>
-        </p:txBody>
-      </p:sp>
-      <p:sp>
-        <p:nvSpPr>
-          <p:cNvPr id="6" name="Text 4"/>
-          <p:cNvSpPr/>
-          <p:nvPr/>
-        </p:nvSpPr>
-        <p:spPr>
-          <a:xfrm>
-            <a:off x="406301" y="1637854"/>
-            <a:ext cx="8498026" cy="426541"/>
-          </a:xfrm>
-          <a:prstGeom prst="rect">
-            <a:avLst/>
-          </a:prstGeom>
-          <a:noFill/>
-          <a:ln/>
-        </p:spPr>
-        <p:txBody>
-          <a:bodyPr wrap="square" lIns="0" tIns="0" rIns="0" bIns="0" rtlCol="0" anchor="t"/>
-          <a:lstStyle/>
-          <a:p>
-            <a:pPr algn="l" indent="0" marL="0">
-              <a:lnSpc>
-                <a:spcPts val="1680"/>
-              </a:lnSpc>
-              <a:spcBef>
-                <a:spcPts val="300"/>
-              </a:spcBef>
-              <a:spcAft>
-                <a:spcPts val="300"/>
-              </a:spcAft>
-              <a:buNone/>
-            </a:pPr>
-            <a:r>
-              <a:rPr lang="en-US" sz="1200" dirty="0">
-                <a:solidFill>
-                  <a:srgbClr val="1C2833"/>
-                </a:solidFill>
-                <a:latin typeface="Arial" pitchFamily="34" charset="0"/>
-                <a:ea typeface="Arial" pitchFamily="34" charset="-122"/>
-                <a:cs typeface="Arial" pitchFamily="34" charset="-120"/>
-              </a:rPr>
-              <a:t>By the end of this lesson, students will name at least 5 of Tirthaji's 16 sūtras, explain in 2–3 sentences when and by whom </a:t>
-            </a:r>
-            <a:pPr algn="l" indent="0" marL="0">
-              <a:lnSpc>
-                <a:spcPts val="1680"/>
-              </a:lnSpc>
-              <a:spcBef>
-                <a:spcPts val="300"/>
-              </a:spcBef>
-              <a:spcAft>
-                <a:spcPts val="300"/>
-              </a:spcAft>
-              <a:buNone/>
-            </a:pPr>
-            <a:r>
-              <a:rPr lang="en-US" sz="1200" i="1" dirty="0">
-                <a:solidFill>
-                  <a:srgbClr val="1C2833"/>
-                </a:solidFill>
-                <a:latin typeface="Arial" pitchFamily="34" charset="0"/>
-                <a:ea typeface="Arial" pitchFamily="34" charset="-122"/>
-                <a:cs typeface="Arial" pitchFamily="34" charset="-120"/>
-              </a:rPr>
-              <a:t>Vedic Mathematics</a:t>
-            </a:r>
-            <a:pPr algn="l" indent="0" marL="0">
-              <a:lnSpc>
-                <a:spcPts val="1680"/>
-              </a:lnSpc>
-              <a:spcBef>
-                <a:spcPts val="300"/>
-              </a:spcBef>
-              <a:spcAft>
-                <a:spcPts val="300"/>
-              </a:spcAft>
-              <a:buNone/>
-            </a:pPr>
-            <a:r>
-              <a:rPr lang="en-US" sz="1200" dirty="0">
-                <a:solidFill>
-                  <a:srgbClr val="1C2833"/>
-                </a:solidFill>
-                <a:latin typeface="Arial" pitchFamily="34" charset="0"/>
-                <a:ea typeface="Arial" pitchFamily="34" charset="-122"/>
-                <a:cs typeface="Arial" pitchFamily="34" charset="-120"/>
-              </a:rPr>
-              <a:t> was published, and state honestly that the "Vedic" attribution is academically contested.</a:t>
-            </a:r>
-            <a:endParaRPr lang="en-US" sz="1200" dirty="0"/>
-          </a:p>
-        </p:txBody>
-      </p:sp>
-      <p:sp>
-        <p:nvSpPr>
-          <p:cNvPr id="7" name="Text 5"/>
-          <p:cNvSpPr/>
-          <p:nvPr/>
-        </p:nvSpPr>
-        <p:spPr>
-          <a:xfrm>
             <a:off x="406301" y="4434929"/>
             <a:ext cx="8498026" cy="213271"/>
           </a:xfrm>
@@ -2343,7 +3269,7 @@
                 <a:ea typeface="Georgia" pitchFamily="34" charset="-122"/>
                 <a:cs typeface="Georgia" pitchFamily="34" charset="-120"/>
               </a:rPr>
-              <a:t>Teacher notes</a:t>
+              <a:t>Core (25 min) — The 16 sūtras and the provenance question (cont.)</a:t>
             </a:r>
             <a:endParaRPr lang="en-US" sz="1800" dirty="0"/>
           </a:p>
@@ -2357,8 +3283,8 @@
         </p:nvSpPr>
         <p:spPr>
           <a:xfrm>
-            <a:off x="406301" y="870942"/>
-            <a:ext cx="8498026" cy="1279624"/>
+            <a:off x="634901" y="883593"/>
+            <a:ext cx="8102798" cy="281880"/>
           </a:xfrm>
           <a:prstGeom prst="rect">
             <a:avLst/>
@@ -2370,13 +3296,77 @@
           <a:bodyPr wrap="square" lIns="0" tIns="0" rIns="0" bIns="0" rtlCol="0" anchor="t"/>
           <a:lstStyle/>
           <a:p>
-            <a:pPr algn="l" indent="0" marL="0">
-              <a:lnSpc>
-                <a:spcPts val="1680"/>
-              </a:lnSpc>
-              <a:spcBef>
-                <a:spcPts val="300"/>
-              </a:spcBef>
+            <a:pPr algn="l" marL="342900" indent="-342900">
+              <a:lnSpc>
+                <a:spcPts val="1620"/>
+              </a:lnSpc>
+              <a:spcAft>
+                <a:spcPts val="300"/>
+              </a:spcAft>
+              <a:buSzPct val="100000"/>
+              <a:buChar char="•"/>
+            </a:pPr>
+            <a:r>
+              <a:rPr lang="en-US" sz="1200" b="1" dirty="0">
+                <a:solidFill>
+                  <a:srgbClr val="1C2833"/>
+                </a:solidFill>
+                <a:latin typeface="Arial" pitchFamily="34" charset="0"/>
+                <a:ea typeface="Arial" pitchFamily="34" charset="-122"/>
+                <a:cs typeface="Arial" pitchFamily="34" charset="-120"/>
+              </a:rPr>
+              <a:t>Who was Tirthaji?</a:t>
+            </a:r>
+            <a:endParaRPr lang="en-US" sz="1200" dirty="0"/>
+          </a:p>
+        </p:txBody>
+      </p:sp>
+      <p:sp>
+        <p:nvSpPr>
+          <p:cNvPr id="5" name="Text 3"/>
+          <p:cNvSpPr/>
+          <p:nvPr/>
+        </p:nvSpPr>
+        <p:spPr>
+          <a:xfrm>
+            <a:off x="634901" y="1266974"/>
+            <a:ext cx="8102798" cy="1912144"/>
+          </a:xfrm>
+          <a:prstGeom prst="rect">
+            <a:avLst/>
+          </a:prstGeom>
+          <a:noFill/>
+          <a:ln/>
+        </p:spPr>
+        <p:txBody>
+          <a:bodyPr wrap="square" lIns="0" tIns="0" rIns="0" bIns="0" rtlCol="0" anchor="t"/>
+          <a:lstStyle/>
+          <a:p>
+            <a:pPr algn="l" marL="342900" indent="-342900">
+              <a:lnSpc>
+                <a:spcPts val="1620"/>
+              </a:lnSpc>
+              <a:spcAft>
+                <a:spcPts val="300"/>
+              </a:spcAft>
+              <a:buSzPct val="100000"/>
+              <a:buChar char="•"/>
+            </a:pPr>
+            <a:r>
+              <a:rPr lang="en-US" sz="1200" b="1" dirty="0">
+                <a:solidFill>
+                  <a:srgbClr val="1C2833"/>
+                </a:solidFill>
+                <a:latin typeface="Arial" pitchFamily="34" charset="0"/>
+                <a:ea typeface="Arial" pitchFamily="34" charset="-122"/>
+                <a:cs typeface="Arial" pitchFamily="34" charset="-120"/>
+              </a:rPr>
+              <a:t>Bharati Krishna Tirthaji</a:t>
+            </a:r>
+            <a:pPr algn="l" indent="0" marL="0">
+              <a:lnSpc>
+                <a:spcPts val="1620"/>
+              </a:lnSpc>
               <a:spcAft>
                 <a:spcPts val="300"/>
               </a:spcAft>
@@ -2391,15 +3381,255 @@
                 <a:ea typeface="Arial" pitchFamily="34" charset="-122"/>
                 <a:cs typeface="Arial" pitchFamily="34" charset="-120"/>
               </a:rPr>
-              <a:t>– Some students (and their families) believe firmly that the trick is "ancient Vedic mathematics." Honour the belief; don't dismiss it. Frame your position as "the academic consensus is more sceptical, and you'll read the evidence at Senior band." – Avoid civilisational chest-thumping ("ancient Indians knew this before everyone"). The Indian achievement here is the synthesis and clarity of Tirthaji's pedagogical work; that's enough to celebrate without overreach. – Avoid the opposite error too — dismissing the trick as "just Western math with Sanskrit labels." The pedagogical insight (the named patterns, the rhythm) is genuinely Tirthaji's.</a:t>
+              <a:t> (1884–1960). Śaṅkarācārya of Govardhana Maṭha (Puri) — i.e. head of one of the four major Hindu monastic seats founded by Ādi Śaṅkara.</a:t>
             </a:r>
             <a:endParaRPr lang="en-US" sz="1200" dirty="0"/>
           </a:p>
-        </p:txBody>
-      </p:sp>
-      <p:sp>
-        <p:nvSpPr>
-          <p:cNvPr id="5" name="Text 3"/>
+          <a:p>
+            <a:pPr algn="l" marL="342900" indent="-342900">
+              <a:lnSpc>
+                <a:spcPts val="1620"/>
+              </a:lnSpc>
+              <a:spcAft>
+                <a:spcPts val="300"/>
+              </a:spcAft>
+              <a:buSzPct val="100000"/>
+              <a:buChar char="•"/>
+            </a:pPr>
+            <a:r>
+              <a:rPr lang="en-US" sz="1200" dirty="0">
+                <a:solidFill>
+                  <a:srgbClr val="1C2833"/>
+                </a:solidFill>
+                <a:latin typeface="Arial" pitchFamily="34" charset="0"/>
+                <a:ea typeface="Arial" pitchFamily="34" charset="-122"/>
+                <a:cs typeface="Arial" pitchFamily="34" charset="-120"/>
+              </a:rPr>
+              <a:t>Studied at Madras Christian College. Multi-lingual scholar.</a:t>
+            </a:r>
+            <a:endParaRPr lang="en-US" sz="1200" dirty="0"/>
+          </a:p>
+          <a:p>
+            <a:pPr algn="l" marL="342900" indent="-342900">
+              <a:lnSpc>
+                <a:spcPts val="1620"/>
+              </a:lnSpc>
+              <a:spcAft>
+                <a:spcPts val="300"/>
+              </a:spcAft>
+              <a:buSzPct val="100000"/>
+              <a:buChar char="•"/>
+            </a:pPr>
+            <a:r>
+              <a:rPr lang="en-US" sz="1200" dirty="0">
+                <a:solidFill>
+                  <a:srgbClr val="1C2833"/>
+                </a:solidFill>
+                <a:latin typeface="Arial" pitchFamily="34" charset="0"/>
+                <a:ea typeface="Arial" pitchFamily="34" charset="-122"/>
+                <a:cs typeface="Arial" pitchFamily="34" charset="-120"/>
+              </a:rPr>
+              <a:t>Wrote the manuscript of </a:t>
+            </a:r>
+            <a:pPr algn="l" indent="0" marL="0">
+              <a:lnSpc>
+                <a:spcPts val="1620"/>
+              </a:lnSpc>
+              <a:spcAft>
+                <a:spcPts val="300"/>
+              </a:spcAft>
+              <a:buNone/>
+            </a:pPr>
+            <a:r>
+              <a:rPr lang="en-US" sz="1200" i="1" dirty="0">
+                <a:solidFill>
+                  <a:srgbClr val="1C2833"/>
+                </a:solidFill>
+                <a:latin typeface="Arial" pitchFamily="34" charset="0"/>
+                <a:ea typeface="Arial" pitchFamily="34" charset="-122"/>
+                <a:cs typeface="Arial" pitchFamily="34" charset="-120"/>
+              </a:rPr>
+              <a:t>Vedic Mathematics</a:t>
+            </a:r>
+            <a:pPr algn="l" indent="0" marL="0">
+              <a:lnSpc>
+                <a:spcPts val="1620"/>
+              </a:lnSpc>
+              <a:spcAft>
+                <a:spcPts val="300"/>
+              </a:spcAft>
+              <a:buNone/>
+            </a:pPr>
+            <a:r>
+              <a:rPr lang="en-US" sz="1200" dirty="0">
+                <a:solidFill>
+                  <a:srgbClr val="1C2833"/>
+                </a:solidFill>
+                <a:latin typeface="Arial" pitchFamily="34" charset="0"/>
+                <a:ea typeface="Arial" pitchFamily="34" charset="-122"/>
+                <a:cs typeface="Arial" pitchFamily="34" charset="-120"/>
+              </a:rPr>
+              <a:t> sometime between roughly 1911 and 1918 according to its editor's foreword.</a:t>
+            </a:r>
+            <a:endParaRPr lang="en-US" sz="1200" dirty="0"/>
+          </a:p>
+          <a:p>
+            <a:pPr algn="l" marL="342900" indent="-342900">
+              <a:lnSpc>
+                <a:spcPts val="1620"/>
+              </a:lnSpc>
+              <a:spcAft>
+                <a:spcPts val="300"/>
+              </a:spcAft>
+              <a:buSzPct val="100000"/>
+              <a:buChar char="•"/>
+            </a:pPr>
+            <a:r>
+              <a:rPr lang="en-US" sz="1200" dirty="0">
+                <a:solidFill>
+                  <a:srgbClr val="1C2833"/>
+                </a:solidFill>
+                <a:latin typeface="Arial" pitchFamily="34" charset="0"/>
+                <a:ea typeface="Arial" pitchFamily="34" charset="-122"/>
+                <a:cs typeface="Arial" pitchFamily="34" charset="-120"/>
+              </a:rPr>
+              <a:t>The manuscript was lost or unfinished for decades.</a:t>
+            </a:r>
+            <a:endParaRPr lang="en-US" sz="1200" dirty="0"/>
+          </a:p>
+          <a:p>
+            <a:pPr algn="l" marL="342900" indent="-342900">
+              <a:lnSpc>
+                <a:spcPts val="1620"/>
+              </a:lnSpc>
+              <a:spcAft>
+                <a:spcPts val="300"/>
+              </a:spcAft>
+              <a:buSzPct val="100000"/>
+              <a:buChar char="•"/>
+            </a:pPr>
+            <a:r>
+              <a:rPr lang="en-US" sz="1200" dirty="0">
+                <a:solidFill>
+                  <a:srgbClr val="1C2833"/>
+                </a:solidFill>
+                <a:latin typeface="Arial" pitchFamily="34" charset="0"/>
+                <a:ea typeface="Arial" pitchFamily="34" charset="-122"/>
+                <a:cs typeface="Arial" pitchFamily="34" charset="-120"/>
+              </a:rPr>
+              <a:t>Tirthaji </a:t>
+            </a:r>
+            <a:pPr algn="l" indent="0" marL="0">
+              <a:lnSpc>
+                <a:spcPts val="1620"/>
+              </a:lnSpc>
+              <a:spcAft>
+                <a:spcPts val="300"/>
+              </a:spcAft>
+              <a:buNone/>
+            </a:pPr>
+            <a:r>
+              <a:rPr lang="en-US" sz="1200" b="1" dirty="0">
+                <a:solidFill>
+                  <a:srgbClr val="1C2833"/>
+                </a:solidFill>
+                <a:latin typeface="Arial" pitchFamily="34" charset="0"/>
+                <a:ea typeface="Arial" pitchFamily="34" charset="-122"/>
+                <a:cs typeface="Arial" pitchFamily="34" charset="-120"/>
+              </a:rPr>
+              <a:t>died in 1960</a:t>
+            </a:r>
+            <a:pPr algn="l" indent="0" marL="0">
+              <a:lnSpc>
+                <a:spcPts val="1620"/>
+              </a:lnSpc>
+              <a:spcAft>
+                <a:spcPts val="300"/>
+              </a:spcAft>
+              <a:buNone/>
+            </a:pPr>
+            <a:r>
+              <a:rPr lang="en-US" sz="1200" dirty="0">
+                <a:solidFill>
+                  <a:srgbClr val="1C2833"/>
+                </a:solidFill>
+                <a:latin typeface="Arial" pitchFamily="34" charset="0"/>
+                <a:ea typeface="Arial" pitchFamily="34" charset="-122"/>
+                <a:cs typeface="Arial" pitchFamily="34" charset="-120"/>
+              </a:rPr>
+              <a:t>.</a:t>
+            </a:r>
+            <a:endParaRPr lang="en-US" sz="1200" dirty="0"/>
+          </a:p>
+          <a:p>
+            <a:pPr algn="l" marL="342900" indent="-342900">
+              <a:lnSpc>
+                <a:spcPts val="1620"/>
+              </a:lnSpc>
+              <a:spcAft>
+                <a:spcPts val="300"/>
+              </a:spcAft>
+              <a:buSzPct val="100000"/>
+              <a:buChar char="•"/>
+            </a:pPr>
+            <a:r>
+              <a:rPr lang="en-US" sz="1200" dirty="0">
+                <a:solidFill>
+                  <a:srgbClr val="1C2833"/>
+                </a:solidFill>
+                <a:latin typeface="Arial" pitchFamily="34" charset="0"/>
+                <a:ea typeface="Arial" pitchFamily="34" charset="-122"/>
+                <a:cs typeface="Arial" pitchFamily="34" charset="-120"/>
+              </a:rPr>
+              <a:t>The book was </a:t>
+            </a:r>
+            <a:pPr algn="l" indent="0" marL="0">
+              <a:lnSpc>
+                <a:spcPts val="1620"/>
+              </a:lnSpc>
+              <a:spcAft>
+                <a:spcPts val="300"/>
+              </a:spcAft>
+              <a:buNone/>
+            </a:pPr>
+            <a:r>
+              <a:rPr lang="en-US" sz="1200" b="1" dirty="0">
+                <a:solidFill>
+                  <a:srgbClr val="1C2833"/>
+                </a:solidFill>
+                <a:latin typeface="Arial" pitchFamily="34" charset="0"/>
+                <a:ea typeface="Arial" pitchFamily="34" charset="-122"/>
+                <a:cs typeface="Arial" pitchFamily="34" charset="-120"/>
+              </a:rPr>
+              <a:t>published in 1965</a:t>
+            </a:r>
+            <a:pPr algn="l" indent="0" marL="0">
+              <a:lnSpc>
+                <a:spcPts val="1620"/>
+              </a:lnSpc>
+              <a:spcAft>
+                <a:spcPts val="300"/>
+              </a:spcAft>
+              <a:buNone/>
+            </a:pPr>
+            <a:r>
+              <a:rPr lang="en-US" sz="1200" dirty="0">
+                <a:solidFill>
+                  <a:srgbClr val="1C2833"/>
+                </a:solidFill>
+                <a:latin typeface="Arial" pitchFamily="34" charset="0"/>
+                <a:ea typeface="Arial" pitchFamily="34" charset="-122"/>
+                <a:cs typeface="Arial" pitchFamily="34" charset="-120"/>
+              </a:rPr>
+              <a:t>, five years after his death, edited by Vasudev Sharan Agrawala.</a:t>
+            </a:r>
+            <a:endParaRPr lang="en-US" sz="1200" dirty="0"/>
+          </a:p>
+        </p:txBody>
+      </p:sp>
+      <p:sp>
+        <p:nvSpPr>
+          <p:cNvPr id="6" name="Text 4"/>
           <p:cNvSpPr/>
           <p:nvPr/>
         </p:nvSpPr>
@@ -2549,7 +3779,7 @@
                 <a:ea typeface="Georgia" pitchFamily="34" charset="-122"/>
                 <a:cs typeface="Georgia" pitchFamily="34" charset="-120"/>
               </a:rPr>
-              <a:t>Citation(s) used in this lesson</a:t>
+              <a:t>Core (25 min) — The 16 sūtras and the provenance question (cont.)</a:t>
             </a:r>
             <a:endParaRPr lang="en-US" sz="1800" dirty="0"/>
           </a:p>
@@ -2563,8 +3793,8 @@
         </p:nvSpPr>
         <p:spPr>
           <a:xfrm>
-            <a:off x="406301" y="870942"/>
-            <a:ext cx="8498026" cy="426541"/>
+            <a:off x="634901" y="883593"/>
+            <a:ext cx="8102798" cy="487561"/>
           </a:xfrm>
           <a:prstGeom prst="rect">
             <a:avLst/>
@@ -2576,13 +3806,31 @@
           <a:bodyPr wrap="square" lIns="0" tIns="0" rIns="0" bIns="0" rtlCol="0" anchor="t"/>
           <a:lstStyle/>
           <a:p>
-            <a:pPr algn="l" indent="0" marL="0">
-              <a:lnSpc>
-                <a:spcPts val="1680"/>
-              </a:lnSpc>
-              <a:spcBef>
-                <a:spcPts val="300"/>
-              </a:spcBef>
+            <a:pPr algn="l" marL="342900" indent="-342900">
+              <a:lnSpc>
+                <a:spcPts val="1620"/>
+              </a:lnSpc>
+              <a:spcAft>
+                <a:spcPts val="300"/>
+              </a:spcAft>
+              <a:buSzPct val="100000"/>
+              <a:buChar char="•"/>
+            </a:pPr>
+            <a:r>
+              <a:rPr lang="en-US" sz="1200" b="1" dirty="0">
+                <a:solidFill>
+                  <a:srgbClr val="1C2833"/>
+                </a:solidFill>
+                <a:latin typeface="Arial" pitchFamily="34" charset="0"/>
+                <a:ea typeface="Arial" pitchFamily="34" charset="-122"/>
+                <a:cs typeface="Arial" pitchFamily="34" charset="-120"/>
+              </a:rPr>
+              <a:t>The provenance question.</a:t>
+            </a:r>
+            <a:pPr algn="l" indent="0" marL="0">
+              <a:lnSpc>
+                <a:spcPts val="1620"/>
+              </a:lnSpc>
               <a:spcAft>
                 <a:spcPts val="300"/>
               </a:spcAft>
@@ -2597,15 +3845,12 @@
                 <a:ea typeface="Arial" pitchFamily="34" charset="-122"/>
                 <a:cs typeface="Arial" pitchFamily="34" charset="-120"/>
               </a:rPr>
-              <a:t>– Tirthaji, B. K. (1965). </a:t>
-            </a:r>
-            <a:pPr algn="l" indent="0" marL="0">
-              <a:lnSpc>
-                <a:spcPts val="1680"/>
-              </a:lnSpc>
-              <a:spcBef>
-                <a:spcPts val="300"/>
-              </a:spcBef>
+              <a:t> </a:t>
+            </a:r>
+            <a:pPr algn="l" indent="0" marL="0">
+              <a:lnSpc>
+                <a:spcPts val="1620"/>
+              </a:lnSpc>
               <a:spcAft>
                 <a:spcPts val="300"/>
               </a:spcAft>
@@ -2620,15 +3865,12 @@
                 <a:ea typeface="Arial" pitchFamily="34" charset="-122"/>
                 <a:cs typeface="Arial" pitchFamily="34" charset="-120"/>
               </a:rPr>
-              <a:t>Vedic Mathematics</a:t>
-            </a:r>
-            <a:pPr algn="l" indent="0" marL="0">
-              <a:lnSpc>
-                <a:spcPts val="1680"/>
-              </a:lnSpc>
-              <a:spcBef>
-                <a:spcPts val="300"/>
-              </a:spcBef>
+              <a:t>"Tirthaji claimed the 16 sūtras come from a Vedic text called the</a:t>
+            </a:r>
+            <a:pPr algn="l" indent="0" marL="0">
+              <a:lnSpc>
+                <a:spcPts val="1620"/>
+              </a:lnSpc>
               <a:spcAft>
                 <a:spcPts val="300"/>
               </a:spcAft>
@@ -2643,15 +3885,12 @@
                 <a:ea typeface="Arial" pitchFamily="34" charset="-122"/>
                 <a:cs typeface="Arial" pitchFamily="34" charset="-120"/>
               </a:rPr>
-              <a:t>. Motilal Banarsidass. — Sūtra list and preface. – Dani, S. G. (1993). "Myths and Reality: On Vedic Mathematics." Reprinted in </a:t>
-            </a:r>
-            <a:pPr algn="l" indent="0" marL="0">
-              <a:lnSpc>
-                <a:spcPts val="1680"/>
-              </a:lnSpc>
-              <a:spcBef>
-                <a:spcPts val="300"/>
-              </a:spcBef>
+              <a:t> Atharva-veda Pariśiṣṭa </a:t>
+            </a:r>
+            <a:pPr algn="l" indent="0" marL="0">
+              <a:lnSpc>
+                <a:spcPts val="1620"/>
+              </a:lnSpc>
               <a:spcAft>
                 <a:spcPts val="300"/>
               </a:spcAft>
@@ -2666,30 +3905,7 @@
                 <a:ea typeface="Arial" pitchFamily="34" charset="-122"/>
                 <a:cs typeface="Arial" pitchFamily="34" charset="-120"/>
               </a:rPr>
-              <a:t>Resonance</a:t>
-            </a:r>
-            <a:pPr algn="l" indent="0" marL="0">
-              <a:lnSpc>
-                <a:spcPts val="1680"/>
-              </a:lnSpc>
-              <a:spcBef>
-                <a:spcPts val="300"/>
-              </a:spcBef>
-              <a:spcAft>
-                <a:spcPts val="300"/>
-              </a:spcAft>
-              <a:buNone/>
-            </a:pPr>
-            <a:r>
-              <a:rPr lang="en-US" sz="1200" dirty="0">
-                <a:solidFill>
-                  <a:srgbClr val="1C2833"/>
-                </a:solidFill>
-                <a:latin typeface="Arial" pitchFamily="34" charset="0"/>
-                <a:ea typeface="Arial" pitchFamily="34" charset="-122"/>
-                <a:cs typeface="Arial" pitchFamily="34" charset="-120"/>
-              </a:rPr>
-              <a:t> (October 2001).</a:t>
+              <a:t>— a supplement to the Atharva Veda."</a:t>
             </a:r>
             <a:endParaRPr lang="en-US" sz="1200" dirty="0"/>
           </a:p>
@@ -2703,7 +3919,585 @@
         </p:nvSpPr>
         <p:spPr>
           <a:xfrm>
-            <a:off x="634901" y="1386334"/>
+            <a:off x="406301" y="4434929"/>
+            <a:ext cx="8498026" cy="213271"/>
+          </a:xfrm>
+          <a:prstGeom prst="rect">
+            <a:avLst/>
+          </a:prstGeom>
+          <a:noFill/>
+          <a:ln/>
+        </p:spPr>
+        <p:txBody>
+          <a:bodyPr wrap="square" lIns="0" tIns="0" rIns="0" bIns="0" rtlCol="0" anchor="t"/>
+          <a:lstStyle/>
+          <a:p>
+            <a:pPr algn="l" indent="0" marL="0">
+              <a:lnSpc>
+                <a:spcPts val="1680"/>
+              </a:lnSpc>
+              <a:spcBef>
+                <a:spcPts val="300"/>
+              </a:spcBef>
+              <a:spcAft>
+                <a:spcPts val="300"/>
+              </a:spcAft>
+              <a:buNone/>
+            </a:pPr>
+            <a:r>
+              <a:rPr lang="en-US" sz="1200" dirty="0">
+                <a:solidFill>
+                  <a:srgbClr val="1C2833"/>
+                </a:solidFill>
+                <a:latin typeface="Arial" pitchFamily="34" charset="0"/>
+                <a:ea typeface="Arial" pitchFamily="34" charset="-122"/>
+                <a:cs typeface="Arial" pitchFamily="34" charset="-120"/>
+              </a:rPr>
+              <a:t>Middle ·  · IKS Curriculum</a:t>
+            </a:r>
+            <a:endParaRPr lang="en-US" sz="1200" dirty="0"/>
+          </a:p>
+        </p:txBody>
+      </p:sp>
+    </p:spTree>
+  </p:cSld>
+  <p:clrMapOvr>
+    <a:masterClrMapping/>
+  </p:clrMapOvr>
+</p:sld>
+</file>
+
+<file path=ppt/slides/slide12.xml><?xml version="1.0" encoding="utf-8"?>
+<p:sld xmlns:a="http://schemas.openxmlformats.org/drawingml/2006/main" xmlns:r="http://schemas.openxmlformats.org/officeDocument/2006/relationships" xmlns:p="http://schemas.openxmlformats.org/presentationml/2006/main">
+  <p:cSld name="Slide 12">
+    <p:bg>
+      <p:bgPr>
+        <a:solidFill>
+          <a:srgbClr val="FFFFFF"/>
+        </a:solidFill>
+      </p:bgPr>
+    </p:bg>
+    <p:spTree>
+      <p:nvGrpSpPr>
+        <p:cNvPr id="1" name=""/>
+        <p:cNvGrpSpPr/>
+        <p:nvPr/>
+      </p:nvGrpSpPr>
+      <p:grpSpPr>
+        <a:xfrm>
+          <a:off x="0" y="0"/>
+          <a:ext cx="0" cy="0"/>
+          <a:chOff x="0" y="0"/>
+          <a:chExt cx="0" cy="0"/>
+        </a:xfrm>
+      </p:grpSpPr>
+      <p:sp>
+        <p:nvSpPr>
+          <p:cNvPr id="2" name="Text 0"/>
+          <p:cNvSpPr/>
+          <p:nvPr/>
+        </p:nvSpPr>
+        <p:spPr>
+          <a:xfrm>
+            <a:off x="0" y="0"/>
+            <a:ext cx="9144000" cy="101501"/>
+          </a:xfrm>
+          <a:prstGeom prst="rect">
+            <a:avLst/>
+          </a:prstGeom>
+          <a:solidFill>
+            <a:srgbClr val="277884"/>
+          </a:solidFill>
+          <a:ln/>
+        </p:spPr>
+        <p:txBody>
+          <a:bodyPr wrap="square" rtlCol="0" anchor="ctr"/>
+          <a:lstStyle/>
+          <a:p>
+            <a:pPr indent="0" marL="0">
+              <a:buNone/>
+            </a:pPr>
+            <a:endParaRPr lang="en-US" dirty="0"/>
+          </a:p>
+        </p:txBody>
+      </p:sp>
+      <p:sp>
+        <p:nvSpPr>
+          <p:cNvPr id="3" name="Text 1"/>
+          <p:cNvSpPr/>
+          <p:nvPr/>
+        </p:nvSpPr>
+        <p:spPr>
+          <a:xfrm>
+            <a:off x="406301" y="457051"/>
+            <a:ext cx="8498026" cy="274290"/>
+          </a:xfrm>
+          <a:prstGeom prst="rect">
+            <a:avLst/>
+          </a:prstGeom>
+          <a:noFill/>
+          <a:ln/>
+        </p:spPr>
+        <p:txBody>
+          <a:bodyPr wrap="square" lIns="0" tIns="0" rIns="0" bIns="0" rtlCol="0" anchor="t"/>
+          <a:lstStyle/>
+          <a:p>
+            <a:pPr algn="l" indent="0" marL="0">
+              <a:lnSpc>
+                <a:spcPts val="2160"/>
+              </a:lnSpc>
+              <a:spcBef>
+                <a:spcPts val="600"/>
+              </a:spcBef>
+              <a:spcAft>
+                <a:spcPts val="800"/>
+              </a:spcAft>
+              <a:buNone/>
+            </a:pPr>
+            <a:r>
+              <a:rPr lang="en-US" sz="1800" b="1" dirty="0">
+                <a:solidFill>
+                  <a:srgbClr val="FE4447"/>
+                </a:solidFill>
+                <a:latin typeface="Georgia" pitchFamily="34" charset="0"/>
+                <a:ea typeface="Georgia" pitchFamily="34" charset="-122"/>
+                <a:cs typeface="Georgia" pitchFamily="34" charset="-120"/>
+              </a:rPr>
+              <a:t>Core (25 min) — The 16 sūtras and the provenance question (cont.)</a:t>
+            </a:r>
+            <a:endParaRPr lang="en-US" sz="1800" dirty="0"/>
+          </a:p>
+        </p:txBody>
+      </p:sp>
+      <p:sp>
+        <p:nvSpPr>
+          <p:cNvPr id="4" name="Text 2"/>
+          <p:cNvSpPr/>
+          <p:nvPr/>
+        </p:nvSpPr>
+        <p:spPr>
+          <a:xfrm>
+            <a:off x="634901" y="883593"/>
+            <a:ext cx="8102798" cy="1462683"/>
+          </a:xfrm>
+          <a:prstGeom prst="rect">
+            <a:avLst/>
+          </a:prstGeom>
+          <a:noFill/>
+          <a:ln/>
+        </p:spPr>
+        <p:txBody>
+          <a:bodyPr wrap="square" lIns="0" tIns="0" rIns="0" bIns="0" rtlCol="0" anchor="t"/>
+          <a:lstStyle/>
+          <a:p>
+            <a:pPr algn="l" marL="342900" indent="-342900">
+              <a:lnSpc>
+                <a:spcPts val="1620"/>
+              </a:lnSpc>
+              <a:spcAft>
+                <a:spcPts val="300"/>
+              </a:spcAft>
+              <a:buSzPct val="100000"/>
+              <a:buChar char="•"/>
+            </a:pPr>
+            <a:r>
+              <a:rPr lang="en-US" sz="1200" b="1" dirty="0">
+                <a:solidFill>
+                  <a:srgbClr val="1C2833"/>
+                </a:solidFill>
+                <a:latin typeface="Arial" pitchFamily="34" charset="0"/>
+                <a:ea typeface="Arial" pitchFamily="34" charset="-122"/>
+                <a:cs typeface="Arial" pitchFamily="34" charset="-120"/>
+              </a:rPr>
+              <a:t>The problem:</a:t>
+            </a:r>
+            <a:pPr algn="l" indent="0" marL="0">
+              <a:lnSpc>
+                <a:spcPts val="1620"/>
+              </a:lnSpc>
+              <a:spcAft>
+                <a:spcPts val="300"/>
+              </a:spcAft>
+              <a:buNone/>
+            </a:pPr>
+            <a:r>
+              <a:rPr lang="en-US" sz="1200" dirty="0">
+                <a:solidFill>
+                  <a:srgbClr val="1C2833"/>
+                </a:solidFill>
+                <a:latin typeface="Arial" pitchFamily="34" charset="0"/>
+                <a:ea typeface="Arial" pitchFamily="34" charset="-122"/>
+                <a:cs typeface="Arial" pitchFamily="34" charset="-120"/>
+              </a:rPr>
+              <a:t> No other Sanskritist has produced a manuscript of this </a:t>
+            </a:r>
+            <a:pPr algn="l" indent="0" marL="0">
+              <a:lnSpc>
+                <a:spcPts val="1620"/>
+              </a:lnSpc>
+              <a:spcAft>
+                <a:spcPts val="300"/>
+              </a:spcAft>
+              <a:buNone/>
+            </a:pPr>
+            <a:r>
+              <a:rPr lang="en-US" sz="1200" i="1" dirty="0">
+                <a:solidFill>
+                  <a:srgbClr val="1C2833"/>
+                </a:solidFill>
+                <a:latin typeface="Arial" pitchFamily="34" charset="0"/>
+                <a:ea typeface="Arial" pitchFamily="34" charset="-122"/>
+                <a:cs typeface="Arial" pitchFamily="34" charset="-120"/>
+              </a:rPr>
+              <a:t>Pariśiṣṭa</a:t>
+            </a:r>
+            <a:pPr algn="l" indent="0" marL="0">
+              <a:lnSpc>
+                <a:spcPts val="1620"/>
+              </a:lnSpc>
+              <a:spcAft>
+                <a:spcPts val="300"/>
+              </a:spcAft>
+              <a:buNone/>
+            </a:pPr>
+            <a:r>
+              <a:rPr lang="en-US" sz="1200" dirty="0">
+                <a:solidFill>
+                  <a:srgbClr val="1C2833"/>
+                </a:solidFill>
+                <a:latin typeface="Arial" pitchFamily="34" charset="0"/>
+                <a:ea typeface="Arial" pitchFamily="34" charset="-122"/>
+                <a:cs typeface="Arial" pitchFamily="34" charset="-120"/>
+              </a:rPr>
+              <a:t> containing these 16 sūtras.</a:t>
+            </a:r>
+            <a:endParaRPr lang="en-US" sz="1200" dirty="0"/>
+          </a:p>
+          <a:p>
+            <a:pPr algn="l" marL="342900" indent="-342900">
+              <a:lnSpc>
+                <a:spcPts val="1620"/>
+              </a:lnSpc>
+              <a:spcAft>
+                <a:spcPts val="300"/>
+              </a:spcAft>
+              <a:buSzPct val="100000"/>
+              <a:buChar char="•"/>
+            </a:pPr>
+            <a:r>
+              <a:rPr lang="en-US" sz="1200" b="1" dirty="0">
+                <a:solidFill>
+                  <a:srgbClr val="1C2833"/>
+                </a:solidFill>
+                <a:latin typeface="Arial" pitchFamily="34" charset="0"/>
+                <a:ea typeface="Arial" pitchFamily="34" charset="-122"/>
+                <a:cs typeface="Arial" pitchFamily="34" charset="-120"/>
+              </a:rPr>
+              <a:t>The mathematician S. G. Dani</a:t>
+            </a:r>
+            <a:pPr algn="l" indent="0" marL="0">
+              <a:lnSpc>
+                <a:spcPts val="1620"/>
+              </a:lnSpc>
+              <a:spcAft>
+                <a:spcPts val="300"/>
+              </a:spcAft>
+              <a:buNone/>
+            </a:pPr>
+            <a:r>
+              <a:rPr lang="en-US" sz="1200" dirty="0">
+                <a:solidFill>
+                  <a:srgbClr val="1C2833"/>
+                </a:solidFill>
+                <a:latin typeface="Arial" pitchFamily="34" charset="0"/>
+                <a:ea typeface="Arial" pitchFamily="34" charset="-122"/>
+                <a:cs typeface="Arial" pitchFamily="34" charset="-120"/>
+              </a:rPr>
+              <a:t> (TIFR, IIT Bombay) wrote a careful critique in 1993, reprinted in </a:t>
+            </a:r>
+            <a:pPr algn="l" indent="0" marL="0">
+              <a:lnSpc>
+                <a:spcPts val="1620"/>
+              </a:lnSpc>
+              <a:spcAft>
+                <a:spcPts val="300"/>
+              </a:spcAft>
+              <a:buNone/>
+            </a:pPr>
+            <a:r>
+              <a:rPr lang="en-US" sz="1200" i="1" dirty="0">
+                <a:solidFill>
+                  <a:srgbClr val="1C2833"/>
+                </a:solidFill>
+                <a:latin typeface="Arial" pitchFamily="34" charset="0"/>
+                <a:ea typeface="Arial" pitchFamily="34" charset="-122"/>
+                <a:cs typeface="Arial" pitchFamily="34" charset="-120"/>
+              </a:rPr>
+              <a:t>Resonance</a:t>
+            </a:r>
+            <a:pPr algn="l" indent="0" marL="0">
+              <a:lnSpc>
+                <a:spcPts val="1620"/>
+              </a:lnSpc>
+              <a:spcAft>
+                <a:spcPts val="300"/>
+              </a:spcAft>
+              <a:buNone/>
+            </a:pPr>
+            <a:r>
+              <a:rPr lang="en-US" sz="1200" dirty="0">
+                <a:solidFill>
+                  <a:srgbClr val="1C2833"/>
+                </a:solidFill>
+                <a:latin typeface="Arial" pitchFamily="34" charset="0"/>
+                <a:ea typeface="Arial" pitchFamily="34" charset="-122"/>
+                <a:cs typeface="Arial" pitchFamily="34" charset="-120"/>
+              </a:rPr>
+              <a:t> (October 2001), pointing out:</a:t>
+            </a:r>
+            <a:endParaRPr lang="en-US" sz="1200" dirty="0"/>
+          </a:p>
+          <a:p>
+            <a:pPr algn="l" marL="342900" indent="-342900">
+              <a:lnSpc>
+                <a:spcPts val="1620"/>
+              </a:lnSpc>
+              <a:spcAft>
+                <a:spcPts val="300"/>
+              </a:spcAft>
+              <a:buSzPct val="100000"/>
+              <a:buChar char="•"/>
+            </a:pPr>
+            <a:r>
+              <a:rPr lang="en-US" sz="1200" dirty="0">
+                <a:solidFill>
+                  <a:srgbClr val="1C2833"/>
+                </a:solidFill>
+                <a:latin typeface="Arial" pitchFamily="34" charset="0"/>
+                <a:ea typeface="Arial" pitchFamily="34" charset="-122"/>
+                <a:cs typeface="Arial" pitchFamily="34" charset="-120"/>
+              </a:rPr>
+              <a:t>No manuscript evidence.</a:t>
+            </a:r>
+            <a:endParaRPr lang="en-US" sz="1200" dirty="0"/>
+          </a:p>
+          <a:p>
+            <a:pPr algn="l" marL="342900" indent="-342900">
+              <a:lnSpc>
+                <a:spcPts val="1620"/>
+              </a:lnSpc>
+              <a:spcAft>
+                <a:spcPts val="300"/>
+              </a:spcAft>
+              <a:buSzPct val="100000"/>
+              <a:buChar char="•"/>
+            </a:pPr>
+            <a:r>
+              <a:rPr lang="en-US" sz="1200" dirty="0">
+                <a:solidFill>
+                  <a:srgbClr val="1C2833"/>
+                </a:solidFill>
+                <a:latin typeface="Arial" pitchFamily="34" charset="0"/>
+                <a:ea typeface="Arial" pitchFamily="34" charset="-122"/>
+                <a:cs typeface="Arial" pitchFamily="34" charset="-120"/>
+              </a:rPr>
+              <a:t>The Sanskrit style of the sūtras is more recent than Vedic.</a:t>
+            </a:r>
+            <a:endParaRPr lang="en-US" sz="1200" dirty="0"/>
+          </a:p>
+          <a:p>
+            <a:pPr algn="l" marL="342900" indent="-342900">
+              <a:lnSpc>
+                <a:spcPts val="1620"/>
+              </a:lnSpc>
+              <a:spcAft>
+                <a:spcPts val="300"/>
+              </a:spcAft>
+              <a:buSzPct val="100000"/>
+              <a:buChar char="•"/>
+            </a:pPr>
+            <a:r>
+              <a:rPr lang="en-US" sz="1200" dirty="0">
+                <a:solidFill>
+                  <a:srgbClr val="1C2833"/>
+                </a:solidFill>
+                <a:latin typeface="Arial" pitchFamily="34" charset="0"/>
+                <a:ea typeface="Arial" pitchFamily="34" charset="-122"/>
+                <a:cs typeface="Arial" pitchFamily="34" charset="-120"/>
+              </a:rPr>
+              <a:t>The mathematical techniques have 19th–20th century parallels.</a:t>
+            </a:r>
+            <a:endParaRPr lang="en-US" sz="1200" dirty="0"/>
+          </a:p>
+        </p:txBody>
+      </p:sp>
+      <p:sp>
+        <p:nvSpPr>
+          <p:cNvPr id="5" name="Text 3"/>
+          <p:cNvSpPr/>
+          <p:nvPr/>
+        </p:nvSpPr>
+        <p:spPr>
+          <a:xfrm>
+            <a:off x="406301" y="4434929"/>
+            <a:ext cx="8498026" cy="213271"/>
+          </a:xfrm>
+          <a:prstGeom prst="rect">
+            <a:avLst/>
+          </a:prstGeom>
+          <a:noFill/>
+          <a:ln/>
+        </p:spPr>
+        <p:txBody>
+          <a:bodyPr wrap="square" lIns="0" tIns="0" rIns="0" bIns="0" rtlCol="0" anchor="t"/>
+          <a:lstStyle/>
+          <a:p>
+            <a:pPr algn="l" indent="0" marL="0">
+              <a:lnSpc>
+                <a:spcPts val="1680"/>
+              </a:lnSpc>
+              <a:spcBef>
+                <a:spcPts val="300"/>
+              </a:spcBef>
+              <a:spcAft>
+                <a:spcPts val="300"/>
+              </a:spcAft>
+              <a:buNone/>
+            </a:pPr>
+            <a:r>
+              <a:rPr lang="en-US" sz="1200" dirty="0">
+                <a:solidFill>
+                  <a:srgbClr val="1C2833"/>
+                </a:solidFill>
+                <a:latin typeface="Arial" pitchFamily="34" charset="0"/>
+                <a:ea typeface="Arial" pitchFamily="34" charset="-122"/>
+                <a:cs typeface="Arial" pitchFamily="34" charset="-120"/>
+              </a:rPr>
+              <a:t>Middle ·  · IKS Curriculum</a:t>
+            </a:r>
+            <a:endParaRPr lang="en-US" sz="1200" dirty="0"/>
+          </a:p>
+        </p:txBody>
+      </p:sp>
+    </p:spTree>
+  </p:cSld>
+  <p:clrMapOvr>
+    <a:masterClrMapping/>
+  </p:clrMapOvr>
+</p:sld>
+</file>
+
+<file path=ppt/slides/slide13.xml><?xml version="1.0" encoding="utf-8"?>
+<p:sld xmlns:a="http://schemas.openxmlformats.org/drawingml/2006/main" xmlns:r="http://schemas.openxmlformats.org/officeDocument/2006/relationships" xmlns:p="http://schemas.openxmlformats.org/presentationml/2006/main">
+  <p:cSld name="Slide 13">
+    <p:bg>
+      <p:bgPr>
+        <a:solidFill>
+          <a:srgbClr val="FFFFFF"/>
+        </a:solidFill>
+      </p:bgPr>
+    </p:bg>
+    <p:spTree>
+      <p:nvGrpSpPr>
+        <p:cNvPr id="1" name=""/>
+        <p:cNvGrpSpPr/>
+        <p:nvPr/>
+      </p:nvGrpSpPr>
+      <p:grpSpPr>
+        <a:xfrm>
+          <a:off x="0" y="0"/>
+          <a:ext cx="0" cy="0"/>
+          <a:chOff x="0" y="0"/>
+          <a:chExt cx="0" cy="0"/>
+        </a:xfrm>
+      </p:grpSpPr>
+      <p:sp>
+        <p:nvSpPr>
+          <p:cNvPr id="2" name="Text 0"/>
+          <p:cNvSpPr/>
+          <p:nvPr/>
+        </p:nvSpPr>
+        <p:spPr>
+          <a:xfrm>
+            <a:off x="0" y="0"/>
+            <a:ext cx="9144000" cy="101501"/>
+          </a:xfrm>
+          <a:prstGeom prst="rect">
+            <a:avLst/>
+          </a:prstGeom>
+          <a:solidFill>
+            <a:srgbClr val="277884"/>
+          </a:solidFill>
+          <a:ln/>
+        </p:spPr>
+        <p:txBody>
+          <a:bodyPr wrap="square" rtlCol="0" anchor="ctr"/>
+          <a:lstStyle/>
+          <a:p>
+            <a:pPr indent="0" marL="0">
+              <a:buNone/>
+            </a:pPr>
+            <a:endParaRPr lang="en-US" dirty="0"/>
+          </a:p>
+        </p:txBody>
+      </p:sp>
+      <p:sp>
+        <p:nvSpPr>
+          <p:cNvPr id="3" name="Text 1"/>
+          <p:cNvSpPr/>
+          <p:nvPr/>
+        </p:nvSpPr>
+        <p:spPr>
+          <a:xfrm>
+            <a:off x="406301" y="457051"/>
+            <a:ext cx="8498026" cy="274290"/>
+          </a:xfrm>
+          <a:prstGeom prst="rect">
+            <a:avLst/>
+          </a:prstGeom>
+          <a:noFill/>
+          <a:ln/>
+        </p:spPr>
+        <p:txBody>
+          <a:bodyPr wrap="square" lIns="0" tIns="0" rIns="0" bIns="0" rtlCol="0" anchor="t"/>
+          <a:lstStyle/>
+          <a:p>
+            <a:pPr algn="l" indent="0" marL="0">
+              <a:lnSpc>
+                <a:spcPts val="2160"/>
+              </a:lnSpc>
+              <a:spcBef>
+                <a:spcPts val="600"/>
+              </a:spcBef>
+              <a:spcAft>
+                <a:spcPts val="800"/>
+              </a:spcAft>
+              <a:buNone/>
+            </a:pPr>
+            <a:r>
+              <a:rPr lang="en-US" sz="1800" b="1" dirty="0">
+                <a:solidFill>
+                  <a:srgbClr val="FE4447"/>
+                </a:solidFill>
+                <a:latin typeface="Georgia" pitchFamily="34" charset="0"/>
+                <a:ea typeface="Georgia" pitchFamily="34" charset="-122"/>
+                <a:cs typeface="Georgia" pitchFamily="34" charset="-120"/>
+              </a:rPr>
+              <a:t>Core (25 min) — The 16 sūtras and the provenance question (cont.)</a:t>
+            </a:r>
+            <a:endParaRPr lang="en-US" sz="1800" dirty="0"/>
+          </a:p>
+        </p:txBody>
+      </p:sp>
+      <p:sp>
+        <p:nvSpPr>
+          <p:cNvPr id="4" name="Text 2"/>
+          <p:cNvSpPr/>
+          <p:nvPr/>
+        </p:nvSpPr>
+        <p:spPr>
+          <a:xfrm>
+            <a:off x="634901" y="883593"/>
             <a:ext cx="8102798" cy="281880"/>
           </a:xfrm>
           <a:prstGeom prst="rect">
@@ -2727,6 +4521,989 @@
               <a:buChar char="•"/>
             </a:pPr>
             <a:r>
+              <a:rPr lang="en-US" sz="1200" b="1" dirty="0">
+                <a:solidFill>
+                  <a:srgbClr val="1C2833"/>
+                </a:solidFill>
+                <a:latin typeface="Arial" pitchFamily="34" charset="0"/>
+                <a:ea typeface="Arial" pitchFamily="34" charset="-122"/>
+                <a:cs typeface="Arial" pitchFamily="34" charset="-120"/>
+              </a:rPr>
+              <a:t>Honest framing.</a:t>
+            </a:r>
+            <a:pPr algn="l" indent="0" marL="0">
+              <a:lnSpc>
+                <a:spcPts val="1620"/>
+              </a:lnSpc>
+              <a:spcAft>
+                <a:spcPts val="300"/>
+              </a:spcAft>
+              <a:buNone/>
+            </a:pPr>
+            <a:r>
+              <a:rPr lang="en-US" sz="1200" dirty="0">
+                <a:solidFill>
+                  <a:srgbClr val="1C2833"/>
+                </a:solidFill>
+                <a:latin typeface="Arial" pitchFamily="34" charset="0"/>
+                <a:ea typeface="Arial" pitchFamily="34" charset="-122"/>
+                <a:cs typeface="Arial" pitchFamily="34" charset="-120"/>
+              </a:rPr>
+              <a:t> Two things can be true at once:</a:t>
+            </a:r>
+            <a:endParaRPr lang="en-US" sz="1200" dirty="0"/>
+          </a:p>
+        </p:txBody>
+      </p:sp>
+      <p:sp>
+        <p:nvSpPr>
+          <p:cNvPr id="5" name="Text 3"/>
+          <p:cNvSpPr/>
+          <p:nvPr/>
+        </p:nvSpPr>
+        <p:spPr>
+          <a:xfrm>
+            <a:off x="406301" y="4434929"/>
+            <a:ext cx="8498026" cy="213271"/>
+          </a:xfrm>
+          <a:prstGeom prst="rect">
+            <a:avLst/>
+          </a:prstGeom>
+          <a:noFill/>
+          <a:ln/>
+        </p:spPr>
+        <p:txBody>
+          <a:bodyPr wrap="square" lIns="0" tIns="0" rIns="0" bIns="0" rtlCol="0" anchor="t"/>
+          <a:lstStyle/>
+          <a:p>
+            <a:pPr algn="l" indent="0" marL="0">
+              <a:lnSpc>
+                <a:spcPts val="1680"/>
+              </a:lnSpc>
+              <a:spcBef>
+                <a:spcPts val="300"/>
+              </a:spcBef>
+              <a:spcAft>
+                <a:spcPts val="300"/>
+              </a:spcAft>
+              <a:buNone/>
+            </a:pPr>
+            <a:r>
+              <a:rPr lang="en-US" sz="1200" dirty="0">
+                <a:solidFill>
+                  <a:srgbClr val="1C2833"/>
+                </a:solidFill>
+                <a:latin typeface="Arial" pitchFamily="34" charset="0"/>
+                <a:ea typeface="Arial" pitchFamily="34" charset="-122"/>
+                <a:cs typeface="Arial" pitchFamily="34" charset="-120"/>
+              </a:rPr>
+              <a:t>Middle ·  · IKS Curriculum</a:t>
+            </a:r>
+            <a:endParaRPr lang="en-US" sz="1200" dirty="0"/>
+          </a:p>
+        </p:txBody>
+      </p:sp>
+    </p:spTree>
+  </p:cSld>
+  <p:clrMapOvr>
+    <a:masterClrMapping/>
+  </p:clrMapOvr>
+</p:sld>
+</file>
+
+<file path=ppt/slides/slide14.xml><?xml version="1.0" encoding="utf-8"?>
+<p:sld xmlns:a="http://schemas.openxmlformats.org/drawingml/2006/main" xmlns:r="http://schemas.openxmlformats.org/officeDocument/2006/relationships" xmlns:p="http://schemas.openxmlformats.org/presentationml/2006/main">
+  <p:cSld name="Slide 14">
+    <p:bg>
+      <p:bgPr>
+        <a:solidFill>
+          <a:srgbClr val="FFFFFF"/>
+        </a:solidFill>
+      </p:bgPr>
+    </p:bg>
+    <p:spTree>
+      <p:nvGrpSpPr>
+        <p:cNvPr id="1" name=""/>
+        <p:cNvGrpSpPr/>
+        <p:nvPr/>
+      </p:nvGrpSpPr>
+      <p:grpSpPr>
+        <a:xfrm>
+          <a:off x="0" y="0"/>
+          <a:ext cx="0" cy="0"/>
+          <a:chOff x="0" y="0"/>
+          <a:chExt cx="0" cy="0"/>
+        </a:xfrm>
+      </p:grpSpPr>
+      <p:sp>
+        <p:nvSpPr>
+          <p:cNvPr id="2" name="Text 0"/>
+          <p:cNvSpPr/>
+          <p:nvPr/>
+        </p:nvSpPr>
+        <p:spPr>
+          <a:xfrm>
+            <a:off x="0" y="0"/>
+            <a:ext cx="9144000" cy="101501"/>
+          </a:xfrm>
+          <a:prstGeom prst="rect">
+            <a:avLst/>
+          </a:prstGeom>
+          <a:solidFill>
+            <a:srgbClr val="277884"/>
+          </a:solidFill>
+          <a:ln/>
+        </p:spPr>
+        <p:txBody>
+          <a:bodyPr wrap="square" rtlCol="0" anchor="ctr"/>
+          <a:lstStyle/>
+          <a:p>
+            <a:pPr indent="0" marL="0">
+              <a:buNone/>
+            </a:pPr>
+            <a:endParaRPr lang="en-US" dirty="0"/>
+          </a:p>
+        </p:txBody>
+      </p:sp>
+      <p:sp>
+        <p:nvSpPr>
+          <p:cNvPr id="3" name="Text 1"/>
+          <p:cNvSpPr/>
+          <p:nvPr/>
+        </p:nvSpPr>
+        <p:spPr>
+          <a:xfrm>
+            <a:off x="406301" y="457051"/>
+            <a:ext cx="8498026" cy="274290"/>
+          </a:xfrm>
+          <a:prstGeom prst="rect">
+            <a:avLst/>
+          </a:prstGeom>
+          <a:noFill/>
+          <a:ln/>
+        </p:spPr>
+        <p:txBody>
+          <a:bodyPr wrap="square" lIns="0" tIns="0" rIns="0" bIns="0" rtlCol="0" anchor="t"/>
+          <a:lstStyle/>
+          <a:p>
+            <a:pPr algn="l" indent="0" marL="0">
+              <a:lnSpc>
+                <a:spcPts val="2160"/>
+              </a:lnSpc>
+              <a:spcBef>
+                <a:spcPts val="600"/>
+              </a:spcBef>
+              <a:spcAft>
+                <a:spcPts val="800"/>
+              </a:spcAft>
+              <a:buNone/>
+            </a:pPr>
+            <a:r>
+              <a:rPr lang="en-US" sz="1800" b="1" dirty="0">
+                <a:solidFill>
+                  <a:srgbClr val="FE4447"/>
+                </a:solidFill>
+                <a:latin typeface="Georgia" pitchFamily="34" charset="0"/>
+                <a:ea typeface="Georgia" pitchFamily="34" charset="-122"/>
+                <a:cs typeface="Georgia" pitchFamily="34" charset="-120"/>
+              </a:rPr>
+              <a:t>Core (25 min) — The 16 sūtras and the provenance question (cont.)</a:t>
+            </a:r>
+            <a:endParaRPr lang="en-US" sz="1800" dirty="0"/>
+          </a:p>
+        </p:txBody>
+      </p:sp>
+      <p:sp>
+        <p:nvSpPr>
+          <p:cNvPr id="4" name="Text 2"/>
+          <p:cNvSpPr/>
+          <p:nvPr/>
+        </p:nvSpPr>
+        <p:spPr>
+          <a:xfrm>
+            <a:off x="406301" y="883593"/>
+            <a:ext cx="8331398" cy="2074069"/>
+          </a:xfrm>
+          <a:prstGeom prst="rect">
+            <a:avLst/>
+          </a:prstGeom>
+          <a:solidFill>
+            <a:srgbClr val="F4F8F9"/>
+          </a:solidFill>
+          <a:ln/>
+        </p:spPr>
+        <p:txBody>
+          <a:bodyPr wrap="square" rtlCol="0" anchor="ctr"/>
+          <a:lstStyle/>
+          <a:p>
+            <a:pPr indent="0" marL="0">
+              <a:buNone/>
+            </a:pPr>
+            <a:endParaRPr lang="en-US" dirty="0"/>
+          </a:p>
+        </p:txBody>
+      </p:sp>
+      <p:sp>
+        <p:nvSpPr>
+          <p:cNvPr id="5" name="Shape 3"/>
+          <p:cNvSpPr/>
+          <p:nvPr/>
+        </p:nvSpPr>
+        <p:spPr>
+          <a:xfrm>
+            <a:off x="434876" y="883593"/>
+            <a:ext cx="0" cy="2074069"/>
+          </a:xfrm>
+          <a:prstGeom prst="line">
+            <a:avLst/>
+          </a:prstGeom>
+          <a:noFill/>
+          <a:ln w="57150">
+            <a:solidFill>
+              <a:srgbClr val="FE4447"/>
+            </a:solidFill>
+            <a:prstDash val="solid"/>
+          </a:ln>
+        </p:spPr>
+      </p:sp>
+      <p:sp>
+        <p:nvSpPr>
+          <p:cNvPr id="6" name="Text 4"/>
+          <p:cNvSpPr/>
+          <p:nvPr/>
+        </p:nvSpPr>
+        <p:spPr>
+          <a:xfrm>
+            <a:off x="692051" y="1074093"/>
+            <a:ext cx="7973389" cy="461963"/>
+          </a:xfrm>
+          <a:prstGeom prst="rect">
+            <a:avLst/>
+          </a:prstGeom>
+          <a:noFill/>
+          <a:ln/>
+        </p:spPr>
+        <p:txBody>
+          <a:bodyPr wrap="square" lIns="0" tIns="0" rIns="0" bIns="0" rtlCol="0" anchor="t"/>
+          <a:lstStyle/>
+          <a:p>
+            <a:pPr algn="l" indent="0" marL="0">
+              <a:lnSpc>
+                <a:spcPts val="1820"/>
+              </a:lnSpc>
+              <a:spcBef>
+                <a:spcPts val="300"/>
+              </a:spcBef>
+              <a:spcAft>
+                <a:spcPts val="300"/>
+              </a:spcAft>
+              <a:buNone/>
+            </a:pPr>
+            <a:r>
+              <a:rPr lang="en-US" sz="1300" dirty="0">
+                <a:solidFill>
+                  <a:srgbClr val="1C2833"/>
+                </a:solidFill>
+                <a:latin typeface="Georgia" pitchFamily="34" charset="0"/>
+                <a:ea typeface="Georgia" pitchFamily="34" charset="-122"/>
+                <a:cs typeface="Georgia" pitchFamily="34" charset="-120"/>
+              </a:rPr>
+              <a:t>The ×11 trick (and the rest of Tirthaji's 16-sūtra system) </a:t>
+            </a:r>
+            <a:pPr algn="l" indent="0" marL="0">
+              <a:lnSpc>
+                <a:spcPts val="1820"/>
+              </a:lnSpc>
+              <a:spcBef>
+                <a:spcPts val="300"/>
+              </a:spcBef>
+              <a:spcAft>
+                <a:spcPts val="300"/>
+              </a:spcAft>
+              <a:buNone/>
+            </a:pPr>
+            <a:r>
+              <a:rPr lang="en-US" sz="1300" b="1" i="1" dirty="0">
+                <a:solidFill>
+                  <a:srgbClr val="1C2833"/>
+                </a:solidFill>
+                <a:latin typeface="Georgia" pitchFamily="34" charset="0"/>
+                <a:ea typeface="Georgia" pitchFamily="34" charset="-122"/>
+                <a:cs typeface="Georgia" pitchFamily="34" charset="-120"/>
+              </a:rPr>
+              <a:t>works</a:t>
+            </a:r>
+            <a:pPr algn="l" indent="0" marL="0">
+              <a:lnSpc>
+                <a:spcPts val="1820"/>
+              </a:lnSpc>
+              <a:spcBef>
+                <a:spcPts val="300"/>
+              </a:spcBef>
+              <a:spcAft>
+                <a:spcPts val="300"/>
+              </a:spcAft>
+              <a:buNone/>
+            </a:pPr>
+            <a:r>
+              <a:rPr lang="en-US" sz="1300" dirty="0">
+                <a:solidFill>
+                  <a:srgbClr val="1C2833"/>
+                </a:solidFill>
+                <a:latin typeface="Georgia" pitchFamily="34" charset="0"/>
+                <a:ea typeface="Georgia" pitchFamily="34" charset="-122"/>
+                <a:cs typeface="Georgia" pitchFamily="34" charset="-120"/>
+              </a:rPr>
+              <a:t>. It is a useful, beautiful piece of mental arithmetic.</a:t>
+            </a:r>
+            <a:endParaRPr lang="en-US" sz="1300" dirty="0"/>
+          </a:p>
+        </p:txBody>
+      </p:sp>
+      <p:sp>
+        <p:nvSpPr>
+          <p:cNvPr id="7" name="Text 5"/>
+          <p:cNvSpPr/>
+          <p:nvPr/>
+        </p:nvSpPr>
+        <p:spPr>
+          <a:xfrm>
+            <a:off x="692051" y="1574155"/>
+            <a:ext cx="7973389" cy="692944"/>
+          </a:xfrm>
+          <a:prstGeom prst="rect">
+            <a:avLst/>
+          </a:prstGeom>
+          <a:noFill/>
+          <a:ln/>
+        </p:spPr>
+        <p:txBody>
+          <a:bodyPr wrap="square" lIns="0" tIns="0" rIns="0" bIns="0" rtlCol="0" anchor="t"/>
+          <a:lstStyle/>
+          <a:p>
+            <a:pPr algn="l" indent="0" marL="0">
+              <a:lnSpc>
+                <a:spcPts val="1820"/>
+              </a:lnSpc>
+              <a:spcBef>
+                <a:spcPts val="300"/>
+              </a:spcBef>
+              <a:spcAft>
+                <a:spcPts val="300"/>
+              </a:spcAft>
+              <a:buNone/>
+            </a:pPr>
+            <a:r>
+              <a:rPr lang="en-US" sz="1300" dirty="0">
+                <a:solidFill>
+                  <a:srgbClr val="1C2833"/>
+                </a:solidFill>
+                <a:latin typeface="Georgia" pitchFamily="34" charset="0"/>
+                <a:ea typeface="Georgia" pitchFamily="34" charset="-122"/>
+                <a:cs typeface="Georgia" pitchFamily="34" charset="-120"/>
+              </a:rPr>
+              <a:t>The trick is </a:t>
+            </a:r>
+            <a:pPr algn="l" indent="0" marL="0">
+              <a:lnSpc>
+                <a:spcPts val="1820"/>
+              </a:lnSpc>
+              <a:spcBef>
+                <a:spcPts val="300"/>
+              </a:spcBef>
+              <a:spcAft>
+                <a:spcPts val="300"/>
+              </a:spcAft>
+              <a:buNone/>
+            </a:pPr>
+            <a:r>
+              <a:rPr lang="en-US" sz="1300" b="1" i="1" dirty="0">
+                <a:solidFill>
+                  <a:srgbClr val="1C2833"/>
+                </a:solidFill>
+                <a:latin typeface="Georgia" pitchFamily="34" charset="0"/>
+                <a:ea typeface="Georgia" pitchFamily="34" charset="-122"/>
+                <a:cs typeface="Georgia" pitchFamily="34" charset="-120"/>
+              </a:rPr>
+              <a:t>not verifiably ancient Vedic mathematics</a:t>
+            </a:r>
+            <a:pPr algn="l" indent="0" marL="0">
+              <a:lnSpc>
+                <a:spcPts val="1820"/>
+              </a:lnSpc>
+              <a:spcBef>
+                <a:spcPts val="300"/>
+              </a:spcBef>
+              <a:spcAft>
+                <a:spcPts val="300"/>
+              </a:spcAft>
+              <a:buNone/>
+            </a:pPr>
+            <a:r>
+              <a:rPr lang="en-US" sz="1300" dirty="0">
+                <a:solidFill>
+                  <a:srgbClr val="1C2833"/>
+                </a:solidFill>
+                <a:latin typeface="Georgia" pitchFamily="34" charset="0"/>
+                <a:ea typeface="Georgia" pitchFamily="34" charset="-122"/>
+                <a:cs typeface="Georgia" pitchFamily="34" charset="-120"/>
+              </a:rPr>
+              <a:t>. The best current evidence is that Tirthaji synthesised it in the early 20th century, drawing on classical Indian arithmetic + his own pedagogical genius, and named the sūtras in Sanskrit.</a:t>
+            </a:r>
+            <a:endParaRPr lang="en-US" sz="1300" dirty="0"/>
+          </a:p>
+        </p:txBody>
+      </p:sp>
+      <p:sp>
+        <p:nvSpPr>
+          <p:cNvPr id="8" name="Text 6"/>
+          <p:cNvSpPr/>
+          <p:nvPr/>
+        </p:nvSpPr>
+        <p:spPr>
+          <a:xfrm>
+            <a:off x="692051" y="2305199"/>
+            <a:ext cx="7973389" cy="461963"/>
+          </a:xfrm>
+          <a:prstGeom prst="rect">
+            <a:avLst/>
+          </a:prstGeom>
+          <a:noFill/>
+          <a:ln/>
+        </p:spPr>
+        <p:txBody>
+          <a:bodyPr wrap="square" lIns="0" tIns="0" rIns="0" bIns="0" rtlCol="0" anchor="t"/>
+          <a:lstStyle/>
+          <a:p>
+            <a:pPr algn="l" indent="0" marL="0">
+              <a:lnSpc>
+                <a:spcPts val="1820"/>
+              </a:lnSpc>
+              <a:spcBef>
+                <a:spcPts val="300"/>
+              </a:spcBef>
+              <a:spcAft>
+                <a:spcPts val="300"/>
+              </a:spcAft>
+              <a:buNone/>
+            </a:pPr>
+            <a:r>
+              <a:rPr lang="en-US" sz="1300" i="1" dirty="0">
+                <a:solidFill>
+                  <a:srgbClr val="1C2833"/>
+                </a:solidFill>
+                <a:latin typeface="Georgia" pitchFamily="34" charset="0"/>
+                <a:ea typeface="Georgia" pitchFamily="34" charset="-122"/>
+                <a:cs typeface="Georgia" pitchFamily="34" charset="-120"/>
+              </a:rPr>
+              <a:t>The synthesis itself is a real Indian intellectual achievement. The "Vedic" naming is a 20th-century interpretive choice that scholars dispute.</a:t>
+            </a:r>
+            <a:endParaRPr lang="en-US" sz="1300" dirty="0"/>
+          </a:p>
+        </p:txBody>
+      </p:sp>
+      <p:sp>
+        <p:nvSpPr>
+          <p:cNvPr id="9" name="Text 7"/>
+          <p:cNvSpPr/>
+          <p:nvPr/>
+        </p:nvSpPr>
+        <p:spPr>
+          <a:xfrm>
+            <a:off x="406301" y="4434929"/>
+            <a:ext cx="8498026" cy="213271"/>
+          </a:xfrm>
+          <a:prstGeom prst="rect">
+            <a:avLst/>
+          </a:prstGeom>
+          <a:noFill/>
+          <a:ln/>
+        </p:spPr>
+        <p:txBody>
+          <a:bodyPr wrap="square" lIns="0" tIns="0" rIns="0" bIns="0" rtlCol="0" anchor="t"/>
+          <a:lstStyle/>
+          <a:p>
+            <a:pPr algn="l" indent="0" marL="0">
+              <a:lnSpc>
+                <a:spcPts val="1680"/>
+              </a:lnSpc>
+              <a:spcBef>
+                <a:spcPts val="300"/>
+              </a:spcBef>
+              <a:spcAft>
+                <a:spcPts val="300"/>
+              </a:spcAft>
+              <a:buNone/>
+            </a:pPr>
+            <a:r>
+              <a:rPr lang="en-US" sz="1200" dirty="0">
+                <a:solidFill>
+                  <a:srgbClr val="1C2833"/>
+                </a:solidFill>
+                <a:latin typeface="Arial" pitchFamily="34" charset="0"/>
+                <a:ea typeface="Arial" pitchFamily="34" charset="-122"/>
+                <a:cs typeface="Arial" pitchFamily="34" charset="-120"/>
+              </a:rPr>
+              <a:t>Middle ·  · IKS Curriculum</a:t>
+            </a:r>
+            <a:endParaRPr lang="en-US" sz="1200" dirty="0"/>
+          </a:p>
+        </p:txBody>
+      </p:sp>
+    </p:spTree>
+  </p:cSld>
+  <p:clrMapOvr>
+    <a:masterClrMapping/>
+  </p:clrMapOvr>
+</p:sld>
+</file>
+
+<file path=ppt/slides/slide15.xml><?xml version="1.0" encoding="utf-8"?>
+<p:sld xmlns:a="http://schemas.openxmlformats.org/drawingml/2006/main" xmlns:r="http://schemas.openxmlformats.org/officeDocument/2006/relationships" xmlns:p="http://schemas.openxmlformats.org/presentationml/2006/main">
+  <p:cSld name="Slide 15">
+    <p:bg>
+      <p:bgPr>
+        <a:solidFill>
+          <a:srgbClr val="FFFFFF"/>
+        </a:solidFill>
+      </p:bgPr>
+    </p:bg>
+    <p:spTree>
+      <p:nvGrpSpPr>
+        <p:cNvPr id="1" name=""/>
+        <p:cNvGrpSpPr/>
+        <p:nvPr/>
+      </p:nvGrpSpPr>
+      <p:grpSpPr>
+        <a:xfrm>
+          <a:off x="0" y="0"/>
+          <a:ext cx="0" cy="0"/>
+          <a:chOff x="0" y="0"/>
+          <a:chExt cx="0" cy="0"/>
+        </a:xfrm>
+      </p:grpSpPr>
+      <p:sp>
+        <p:nvSpPr>
+          <p:cNvPr id="2" name="Text 0"/>
+          <p:cNvSpPr/>
+          <p:nvPr/>
+        </p:nvSpPr>
+        <p:spPr>
+          <a:xfrm>
+            <a:off x="0" y="0"/>
+            <a:ext cx="9144000" cy="101501"/>
+          </a:xfrm>
+          <a:prstGeom prst="rect">
+            <a:avLst/>
+          </a:prstGeom>
+          <a:solidFill>
+            <a:srgbClr val="277884"/>
+          </a:solidFill>
+          <a:ln/>
+        </p:spPr>
+        <p:txBody>
+          <a:bodyPr wrap="square" rtlCol="0" anchor="ctr"/>
+          <a:lstStyle/>
+          <a:p>
+            <a:pPr indent="0" marL="0">
+              <a:buNone/>
+            </a:pPr>
+            <a:endParaRPr lang="en-US" dirty="0"/>
+          </a:p>
+        </p:txBody>
+      </p:sp>
+      <p:sp>
+        <p:nvSpPr>
+          <p:cNvPr id="3" name="Text 1"/>
+          <p:cNvSpPr/>
+          <p:nvPr/>
+        </p:nvSpPr>
+        <p:spPr>
+          <a:xfrm>
+            <a:off x="406301" y="457051"/>
+            <a:ext cx="8498026" cy="274290"/>
+          </a:xfrm>
+          <a:prstGeom prst="rect">
+            <a:avLst/>
+          </a:prstGeom>
+          <a:noFill/>
+          <a:ln/>
+        </p:spPr>
+        <p:txBody>
+          <a:bodyPr wrap="square" lIns="0" tIns="0" rIns="0" bIns="0" rtlCol="0" anchor="t"/>
+          <a:lstStyle/>
+          <a:p>
+            <a:pPr algn="l" indent="0" marL="0">
+              <a:lnSpc>
+                <a:spcPts val="2160"/>
+              </a:lnSpc>
+              <a:spcBef>
+                <a:spcPts val="600"/>
+              </a:spcBef>
+              <a:spcAft>
+                <a:spcPts val="800"/>
+              </a:spcAft>
+              <a:buNone/>
+            </a:pPr>
+            <a:r>
+              <a:rPr lang="en-US" sz="1800" b="1" dirty="0">
+                <a:solidFill>
+                  <a:srgbClr val="FE4447"/>
+                </a:solidFill>
+                <a:latin typeface="Georgia" pitchFamily="34" charset="0"/>
+                <a:ea typeface="Georgia" pitchFamily="34" charset="-122"/>
+                <a:cs typeface="Georgia" pitchFamily="34" charset="-120"/>
+              </a:rPr>
+              <a:t>Core (25 min) — The 16 sūtras and the provenance question (cont.)</a:t>
+            </a:r>
+            <a:endParaRPr lang="en-US" sz="1800" dirty="0"/>
+          </a:p>
+        </p:txBody>
+      </p:sp>
+      <p:sp>
+        <p:nvSpPr>
+          <p:cNvPr id="4" name="Text 2"/>
+          <p:cNvSpPr/>
+          <p:nvPr/>
+        </p:nvSpPr>
+        <p:spPr>
+          <a:xfrm>
+            <a:off x="634901" y="883593"/>
+            <a:ext cx="8102798" cy="693241"/>
+          </a:xfrm>
+          <a:prstGeom prst="rect">
+            <a:avLst/>
+          </a:prstGeom>
+          <a:noFill/>
+          <a:ln/>
+        </p:spPr>
+        <p:txBody>
+          <a:bodyPr wrap="square" lIns="0" tIns="0" rIns="0" bIns="0" rtlCol="0" anchor="t"/>
+          <a:lstStyle/>
+          <a:p>
+            <a:pPr algn="l" marL="342900" indent="-342900">
+              <a:lnSpc>
+                <a:spcPts val="1620"/>
+              </a:lnSpc>
+              <a:spcAft>
+                <a:spcPts val="300"/>
+              </a:spcAft>
+              <a:buSzPct val="100000"/>
+              <a:buChar char="•"/>
+            </a:pPr>
+            <a:r>
+              <a:rPr lang="en-US" sz="1200" b="1" dirty="0">
+                <a:solidFill>
+                  <a:srgbClr val="1C2833"/>
+                </a:solidFill>
+                <a:latin typeface="Arial" pitchFamily="34" charset="0"/>
+                <a:ea typeface="Arial" pitchFamily="34" charset="-122"/>
+                <a:cs typeface="Arial" pitchFamily="34" charset="-120"/>
+              </a:rPr>
+              <a:t>What's at stake.</a:t>
+            </a:r>
+            <a:pPr algn="l" indent="0" marL="0">
+              <a:lnSpc>
+                <a:spcPts val="1620"/>
+              </a:lnSpc>
+              <a:spcAft>
+                <a:spcPts val="300"/>
+              </a:spcAft>
+              <a:buNone/>
+            </a:pPr>
+            <a:r>
+              <a:rPr lang="en-US" sz="1200" dirty="0">
+                <a:solidFill>
+                  <a:srgbClr val="1C2833"/>
+                </a:solidFill>
+                <a:latin typeface="Arial" pitchFamily="34" charset="0"/>
+                <a:ea typeface="Arial" pitchFamily="34" charset="-122"/>
+                <a:cs typeface="Arial" pitchFamily="34" charset="-120"/>
+              </a:rPr>
+              <a:t> If the sūtras are Vedic (3000+ years old), they're a major historical claim. If they're 20th-century synthesis, </a:t>
+            </a:r>
+            <a:pPr algn="l" indent="0" marL="0">
+              <a:lnSpc>
+                <a:spcPts val="1620"/>
+              </a:lnSpc>
+              <a:spcAft>
+                <a:spcPts val="300"/>
+              </a:spcAft>
+              <a:buNone/>
+            </a:pPr>
+            <a:r>
+              <a:rPr lang="en-US" sz="1200" b="1" dirty="0">
+                <a:solidFill>
+                  <a:srgbClr val="1C2833"/>
+                </a:solidFill>
+                <a:latin typeface="Arial" pitchFamily="34" charset="0"/>
+                <a:ea typeface="Arial" pitchFamily="34" charset="-122"/>
+                <a:cs typeface="Arial" pitchFamily="34" charset="-120"/>
+              </a:rPr>
+              <a:t>they're still a real achievement</a:t>
+            </a:r>
+            <a:pPr algn="l" indent="0" marL="0">
+              <a:lnSpc>
+                <a:spcPts val="1620"/>
+              </a:lnSpc>
+              <a:spcAft>
+                <a:spcPts val="300"/>
+              </a:spcAft>
+              <a:buNone/>
+            </a:pPr>
+            <a:r>
+              <a:rPr lang="en-US" sz="1200" dirty="0">
+                <a:solidFill>
+                  <a:srgbClr val="1C2833"/>
+                </a:solidFill>
+                <a:latin typeface="Arial" pitchFamily="34" charset="0"/>
+                <a:ea typeface="Arial" pitchFamily="34" charset="-122"/>
+                <a:cs typeface="Arial" pitchFamily="34" charset="-120"/>
+              </a:rPr>
+              <a:t> — just a different one. Tirthaji's pedagogical genius is not diminished by being recent.</a:t>
+            </a:r>
+            <a:endParaRPr lang="en-US" sz="1200" dirty="0"/>
+          </a:p>
+        </p:txBody>
+      </p:sp>
+      <p:sp>
+        <p:nvSpPr>
+          <p:cNvPr id="5" name="Text 3"/>
+          <p:cNvSpPr/>
+          <p:nvPr/>
+        </p:nvSpPr>
+        <p:spPr>
+          <a:xfrm>
+            <a:off x="406301" y="4434929"/>
+            <a:ext cx="8498026" cy="213271"/>
+          </a:xfrm>
+          <a:prstGeom prst="rect">
+            <a:avLst/>
+          </a:prstGeom>
+          <a:noFill/>
+          <a:ln/>
+        </p:spPr>
+        <p:txBody>
+          <a:bodyPr wrap="square" lIns="0" tIns="0" rIns="0" bIns="0" rtlCol="0" anchor="t"/>
+          <a:lstStyle/>
+          <a:p>
+            <a:pPr algn="l" indent="0" marL="0">
+              <a:lnSpc>
+                <a:spcPts val="1680"/>
+              </a:lnSpc>
+              <a:spcBef>
+                <a:spcPts val="300"/>
+              </a:spcBef>
+              <a:spcAft>
+                <a:spcPts val="300"/>
+              </a:spcAft>
+              <a:buNone/>
+            </a:pPr>
+            <a:r>
+              <a:rPr lang="en-US" sz="1200" dirty="0">
+                <a:solidFill>
+                  <a:srgbClr val="1C2833"/>
+                </a:solidFill>
+                <a:latin typeface="Arial" pitchFamily="34" charset="0"/>
+                <a:ea typeface="Arial" pitchFamily="34" charset="-122"/>
+                <a:cs typeface="Arial" pitchFamily="34" charset="-120"/>
+              </a:rPr>
+              <a:t>Middle ·  · IKS Curriculum</a:t>
+            </a:r>
+            <a:endParaRPr lang="en-US" sz="1200" dirty="0"/>
+          </a:p>
+        </p:txBody>
+      </p:sp>
+    </p:spTree>
+  </p:cSld>
+  <p:clrMapOvr>
+    <a:masterClrMapping/>
+  </p:clrMapOvr>
+</p:sld>
+</file>
+
+<file path=ppt/slides/slide16.xml><?xml version="1.0" encoding="utf-8"?>
+<p:sld xmlns:a="http://schemas.openxmlformats.org/drawingml/2006/main" xmlns:r="http://schemas.openxmlformats.org/officeDocument/2006/relationships" xmlns:p="http://schemas.openxmlformats.org/presentationml/2006/main">
+  <p:cSld name="Slide 16">
+    <p:bg>
+      <p:bgPr>
+        <a:solidFill>
+          <a:srgbClr val="FFFFFF"/>
+        </a:solidFill>
+      </p:bgPr>
+    </p:bg>
+    <p:spTree>
+      <p:nvGrpSpPr>
+        <p:cNvPr id="1" name=""/>
+        <p:cNvGrpSpPr/>
+        <p:nvPr/>
+      </p:nvGrpSpPr>
+      <p:grpSpPr>
+        <a:xfrm>
+          <a:off x="0" y="0"/>
+          <a:ext cx="0" cy="0"/>
+          <a:chOff x="0" y="0"/>
+          <a:chExt cx="0" cy="0"/>
+        </a:xfrm>
+      </p:grpSpPr>
+      <p:sp>
+        <p:nvSpPr>
+          <p:cNvPr id="2" name="Text 0"/>
+          <p:cNvSpPr/>
+          <p:nvPr/>
+        </p:nvSpPr>
+        <p:spPr>
+          <a:xfrm>
+            <a:off x="0" y="0"/>
+            <a:ext cx="9144000" cy="101501"/>
+          </a:xfrm>
+          <a:prstGeom prst="rect">
+            <a:avLst/>
+          </a:prstGeom>
+          <a:solidFill>
+            <a:srgbClr val="277884"/>
+          </a:solidFill>
+          <a:ln/>
+        </p:spPr>
+        <p:txBody>
+          <a:bodyPr wrap="square" rtlCol="0" anchor="ctr"/>
+          <a:lstStyle/>
+          <a:p>
+            <a:pPr indent="0" marL="0">
+              <a:buNone/>
+            </a:pPr>
+            <a:endParaRPr lang="en-US" dirty="0"/>
+          </a:p>
+        </p:txBody>
+      </p:sp>
+      <p:sp>
+        <p:nvSpPr>
+          <p:cNvPr id="3" name="Text 1"/>
+          <p:cNvSpPr/>
+          <p:nvPr/>
+        </p:nvSpPr>
+        <p:spPr>
+          <a:xfrm>
+            <a:off x="406301" y="457051"/>
+            <a:ext cx="8498026" cy="274290"/>
+          </a:xfrm>
+          <a:prstGeom prst="rect">
+            <a:avLst/>
+          </a:prstGeom>
+          <a:noFill/>
+          <a:ln/>
+        </p:spPr>
+        <p:txBody>
+          <a:bodyPr wrap="square" lIns="0" tIns="0" rIns="0" bIns="0" rtlCol="0" anchor="t"/>
+          <a:lstStyle/>
+          <a:p>
+            <a:pPr algn="l" indent="0" marL="0">
+              <a:lnSpc>
+                <a:spcPts val="2160"/>
+              </a:lnSpc>
+              <a:spcBef>
+                <a:spcPts val="600"/>
+              </a:spcBef>
+              <a:spcAft>
+                <a:spcPts val="800"/>
+              </a:spcAft>
+              <a:buNone/>
+            </a:pPr>
+            <a:r>
+              <a:rPr lang="en-US" sz="1800" b="1" dirty="0">
+                <a:solidFill>
+                  <a:srgbClr val="FE4447"/>
+                </a:solidFill>
+                <a:latin typeface="Georgia" pitchFamily="34" charset="0"/>
+                <a:ea typeface="Georgia" pitchFamily="34" charset="-122"/>
+                <a:cs typeface="Georgia" pitchFamily="34" charset="-120"/>
+              </a:rPr>
+              <a:t>Discussion (15 min) — Take a position</a:t>
+            </a:r>
+            <a:endParaRPr lang="en-US" sz="1800" dirty="0"/>
+          </a:p>
+        </p:txBody>
+      </p:sp>
+      <p:sp>
+        <p:nvSpPr>
+          <p:cNvPr id="4" name="Text 2"/>
+          <p:cNvSpPr/>
+          <p:nvPr/>
+        </p:nvSpPr>
+        <p:spPr>
+          <a:xfrm>
+            <a:off x="406301" y="870942"/>
+            <a:ext cx="8498026" cy="213271"/>
+          </a:xfrm>
+          <a:prstGeom prst="rect">
+            <a:avLst/>
+          </a:prstGeom>
+          <a:noFill/>
+          <a:ln/>
+        </p:spPr>
+        <p:txBody>
+          <a:bodyPr wrap="square" lIns="0" tIns="0" rIns="0" bIns="0" rtlCol="0" anchor="t"/>
+          <a:lstStyle/>
+          <a:p>
+            <a:pPr algn="l" indent="0" marL="0">
+              <a:lnSpc>
+                <a:spcPts val="1680"/>
+              </a:lnSpc>
+              <a:spcBef>
+                <a:spcPts val="300"/>
+              </a:spcBef>
+              <a:spcAft>
+                <a:spcPts val="300"/>
+              </a:spcAft>
+              <a:buNone/>
+            </a:pPr>
+            <a:r>
+              <a:rPr lang="en-US" sz="1200" dirty="0">
+                <a:solidFill>
+                  <a:srgbClr val="1C2833"/>
+                </a:solidFill>
+                <a:latin typeface="Arial" pitchFamily="34" charset="0"/>
+                <a:ea typeface="Arial" pitchFamily="34" charset="-122"/>
+                <a:cs typeface="Arial" pitchFamily="34" charset="-120"/>
+              </a:rPr>
+              <a:t>Pose two questions to the class. Take a brief show-of-hands; then take 4–5 student statements (no debate, just listening).</a:t>
+            </a:r>
+            <a:endParaRPr lang="en-US" sz="1200" dirty="0"/>
+          </a:p>
+        </p:txBody>
+      </p:sp>
+      <p:sp>
+        <p:nvSpPr>
+          <p:cNvPr id="5" name="Text 3"/>
+          <p:cNvSpPr/>
+          <p:nvPr/>
+        </p:nvSpPr>
+        <p:spPr>
+          <a:xfrm>
+            <a:off x="634901" y="1173063"/>
+            <a:ext cx="8102798" cy="525661"/>
+          </a:xfrm>
+          <a:prstGeom prst="rect">
+            <a:avLst/>
+          </a:prstGeom>
+          <a:noFill/>
+          <a:ln/>
+        </p:spPr>
+        <p:txBody>
+          <a:bodyPr wrap="square" lIns="0" tIns="0" rIns="0" bIns="0" rtlCol="0" anchor="t"/>
+          <a:lstStyle/>
+          <a:p>
+            <a:pPr algn="l" marL="342900" indent="-342900">
+              <a:lnSpc>
+                <a:spcPts val="1620"/>
+              </a:lnSpc>
+              <a:spcAft>
+                <a:spcPts val="300"/>
+              </a:spcAft>
+              <a:buSzPct val="100000"/>
+              <a:buChar char="•"/>
+            </a:pPr>
+            <a:r>
               <a:rPr lang="en-US" sz="1200" i="1" dirty="0">
                 <a:solidFill>
                   <a:srgbClr val="1C2833"/>
@@ -2735,12 +5512,64 @@
                 <a:ea typeface="Arial" pitchFamily="34" charset="-122"/>
                 <a:cs typeface="Arial" pitchFamily="34" charset="-120"/>
               </a:rPr>
-              <a:t>Microsoft Word - sutras1.pdf</a:t>
-            </a:r>
-            <a:pPr algn="l" indent="0" marL="0">
-              <a:lnSpc>
-                <a:spcPts val="1620"/>
-              </a:lnSpc>
+              <a:t>"Does it matter whether the trick is 'ancient' or '20th-century'? Why or why not?"</a:t>
+            </a:r>
+            <a:endParaRPr lang="en-US" sz="1200" dirty="0"/>
+          </a:p>
+          <a:p>
+            <a:pPr algn="l" marL="342900" indent="-342900">
+              <a:lnSpc>
+                <a:spcPts val="1620"/>
+              </a:lnSpc>
+              <a:spcAft>
+                <a:spcPts val="300"/>
+              </a:spcAft>
+              <a:buSzPct val="100000"/>
+              <a:buChar char="•"/>
+            </a:pPr>
+            <a:r>
+              <a:rPr lang="en-US" sz="1200" i="1" dirty="0">
+                <a:solidFill>
+                  <a:srgbClr val="1C2833"/>
+                </a:solidFill>
+                <a:latin typeface="Arial" pitchFamily="34" charset="0"/>
+                <a:ea typeface="Arial" pitchFamily="34" charset="-122"/>
+                <a:cs typeface="Arial" pitchFamily="34" charset="-120"/>
+              </a:rPr>
+              <a:t>"If it turns out to be 20th-century, should we still teach it as 'Vedic mathematics'? What should we call it?"</a:t>
+            </a:r>
+            <a:endParaRPr lang="en-US" sz="1200" dirty="0"/>
+          </a:p>
+        </p:txBody>
+      </p:sp>
+      <p:sp>
+        <p:nvSpPr>
+          <p:cNvPr id="6" name="Text 4"/>
+          <p:cNvSpPr/>
+          <p:nvPr/>
+        </p:nvSpPr>
+        <p:spPr>
+          <a:xfrm>
+            <a:off x="406301" y="4434929"/>
+            <a:ext cx="8498026" cy="213271"/>
+          </a:xfrm>
+          <a:prstGeom prst="rect">
+            <a:avLst/>
+          </a:prstGeom>
+          <a:noFill/>
+          <a:ln/>
+        </p:spPr>
+        <p:txBody>
+          <a:bodyPr wrap="square" lIns="0" tIns="0" rIns="0" bIns="0" rtlCol="0" anchor="t"/>
+          <a:lstStyle/>
+          <a:p>
+            <a:pPr algn="l" indent="0" marL="0">
+              <a:lnSpc>
+                <a:spcPts val="1680"/>
+              </a:lnSpc>
+              <a:spcBef>
+                <a:spcPts val="300"/>
+              </a:spcBef>
               <a:spcAft>
                 <a:spcPts val="300"/>
               </a:spcAft>
@@ -2755,15 +5584,961 @@
                 <a:ea typeface="Arial" pitchFamily="34" charset="-122"/>
                 <a:cs typeface="Arial" pitchFamily="34" charset="-120"/>
               </a:rPr>
-              <a:t> (SutraGanita corpus) — the 16+13 sūtra list.</a:t>
+              <a:t>Middle ·  · IKS Curriculum</a:t>
             </a:r>
             <a:endParaRPr lang="en-US" sz="1200" dirty="0"/>
           </a:p>
         </p:txBody>
       </p:sp>
+    </p:spTree>
+  </p:cSld>
+  <p:clrMapOvr>
+    <a:masterClrMapping/>
+  </p:clrMapOvr>
+</p:sld>
+</file>
+
+<file path=ppt/slides/slide17.xml><?xml version="1.0" encoding="utf-8"?>
+<p:sld xmlns:a="http://schemas.openxmlformats.org/drawingml/2006/main" xmlns:r="http://schemas.openxmlformats.org/officeDocument/2006/relationships" xmlns:p="http://schemas.openxmlformats.org/presentationml/2006/main">
+  <p:cSld name="Slide 17">
+    <p:bg>
+      <p:bgPr>
+        <a:solidFill>
+          <a:srgbClr val="FFFFFF"/>
+        </a:solidFill>
+      </p:bgPr>
+    </p:bg>
+    <p:spTree>
+      <p:nvGrpSpPr>
+        <p:cNvPr id="1" name=""/>
+        <p:cNvGrpSpPr/>
+        <p:nvPr/>
+      </p:nvGrpSpPr>
+      <p:grpSpPr>
+        <a:xfrm>
+          <a:off x="0" y="0"/>
+          <a:ext cx="0" cy="0"/>
+          <a:chOff x="0" y="0"/>
+          <a:chExt cx="0" cy="0"/>
+        </a:xfrm>
+      </p:grpSpPr>
+      <p:sp>
+        <p:nvSpPr>
+          <p:cNvPr id="2" name="Text 0"/>
+          <p:cNvSpPr/>
+          <p:nvPr/>
+        </p:nvSpPr>
+        <p:spPr>
+          <a:xfrm>
+            <a:off x="0" y="0"/>
+            <a:ext cx="9144000" cy="101501"/>
+          </a:xfrm>
+          <a:prstGeom prst="rect">
+            <a:avLst/>
+          </a:prstGeom>
+          <a:solidFill>
+            <a:srgbClr val="277884"/>
+          </a:solidFill>
+          <a:ln/>
+        </p:spPr>
+        <p:txBody>
+          <a:bodyPr wrap="square" rtlCol="0" anchor="ctr"/>
+          <a:lstStyle/>
+          <a:p>
+            <a:pPr indent="0" marL="0">
+              <a:buNone/>
+            </a:pPr>
+            <a:endParaRPr lang="en-US" dirty="0"/>
+          </a:p>
+        </p:txBody>
+      </p:sp>
+      <p:sp>
+        <p:nvSpPr>
+          <p:cNvPr id="3" name="Text 1"/>
+          <p:cNvSpPr/>
+          <p:nvPr/>
+        </p:nvSpPr>
+        <p:spPr>
+          <a:xfrm>
+            <a:off x="406301" y="457051"/>
+            <a:ext cx="8498026" cy="274290"/>
+          </a:xfrm>
+          <a:prstGeom prst="rect">
+            <a:avLst/>
+          </a:prstGeom>
+          <a:noFill/>
+          <a:ln/>
+        </p:spPr>
+        <p:txBody>
+          <a:bodyPr wrap="square" lIns="0" tIns="0" rIns="0" bIns="0" rtlCol="0" anchor="t"/>
+          <a:lstStyle/>
+          <a:p>
+            <a:pPr algn="l" indent="0" marL="0">
+              <a:lnSpc>
+                <a:spcPts val="2160"/>
+              </a:lnSpc>
+              <a:spcBef>
+                <a:spcPts val="600"/>
+              </a:spcBef>
+              <a:spcAft>
+                <a:spcPts val="800"/>
+              </a:spcAft>
+              <a:buNone/>
+            </a:pPr>
+            <a:r>
+              <a:rPr lang="en-US" sz="1800" b="1" dirty="0">
+                <a:solidFill>
+                  <a:srgbClr val="FE4447"/>
+                </a:solidFill>
+                <a:latin typeface="Georgia" pitchFamily="34" charset="0"/>
+                <a:ea typeface="Georgia" pitchFamily="34" charset="-122"/>
+                <a:cs typeface="Georgia" pitchFamily="34" charset="-120"/>
+              </a:rPr>
+              <a:t>Discussion (15 min) — Take a position (cont.)</a:t>
+            </a:r>
+            <a:endParaRPr lang="en-US" sz="1800" dirty="0"/>
+          </a:p>
+        </p:txBody>
+      </p:sp>
+      <p:sp>
+        <p:nvSpPr>
+          <p:cNvPr id="4" name="Text 2"/>
+          <p:cNvSpPr/>
+          <p:nvPr/>
+        </p:nvSpPr>
+        <p:spPr>
+          <a:xfrm>
+            <a:off x="406301" y="870942"/>
+            <a:ext cx="8498026" cy="213271"/>
+          </a:xfrm>
+          <a:prstGeom prst="rect">
+            <a:avLst/>
+          </a:prstGeom>
+          <a:noFill/>
+          <a:ln/>
+        </p:spPr>
+        <p:txBody>
+          <a:bodyPr wrap="square" lIns="0" tIns="0" rIns="0" bIns="0" rtlCol="0" anchor="t"/>
+          <a:lstStyle/>
+          <a:p>
+            <a:pPr algn="l" indent="0" marL="0">
+              <a:lnSpc>
+                <a:spcPts val="1680"/>
+              </a:lnSpc>
+              <a:spcBef>
+                <a:spcPts val="300"/>
+              </a:spcBef>
+              <a:spcAft>
+                <a:spcPts val="300"/>
+              </a:spcAft>
+              <a:buNone/>
+            </a:pPr>
+            <a:r>
+              <a:rPr lang="en-US" sz="1200" dirty="0">
+                <a:solidFill>
+                  <a:srgbClr val="1C2833"/>
+                </a:solidFill>
+                <a:latin typeface="Arial" pitchFamily="34" charset="0"/>
+                <a:ea typeface="Arial" pitchFamily="34" charset="-122"/>
+                <a:cs typeface="Arial" pitchFamily="34" charset="-120"/>
+              </a:rPr>
+              <a:t>End by noting: </a:t>
+            </a:r>
+            <a:pPr algn="l" indent="0" marL="0">
+              <a:lnSpc>
+                <a:spcPts val="1680"/>
+              </a:lnSpc>
+              <a:spcBef>
+                <a:spcPts val="300"/>
+              </a:spcBef>
+              <a:spcAft>
+                <a:spcPts val="300"/>
+              </a:spcAft>
+              <a:buNone/>
+            </a:pPr>
+            <a:r>
+              <a:rPr lang="en-US" sz="1200" i="1" dirty="0">
+                <a:solidFill>
+                  <a:srgbClr val="1C2833"/>
+                </a:solidFill>
+                <a:latin typeface="Arial" pitchFamily="34" charset="0"/>
+                <a:ea typeface="Arial" pitchFamily="34" charset="-122"/>
+                <a:cs typeface="Arial" pitchFamily="34" charset="-120"/>
+              </a:rPr>
+              <a:t>"At Senior band you'll read Dani's critique in full and form a deeper position."</a:t>
+            </a:r>
+            <a:endParaRPr lang="en-US" sz="1200" dirty="0"/>
+          </a:p>
+        </p:txBody>
+      </p:sp>
+      <p:sp>
+        <p:nvSpPr>
+          <p:cNvPr id="5" name="Text 3"/>
+          <p:cNvSpPr/>
+          <p:nvPr/>
+        </p:nvSpPr>
+        <p:spPr>
+          <a:xfrm>
+            <a:off x="406301" y="4434929"/>
+            <a:ext cx="8498026" cy="213271"/>
+          </a:xfrm>
+          <a:prstGeom prst="rect">
+            <a:avLst/>
+          </a:prstGeom>
+          <a:noFill/>
+          <a:ln/>
+        </p:spPr>
+        <p:txBody>
+          <a:bodyPr wrap="square" lIns="0" tIns="0" rIns="0" bIns="0" rtlCol="0" anchor="t"/>
+          <a:lstStyle/>
+          <a:p>
+            <a:pPr algn="l" indent="0" marL="0">
+              <a:lnSpc>
+                <a:spcPts val="1680"/>
+              </a:lnSpc>
+              <a:spcBef>
+                <a:spcPts val="300"/>
+              </a:spcBef>
+              <a:spcAft>
+                <a:spcPts val="300"/>
+              </a:spcAft>
+              <a:buNone/>
+            </a:pPr>
+            <a:r>
+              <a:rPr lang="en-US" sz="1200" dirty="0">
+                <a:solidFill>
+                  <a:srgbClr val="1C2833"/>
+                </a:solidFill>
+                <a:latin typeface="Arial" pitchFamily="34" charset="0"/>
+                <a:ea typeface="Arial" pitchFamily="34" charset="-122"/>
+                <a:cs typeface="Arial" pitchFamily="34" charset="-120"/>
+              </a:rPr>
+              <a:t>Middle ·  · IKS Curriculum</a:t>
+            </a:r>
+            <a:endParaRPr lang="en-US" sz="1200" dirty="0"/>
+          </a:p>
+        </p:txBody>
+      </p:sp>
+    </p:spTree>
+  </p:cSld>
+  <p:clrMapOvr>
+    <a:masterClrMapping/>
+  </p:clrMapOvr>
+</p:sld>
+</file>
+
+<file path=ppt/slides/slide18.xml><?xml version="1.0" encoding="utf-8"?>
+<p:sld xmlns:a="http://schemas.openxmlformats.org/drawingml/2006/main" xmlns:r="http://schemas.openxmlformats.org/officeDocument/2006/relationships" xmlns:p="http://schemas.openxmlformats.org/presentationml/2006/main">
+  <p:cSld name="Slide 18">
+    <p:bg>
+      <p:bgPr>
+        <a:solidFill>
+          <a:srgbClr val="FFFFFF"/>
+        </a:solidFill>
+      </p:bgPr>
+    </p:bg>
+    <p:spTree>
+      <p:nvGrpSpPr>
+        <p:cNvPr id="1" name=""/>
+        <p:cNvGrpSpPr/>
+        <p:nvPr/>
+      </p:nvGrpSpPr>
+      <p:grpSpPr>
+        <a:xfrm>
+          <a:off x="0" y="0"/>
+          <a:ext cx="0" cy="0"/>
+          <a:chOff x="0" y="0"/>
+          <a:chExt cx="0" cy="0"/>
+        </a:xfrm>
+      </p:grpSpPr>
+      <p:sp>
+        <p:nvSpPr>
+          <p:cNvPr id="2" name="Text 0"/>
+          <p:cNvSpPr/>
+          <p:nvPr/>
+        </p:nvSpPr>
+        <p:spPr>
+          <a:xfrm>
+            <a:off x="0" y="0"/>
+            <a:ext cx="9144000" cy="101501"/>
+          </a:xfrm>
+          <a:prstGeom prst="rect">
+            <a:avLst/>
+          </a:prstGeom>
+          <a:solidFill>
+            <a:srgbClr val="277884"/>
+          </a:solidFill>
+          <a:ln/>
+        </p:spPr>
+        <p:txBody>
+          <a:bodyPr wrap="square" rtlCol="0" anchor="ctr"/>
+          <a:lstStyle/>
+          <a:p>
+            <a:pPr indent="0" marL="0">
+              <a:buNone/>
+            </a:pPr>
+            <a:endParaRPr lang="en-US" dirty="0"/>
+          </a:p>
+        </p:txBody>
+      </p:sp>
+      <p:sp>
+        <p:nvSpPr>
+          <p:cNvPr id="3" name="Text 1"/>
+          <p:cNvSpPr/>
+          <p:nvPr/>
+        </p:nvSpPr>
+        <p:spPr>
+          <a:xfrm>
+            <a:off x="406301" y="457051"/>
+            <a:ext cx="8498026" cy="274290"/>
+          </a:xfrm>
+          <a:prstGeom prst="rect">
+            <a:avLst/>
+          </a:prstGeom>
+          <a:noFill/>
+          <a:ln/>
+        </p:spPr>
+        <p:txBody>
+          <a:bodyPr wrap="square" lIns="0" tIns="0" rIns="0" bIns="0" rtlCol="0" anchor="t"/>
+          <a:lstStyle/>
+          <a:p>
+            <a:pPr algn="l" indent="0" marL="0">
+              <a:lnSpc>
+                <a:spcPts val="2160"/>
+              </a:lnSpc>
+              <a:spcBef>
+                <a:spcPts val="600"/>
+              </a:spcBef>
+              <a:spcAft>
+                <a:spcPts val="800"/>
+              </a:spcAft>
+              <a:buNone/>
+            </a:pPr>
+            <a:r>
+              <a:rPr lang="en-US" sz="1800" b="1" dirty="0">
+                <a:solidFill>
+                  <a:srgbClr val="FE4447"/>
+                </a:solidFill>
+                <a:latin typeface="Georgia" pitchFamily="34" charset="0"/>
+                <a:ea typeface="Georgia" pitchFamily="34" charset="-122"/>
+                <a:cs typeface="Georgia" pitchFamily="34" charset="-120"/>
+              </a:rPr>
+              <a:t>Wrap-up (2 min)</a:t>
+            </a:r>
+            <a:endParaRPr lang="en-US" sz="1800" dirty="0"/>
+          </a:p>
+        </p:txBody>
+      </p:sp>
+      <p:sp>
+        <p:nvSpPr>
+          <p:cNvPr id="4" name="Text 2"/>
+          <p:cNvSpPr/>
+          <p:nvPr/>
+        </p:nvSpPr>
+        <p:spPr>
+          <a:xfrm>
+            <a:off x="634901" y="883593"/>
+            <a:ext cx="8102798" cy="281880"/>
+          </a:xfrm>
+          <a:prstGeom prst="rect">
+            <a:avLst/>
+          </a:prstGeom>
+          <a:noFill/>
+          <a:ln/>
+        </p:spPr>
+        <p:txBody>
+          <a:bodyPr wrap="square" lIns="0" tIns="0" rIns="0" bIns="0" rtlCol="0" anchor="t"/>
+          <a:lstStyle/>
+          <a:p>
+            <a:pPr algn="l" marL="342900" indent="-342900">
+              <a:lnSpc>
+                <a:spcPts val="1620"/>
+              </a:lnSpc>
+              <a:spcAft>
+                <a:spcPts val="300"/>
+              </a:spcAft>
+              <a:buSzPct val="100000"/>
+              <a:buChar char="•"/>
+            </a:pPr>
+            <a:r>
+              <a:rPr lang="en-US" sz="1200" dirty="0">
+                <a:solidFill>
+                  <a:srgbClr val="1C2833"/>
+                </a:solidFill>
+                <a:latin typeface="Arial" pitchFamily="34" charset="0"/>
+                <a:ea typeface="Arial" pitchFamily="34" charset="-122"/>
+                <a:cs typeface="Arial" pitchFamily="34" charset="-120"/>
+              </a:rPr>
+              <a:t>Preview Day 9: </a:t>
+            </a:r>
+            <a:pPr algn="l" indent="0" marL="0">
+              <a:lnSpc>
+                <a:spcPts val="1620"/>
+              </a:lnSpc>
+              <a:spcAft>
+                <a:spcPts val="300"/>
+              </a:spcAft>
+              <a:buNone/>
+            </a:pPr>
+            <a:r>
+              <a:rPr lang="en-US" sz="1200" i="1" dirty="0">
+                <a:solidFill>
+                  <a:srgbClr val="1C2833"/>
+                </a:solidFill>
+                <a:latin typeface="Arial" pitchFamily="34" charset="0"/>
+                <a:ea typeface="Arial" pitchFamily="34" charset="-122"/>
+                <a:cs typeface="Arial" pitchFamily="34" charset="-120"/>
+              </a:rPr>
+              <a:t>"Tomorrow — mixed-practice day plus project work. Friday is the final assessment."</a:t>
+            </a:r>
+            <a:endParaRPr lang="en-US" sz="1200" dirty="0"/>
+          </a:p>
+        </p:txBody>
+      </p:sp>
+      <p:sp>
+        <p:nvSpPr>
+          <p:cNvPr id="5" name="Text 3"/>
+          <p:cNvSpPr/>
+          <p:nvPr/>
+        </p:nvSpPr>
+        <p:spPr>
+          <a:xfrm>
+            <a:off x="406301" y="4434929"/>
+            <a:ext cx="8498026" cy="213271"/>
+          </a:xfrm>
+          <a:prstGeom prst="rect">
+            <a:avLst/>
+          </a:prstGeom>
+          <a:noFill/>
+          <a:ln/>
+        </p:spPr>
+        <p:txBody>
+          <a:bodyPr wrap="square" lIns="0" tIns="0" rIns="0" bIns="0" rtlCol="0" anchor="t"/>
+          <a:lstStyle/>
+          <a:p>
+            <a:pPr algn="l" indent="0" marL="0">
+              <a:lnSpc>
+                <a:spcPts val="1680"/>
+              </a:lnSpc>
+              <a:spcBef>
+                <a:spcPts val="300"/>
+              </a:spcBef>
+              <a:spcAft>
+                <a:spcPts val="300"/>
+              </a:spcAft>
+              <a:buNone/>
+            </a:pPr>
+            <a:r>
+              <a:rPr lang="en-US" sz="1200" dirty="0">
+                <a:solidFill>
+                  <a:srgbClr val="1C2833"/>
+                </a:solidFill>
+                <a:latin typeface="Arial" pitchFamily="34" charset="0"/>
+                <a:ea typeface="Arial" pitchFamily="34" charset="-122"/>
+                <a:cs typeface="Arial" pitchFamily="34" charset="-120"/>
+              </a:rPr>
+              <a:t>Middle ·  · IKS Curriculum</a:t>
+            </a:r>
+            <a:endParaRPr lang="en-US" sz="1200" dirty="0"/>
+          </a:p>
+        </p:txBody>
+      </p:sp>
+    </p:spTree>
+  </p:cSld>
+  <p:clrMapOvr>
+    <a:masterClrMapping/>
+  </p:clrMapOvr>
+</p:sld>
+</file>
+
+<file path=ppt/slides/slide19.xml><?xml version="1.0" encoding="utf-8"?>
+<p:sld xmlns:a="http://schemas.openxmlformats.org/drawingml/2006/main" xmlns:r="http://schemas.openxmlformats.org/officeDocument/2006/relationships" xmlns:p="http://schemas.openxmlformats.org/presentationml/2006/main">
+  <p:cSld name="Slide 19">
+    <p:bg>
+      <p:bgPr>
+        <a:solidFill>
+          <a:srgbClr val="FFFFFF"/>
+        </a:solidFill>
+      </p:bgPr>
+    </p:bg>
+    <p:spTree>
+      <p:nvGrpSpPr>
+        <p:cNvPr id="1" name=""/>
+        <p:cNvGrpSpPr/>
+        <p:nvPr/>
+      </p:nvGrpSpPr>
+      <p:grpSpPr>
+        <a:xfrm>
+          <a:off x="0" y="0"/>
+          <a:ext cx="0" cy="0"/>
+          <a:chOff x="0" y="0"/>
+          <a:chExt cx="0" cy="0"/>
+        </a:xfrm>
+      </p:grpSpPr>
+      <p:sp>
+        <p:nvSpPr>
+          <p:cNvPr id="2" name="Text 0"/>
+          <p:cNvSpPr/>
+          <p:nvPr/>
+        </p:nvSpPr>
+        <p:spPr>
+          <a:xfrm>
+            <a:off x="0" y="0"/>
+            <a:ext cx="9144000" cy="101501"/>
+          </a:xfrm>
+          <a:prstGeom prst="rect">
+            <a:avLst/>
+          </a:prstGeom>
+          <a:solidFill>
+            <a:srgbClr val="277884"/>
+          </a:solidFill>
+          <a:ln/>
+        </p:spPr>
+        <p:txBody>
+          <a:bodyPr wrap="square" rtlCol="0" anchor="ctr"/>
+          <a:lstStyle/>
+          <a:p>
+            <a:pPr indent="0" marL="0">
+              <a:buNone/>
+            </a:pPr>
+            <a:endParaRPr lang="en-US" dirty="0"/>
+          </a:p>
+        </p:txBody>
+      </p:sp>
+      <p:sp>
+        <p:nvSpPr>
+          <p:cNvPr id="3" name="Text 1"/>
+          <p:cNvSpPr/>
+          <p:nvPr/>
+        </p:nvSpPr>
+        <p:spPr>
+          <a:xfrm>
+            <a:off x="406301" y="457051"/>
+            <a:ext cx="8498026" cy="274290"/>
+          </a:xfrm>
+          <a:prstGeom prst="rect">
+            <a:avLst/>
+          </a:prstGeom>
+          <a:noFill/>
+          <a:ln/>
+        </p:spPr>
+        <p:txBody>
+          <a:bodyPr wrap="square" lIns="0" tIns="0" rIns="0" bIns="0" rtlCol="0" anchor="t"/>
+          <a:lstStyle/>
+          <a:p>
+            <a:pPr algn="l" indent="0" marL="0">
+              <a:lnSpc>
+                <a:spcPts val="2160"/>
+              </a:lnSpc>
+              <a:spcBef>
+                <a:spcPts val="600"/>
+              </a:spcBef>
+              <a:spcAft>
+                <a:spcPts val="800"/>
+              </a:spcAft>
+              <a:buNone/>
+            </a:pPr>
+            <a:r>
+              <a:rPr lang="en-US" sz="1800" b="1" dirty="0">
+                <a:solidFill>
+                  <a:srgbClr val="FE4447"/>
+                </a:solidFill>
+                <a:latin typeface="Georgia" pitchFamily="34" charset="0"/>
+                <a:ea typeface="Georgia" pitchFamily="34" charset="-122"/>
+                <a:cs typeface="Georgia" pitchFamily="34" charset="-120"/>
+              </a:rPr>
+              <a:t>Student-facing content</a:t>
+            </a:r>
+            <a:endParaRPr lang="en-US" sz="1800" dirty="0"/>
+          </a:p>
+        </p:txBody>
+      </p:sp>
+      <p:sp>
+        <p:nvSpPr>
+          <p:cNvPr id="4" name="Text 2"/>
+          <p:cNvSpPr/>
+          <p:nvPr/>
+        </p:nvSpPr>
+        <p:spPr>
+          <a:xfrm>
+            <a:off x="406301" y="883593"/>
+            <a:ext cx="8331398" cy="2574131"/>
+          </a:xfrm>
+          <a:prstGeom prst="rect">
+            <a:avLst/>
+          </a:prstGeom>
+          <a:solidFill>
+            <a:srgbClr val="F4F8F9"/>
+          </a:solidFill>
+          <a:ln/>
+        </p:spPr>
+        <p:txBody>
+          <a:bodyPr wrap="square" rtlCol="0" anchor="ctr"/>
+          <a:lstStyle/>
+          <a:p>
+            <a:pPr indent="0" marL="0">
+              <a:buNone/>
+            </a:pPr>
+            <a:endParaRPr lang="en-US" dirty="0"/>
+          </a:p>
+        </p:txBody>
+      </p:sp>
+      <p:sp>
+        <p:nvSpPr>
+          <p:cNvPr id="5" name="Shape 3"/>
+          <p:cNvSpPr/>
+          <p:nvPr/>
+        </p:nvSpPr>
+        <p:spPr>
+          <a:xfrm>
+            <a:off x="434876" y="883593"/>
+            <a:ext cx="0" cy="2574131"/>
+          </a:xfrm>
+          <a:prstGeom prst="line">
+            <a:avLst/>
+          </a:prstGeom>
+          <a:noFill/>
+          <a:ln w="57150">
+            <a:solidFill>
+              <a:srgbClr val="FE4447"/>
+            </a:solidFill>
+            <a:prstDash val="solid"/>
+          </a:ln>
+        </p:spPr>
+      </p:sp>
       <p:sp>
         <p:nvSpPr>
           <p:cNvPr id="6" name="Text 4"/>
+          <p:cNvSpPr/>
+          <p:nvPr/>
+        </p:nvSpPr>
+        <p:spPr>
+          <a:xfrm>
+            <a:off x="692051" y="1074093"/>
+            <a:ext cx="7973389" cy="230981"/>
+          </a:xfrm>
+          <a:prstGeom prst="rect">
+            <a:avLst/>
+          </a:prstGeom>
+          <a:noFill/>
+          <a:ln/>
+        </p:spPr>
+        <p:txBody>
+          <a:bodyPr wrap="square" lIns="0" tIns="0" rIns="0" bIns="0" rtlCol="0" anchor="t"/>
+          <a:lstStyle/>
+          <a:p>
+            <a:pPr algn="l" indent="0" marL="0">
+              <a:lnSpc>
+                <a:spcPts val="1820"/>
+              </a:lnSpc>
+              <a:spcBef>
+                <a:spcPts val="300"/>
+              </a:spcBef>
+              <a:spcAft>
+                <a:spcPts val="300"/>
+              </a:spcAft>
+              <a:buNone/>
+            </a:pPr>
+            <a:r>
+              <a:rPr lang="en-US" sz="1300" b="1" i="1" dirty="0">
+                <a:solidFill>
+                  <a:srgbClr val="1C2833"/>
+                </a:solidFill>
+                <a:latin typeface="Georgia" pitchFamily="34" charset="0"/>
+                <a:ea typeface="Georgia" pitchFamily="34" charset="-122"/>
+                <a:cs typeface="Georgia" pitchFamily="34" charset="-120"/>
+              </a:rPr>
+              <a:t>Tirthaji and the 16 sūtras</a:t>
+            </a:r>
+            <a:endParaRPr lang="en-US" sz="1300" dirty="0"/>
+          </a:p>
+        </p:txBody>
+      </p:sp>
+      <p:sp>
+        <p:nvSpPr>
+          <p:cNvPr id="7" name="Text 5"/>
+          <p:cNvSpPr/>
+          <p:nvPr/>
+        </p:nvSpPr>
+        <p:spPr>
+          <a:xfrm>
+            <a:off x="692051" y="1343174"/>
+            <a:ext cx="7973389" cy="461963"/>
+          </a:xfrm>
+          <a:prstGeom prst="rect">
+            <a:avLst/>
+          </a:prstGeom>
+          <a:noFill/>
+          <a:ln/>
+        </p:spPr>
+        <p:txBody>
+          <a:bodyPr wrap="square" lIns="0" tIns="0" rIns="0" bIns="0" rtlCol="0" anchor="t"/>
+          <a:lstStyle/>
+          <a:p>
+            <a:pPr algn="l" indent="0" marL="0">
+              <a:lnSpc>
+                <a:spcPts val="1820"/>
+              </a:lnSpc>
+              <a:spcBef>
+                <a:spcPts val="300"/>
+              </a:spcBef>
+              <a:spcAft>
+                <a:spcPts val="300"/>
+              </a:spcAft>
+              <a:buNone/>
+            </a:pPr>
+            <a:r>
+              <a:rPr lang="en-US" sz="1300" dirty="0">
+                <a:solidFill>
+                  <a:srgbClr val="1C2833"/>
+                </a:solidFill>
+                <a:latin typeface="Georgia" pitchFamily="34" charset="0"/>
+                <a:ea typeface="Georgia" pitchFamily="34" charset="-122"/>
+                <a:cs typeface="Georgia" pitchFamily="34" charset="-120"/>
+              </a:rPr>
+              <a:t>Bharati Krishna Tirthaji (1884–1960), Śaṅkarācārya of Govardhana Maṭha, wrote </a:t>
+            </a:r>
+            <a:pPr algn="l" indent="0" marL="0">
+              <a:lnSpc>
+                <a:spcPts val="1820"/>
+              </a:lnSpc>
+              <a:spcBef>
+                <a:spcPts val="300"/>
+              </a:spcBef>
+              <a:spcAft>
+                <a:spcPts val="300"/>
+              </a:spcAft>
+              <a:buNone/>
+            </a:pPr>
+            <a:r>
+              <a:rPr lang="en-US" sz="1300" i="1" dirty="0">
+                <a:solidFill>
+                  <a:srgbClr val="1C2833"/>
+                </a:solidFill>
+                <a:latin typeface="Georgia" pitchFamily="34" charset="0"/>
+                <a:ea typeface="Georgia" pitchFamily="34" charset="-122"/>
+                <a:cs typeface="Georgia" pitchFamily="34" charset="-120"/>
+              </a:rPr>
+              <a:t>Vedic Mathematics</a:t>
+            </a:r>
+            <a:pPr algn="l" indent="0" marL="0">
+              <a:lnSpc>
+                <a:spcPts val="1820"/>
+              </a:lnSpc>
+              <a:spcBef>
+                <a:spcPts val="300"/>
+              </a:spcBef>
+              <a:spcAft>
+                <a:spcPts val="300"/>
+              </a:spcAft>
+              <a:buNone/>
+            </a:pPr>
+            <a:r>
+              <a:rPr lang="en-US" sz="1300" dirty="0">
+                <a:solidFill>
+                  <a:srgbClr val="1C2833"/>
+                </a:solidFill>
+                <a:latin typeface="Georgia" pitchFamily="34" charset="0"/>
+                <a:ea typeface="Georgia" pitchFamily="34" charset="-122"/>
+                <a:cs typeface="Georgia" pitchFamily="34" charset="-120"/>
+              </a:rPr>
+              <a:t> between roughly 1911 and 1918. The book was published in 1965, five years after his death.</a:t>
+            </a:r>
+            <a:endParaRPr lang="en-US" sz="1300" dirty="0"/>
+          </a:p>
+        </p:txBody>
+      </p:sp>
+      <p:sp>
+        <p:nvSpPr>
+          <p:cNvPr id="8" name="Text 6"/>
+          <p:cNvSpPr/>
+          <p:nvPr/>
+        </p:nvSpPr>
+        <p:spPr>
+          <a:xfrm>
+            <a:off x="692051" y="1843236"/>
+            <a:ext cx="7973389" cy="923925"/>
+          </a:xfrm>
+          <a:prstGeom prst="rect">
+            <a:avLst/>
+          </a:prstGeom>
+          <a:noFill/>
+          <a:ln/>
+        </p:spPr>
+        <p:txBody>
+          <a:bodyPr wrap="square" lIns="0" tIns="0" rIns="0" bIns="0" rtlCol="0" anchor="t"/>
+          <a:lstStyle/>
+          <a:p>
+            <a:pPr algn="l" indent="0" marL="0">
+              <a:lnSpc>
+                <a:spcPts val="1820"/>
+              </a:lnSpc>
+              <a:spcBef>
+                <a:spcPts val="300"/>
+              </a:spcBef>
+              <a:spcAft>
+                <a:spcPts val="300"/>
+              </a:spcAft>
+              <a:buNone/>
+            </a:pPr>
+            <a:r>
+              <a:rPr lang="en-US" sz="1300" dirty="0">
+                <a:solidFill>
+                  <a:srgbClr val="1C2833"/>
+                </a:solidFill>
+                <a:latin typeface="Georgia" pitchFamily="34" charset="0"/>
+                <a:ea typeface="Georgia" pitchFamily="34" charset="-122"/>
+                <a:cs typeface="Georgia" pitchFamily="34" charset="-120"/>
+              </a:rPr>
+              <a:t>Tirthaji claimed the 16 sūtras (including our </a:t>
+            </a:r>
+            <a:pPr algn="l" indent="0" marL="0">
+              <a:lnSpc>
+                <a:spcPts val="1820"/>
+              </a:lnSpc>
+              <a:spcBef>
+                <a:spcPts val="300"/>
+              </a:spcBef>
+              <a:spcAft>
+                <a:spcPts val="300"/>
+              </a:spcAft>
+              <a:buNone/>
+            </a:pPr>
+            <a:r>
+              <a:rPr lang="en-US" sz="1300" i="1" dirty="0">
+                <a:solidFill>
+                  <a:srgbClr val="1C2833"/>
+                </a:solidFill>
+                <a:latin typeface="Georgia" pitchFamily="34" charset="0"/>
+                <a:ea typeface="Georgia" pitchFamily="34" charset="-122"/>
+                <a:cs typeface="Georgia" pitchFamily="34" charset="-120"/>
+              </a:rPr>
+              <a:t>Ekādhikena Pūrveṇa</a:t>
+            </a:r>
+            <a:pPr algn="l" indent="0" marL="0">
+              <a:lnSpc>
+                <a:spcPts val="1820"/>
+              </a:lnSpc>
+              <a:spcBef>
+                <a:spcPts val="300"/>
+              </a:spcBef>
+              <a:spcAft>
+                <a:spcPts val="300"/>
+              </a:spcAft>
+              <a:buNone/>
+            </a:pPr>
+            <a:r>
+              <a:rPr lang="en-US" sz="1300" dirty="0">
+                <a:solidFill>
+                  <a:srgbClr val="1C2833"/>
+                </a:solidFill>
+                <a:latin typeface="Georgia" pitchFamily="34" charset="0"/>
+                <a:ea typeface="Georgia" pitchFamily="34" charset="-122"/>
+                <a:cs typeface="Georgia" pitchFamily="34" charset="-120"/>
+              </a:rPr>
+              <a:t>) come from a Vedic appendix-text. </a:t>
+            </a:r>
+            <a:pPr algn="l" indent="0" marL="0">
+              <a:lnSpc>
+                <a:spcPts val="1820"/>
+              </a:lnSpc>
+              <a:spcBef>
+                <a:spcPts val="300"/>
+              </a:spcBef>
+              <a:spcAft>
+                <a:spcPts val="300"/>
+              </a:spcAft>
+              <a:buNone/>
+            </a:pPr>
+            <a:r>
+              <a:rPr lang="en-US" sz="1300" b="1" i="1" dirty="0">
+                <a:solidFill>
+                  <a:srgbClr val="1C2833"/>
+                </a:solidFill>
+                <a:latin typeface="Georgia" pitchFamily="34" charset="0"/>
+                <a:ea typeface="Georgia" pitchFamily="34" charset="-122"/>
+                <a:cs typeface="Georgia" pitchFamily="34" charset="-120"/>
+              </a:rPr>
+              <a:t>No other Sanskritist has produced this manuscript.</a:t>
+            </a:r>
+            <a:pPr algn="l" indent="0" marL="0">
+              <a:lnSpc>
+                <a:spcPts val="1820"/>
+              </a:lnSpc>
+              <a:spcBef>
+                <a:spcPts val="300"/>
+              </a:spcBef>
+              <a:spcAft>
+                <a:spcPts val="300"/>
+              </a:spcAft>
+              <a:buNone/>
+            </a:pPr>
+            <a:r>
+              <a:rPr lang="en-US" sz="1300" dirty="0">
+                <a:solidFill>
+                  <a:srgbClr val="1C2833"/>
+                </a:solidFill>
+                <a:latin typeface="Georgia" pitchFamily="34" charset="0"/>
+                <a:ea typeface="Georgia" pitchFamily="34" charset="-122"/>
+                <a:cs typeface="Georgia" pitchFamily="34" charset="-120"/>
+              </a:rPr>
+              <a:t> S. G. Dani (1993) argues the sūtras are best understood as a 20th-century synthesis with Indian-mathematics roots, not a verifiably ancient Vedic teaching.</a:t>
+            </a:r>
+            <a:endParaRPr lang="en-US" sz="1300" dirty="0"/>
+          </a:p>
+        </p:txBody>
+      </p:sp>
+      <p:sp>
+        <p:nvSpPr>
+          <p:cNvPr id="9" name="Text 7"/>
+          <p:cNvSpPr/>
+          <p:nvPr/>
+        </p:nvSpPr>
+        <p:spPr>
+          <a:xfrm>
+            <a:off x="692051" y="2805261"/>
+            <a:ext cx="7973389" cy="461963"/>
+          </a:xfrm>
+          <a:prstGeom prst="rect">
+            <a:avLst/>
+          </a:prstGeom>
+          <a:noFill/>
+          <a:ln/>
+        </p:spPr>
+        <p:txBody>
+          <a:bodyPr wrap="square" lIns="0" tIns="0" rIns="0" bIns="0" rtlCol="0" anchor="t"/>
+          <a:lstStyle/>
+          <a:p>
+            <a:pPr algn="l" indent="0" marL="0">
+              <a:lnSpc>
+                <a:spcPts val="1820"/>
+              </a:lnSpc>
+              <a:spcBef>
+                <a:spcPts val="300"/>
+              </a:spcBef>
+              <a:spcAft>
+                <a:spcPts val="300"/>
+              </a:spcAft>
+              <a:buNone/>
+            </a:pPr>
+            <a:r>
+              <a:rPr lang="en-US" sz="1300" i="1" dirty="0">
+                <a:solidFill>
+                  <a:srgbClr val="1C2833"/>
+                </a:solidFill>
+                <a:latin typeface="Georgia" pitchFamily="34" charset="0"/>
+                <a:ea typeface="Georgia" pitchFamily="34" charset="-122"/>
+                <a:cs typeface="Georgia" pitchFamily="34" charset="-120"/>
+              </a:rPr>
+              <a:t>The trick works. The history is contested. Both can be true. The Indian intellectual achievement is real either way.</a:t>
+            </a:r>
+            <a:endParaRPr lang="en-US" sz="1300" dirty="0"/>
+          </a:p>
+        </p:txBody>
+      </p:sp>
+      <p:sp>
+        <p:nvSpPr>
+          <p:cNvPr id="10" name="Text 8"/>
           <p:cNvSpPr/>
           <p:nvPr/>
         </p:nvSpPr>
@@ -2913,7 +6688,7 @@
                 <a:ea typeface="Georgia" pitchFamily="34" charset="-122"/>
                 <a:cs typeface="Georgia" pitchFamily="34" charset="-120"/>
               </a:rPr>
-              <a:t>Materials</a:t>
+              <a:t>Learning objective</a:t>
             </a:r>
             <a:endParaRPr lang="en-US" sz="1800" dirty="0"/>
           </a:p>
@@ -2928,7 +6703,7 @@
         <p:spPr>
           <a:xfrm>
             <a:off x="406301" y="870942"/>
-            <a:ext cx="8498026" cy="436066"/>
+            <a:ext cx="8498026" cy="426541"/>
           </a:xfrm>
           <a:prstGeom prst="rect">
             <a:avLst/>
@@ -2961,7 +6736,7 @@
                 <a:ea typeface="Arial" pitchFamily="34" charset="-122"/>
                 <a:cs typeface="Arial" pitchFamily="34" charset="-120"/>
               </a:rPr>
-              <a:t>– Printed handout: the list of 16 sūtras + 13 sub-sūtras (from </a:t>
+              <a:t>By the end of this lesson, students will name at least 5 of Tirthaji's 16 sūtras, explain in 2–3 sentences when and by whom </a:t>
             </a:r>
             <a:pPr algn="l" indent="0" marL="0">
               <a:lnSpc>
@@ -2976,6 +6751,29 @@
               <a:buNone/>
             </a:pPr>
             <a:r>
+              <a:rPr lang="en-US" sz="1200" i="1" dirty="0">
+                <a:solidFill>
+                  <a:srgbClr val="1C2833"/>
+                </a:solidFill>
+                <a:latin typeface="Arial" pitchFamily="34" charset="0"/>
+                <a:ea typeface="Arial" pitchFamily="34" charset="-122"/>
+                <a:cs typeface="Arial" pitchFamily="34" charset="-120"/>
+              </a:rPr>
+              <a:t>Vedic Mathematics</a:t>
+            </a:r>
+            <a:pPr algn="l" indent="0" marL="0">
+              <a:lnSpc>
+                <a:spcPts val="1680"/>
+              </a:lnSpc>
+              <a:spcBef>
+                <a:spcPts val="300"/>
+              </a:spcBef>
+              <a:spcAft>
+                <a:spcPts val="300"/>
+              </a:spcAft>
+              <a:buNone/>
+            </a:pPr>
+            <a:r>
               <a:rPr lang="en-US" sz="1200" dirty="0">
                 <a:solidFill>
                   <a:srgbClr val="1C2833"/>
@@ -2984,15 +6782,1068 @@
                 <a:ea typeface="Arial" pitchFamily="34" charset="-122"/>
                 <a:cs typeface="Arial" pitchFamily="34" charset="-120"/>
               </a:rPr>
+              <a:t> was published, and state honestly that the "Vedic" attribution is academically contested.</a:t>
+            </a:r>
+            <a:endParaRPr lang="en-US" sz="1200" dirty="0"/>
+          </a:p>
+        </p:txBody>
+      </p:sp>
+      <p:sp>
+        <p:nvSpPr>
+          <p:cNvPr id="5" name="Text 3"/>
+          <p:cNvSpPr/>
+          <p:nvPr/>
+        </p:nvSpPr>
+        <p:spPr>
+          <a:xfrm>
+            <a:off x="406301" y="4434929"/>
+            <a:ext cx="8498026" cy="213271"/>
+          </a:xfrm>
+          <a:prstGeom prst="rect">
+            <a:avLst/>
+          </a:prstGeom>
+          <a:noFill/>
+          <a:ln/>
+        </p:spPr>
+        <p:txBody>
+          <a:bodyPr wrap="square" lIns="0" tIns="0" rIns="0" bIns="0" rtlCol="0" anchor="t"/>
+          <a:lstStyle/>
+          <a:p>
+            <a:pPr algn="l" indent="0" marL="0">
+              <a:lnSpc>
+                <a:spcPts val="1680"/>
+              </a:lnSpc>
+              <a:spcBef>
+                <a:spcPts val="300"/>
+              </a:spcBef>
+              <a:spcAft>
+                <a:spcPts val="300"/>
+              </a:spcAft>
+              <a:buNone/>
+            </a:pPr>
+            <a:r>
+              <a:rPr lang="en-US" sz="1200" dirty="0">
+                <a:solidFill>
+                  <a:srgbClr val="1C2833"/>
+                </a:solidFill>
+                <a:latin typeface="Arial" pitchFamily="34" charset="0"/>
+                <a:ea typeface="Arial" pitchFamily="34" charset="-122"/>
+                <a:cs typeface="Arial" pitchFamily="34" charset="-120"/>
+              </a:rPr>
+              <a:t>Middle ·  · IKS Curriculum</a:t>
+            </a:r>
+            <a:endParaRPr lang="en-US" sz="1200" dirty="0"/>
+          </a:p>
+        </p:txBody>
+      </p:sp>
+    </p:spTree>
+  </p:cSld>
+  <p:clrMapOvr>
+    <a:masterClrMapping/>
+  </p:clrMapOvr>
+</p:sld>
+</file>
+
+<file path=ppt/slides/slide20.xml><?xml version="1.0" encoding="utf-8"?>
+<p:sld xmlns:a="http://schemas.openxmlformats.org/drawingml/2006/main" xmlns:r="http://schemas.openxmlformats.org/officeDocument/2006/relationships" xmlns:p="http://schemas.openxmlformats.org/presentationml/2006/main">
+  <p:cSld name="Slide 20">
+    <p:bg>
+      <p:bgPr>
+        <a:solidFill>
+          <a:srgbClr val="FFFFFF"/>
+        </a:solidFill>
+      </p:bgPr>
+    </p:bg>
+    <p:spTree>
+      <p:nvGrpSpPr>
+        <p:cNvPr id="1" name=""/>
+        <p:cNvGrpSpPr/>
+        <p:nvPr/>
+      </p:nvGrpSpPr>
+      <p:grpSpPr>
+        <a:xfrm>
+          <a:off x="0" y="0"/>
+          <a:ext cx="0" cy="0"/>
+          <a:chOff x="0" y="0"/>
+          <a:chExt cx="0" cy="0"/>
+        </a:xfrm>
+      </p:grpSpPr>
+      <p:sp>
+        <p:nvSpPr>
+          <p:cNvPr id="2" name="Text 0"/>
+          <p:cNvSpPr/>
+          <p:nvPr/>
+        </p:nvSpPr>
+        <p:spPr>
+          <a:xfrm>
+            <a:off x="0" y="0"/>
+            <a:ext cx="9144000" cy="101501"/>
+          </a:xfrm>
+          <a:prstGeom prst="rect">
+            <a:avLst/>
+          </a:prstGeom>
+          <a:solidFill>
+            <a:srgbClr val="277884"/>
+          </a:solidFill>
+          <a:ln/>
+        </p:spPr>
+        <p:txBody>
+          <a:bodyPr wrap="square" rtlCol="0" anchor="ctr"/>
+          <a:lstStyle/>
+          <a:p>
+            <a:pPr indent="0" marL="0">
+              <a:buNone/>
+            </a:pPr>
+            <a:endParaRPr lang="en-US" dirty="0"/>
+          </a:p>
+        </p:txBody>
+      </p:sp>
+      <p:sp>
+        <p:nvSpPr>
+          <p:cNvPr id="3" name="Text 1"/>
+          <p:cNvSpPr/>
+          <p:nvPr/>
+        </p:nvSpPr>
+        <p:spPr>
+          <a:xfrm>
+            <a:off x="406301" y="457051"/>
+            <a:ext cx="8498026" cy="274290"/>
+          </a:xfrm>
+          <a:prstGeom prst="rect">
+            <a:avLst/>
+          </a:prstGeom>
+          <a:noFill/>
+          <a:ln/>
+        </p:spPr>
+        <p:txBody>
+          <a:bodyPr wrap="square" lIns="0" tIns="0" rIns="0" bIns="0" rtlCol="0" anchor="t"/>
+          <a:lstStyle/>
+          <a:p>
+            <a:pPr algn="l" indent="0" marL="0">
+              <a:lnSpc>
+                <a:spcPts val="2160"/>
+              </a:lnSpc>
+              <a:spcBef>
+                <a:spcPts val="600"/>
+              </a:spcBef>
+              <a:spcAft>
+                <a:spcPts val="800"/>
+              </a:spcAft>
+              <a:buNone/>
+            </a:pPr>
+            <a:r>
+              <a:rPr lang="en-US" sz="1800" b="1" dirty="0">
+                <a:solidFill>
+                  <a:srgbClr val="FE4447"/>
+                </a:solidFill>
+                <a:latin typeface="Georgia" pitchFamily="34" charset="0"/>
+                <a:ea typeface="Georgia" pitchFamily="34" charset="-122"/>
+                <a:cs typeface="Georgia" pitchFamily="34" charset="-120"/>
+              </a:rPr>
+              <a:t>Homework</a:t>
+            </a:r>
+            <a:endParaRPr lang="en-US" sz="1800" dirty="0"/>
+          </a:p>
+        </p:txBody>
+      </p:sp>
+      <p:sp>
+        <p:nvSpPr>
+          <p:cNvPr id="4" name="Text 2"/>
+          <p:cNvSpPr/>
+          <p:nvPr/>
+        </p:nvSpPr>
+        <p:spPr>
+          <a:xfrm>
+            <a:off x="634901" y="883593"/>
+            <a:ext cx="8102798" cy="487561"/>
+          </a:xfrm>
+          <a:prstGeom prst="rect">
+            <a:avLst/>
+          </a:prstGeom>
+          <a:noFill/>
+          <a:ln/>
+        </p:spPr>
+        <p:txBody>
+          <a:bodyPr wrap="square" lIns="0" tIns="0" rIns="0" bIns="0" rtlCol="0" anchor="t"/>
+          <a:lstStyle/>
+          <a:p>
+            <a:pPr algn="l" marL="342900" indent="-342900">
+              <a:lnSpc>
+                <a:spcPts val="1620"/>
+              </a:lnSpc>
+              <a:spcAft>
+                <a:spcPts val="300"/>
+              </a:spcAft>
+              <a:buSzPct val="100000"/>
+              <a:buChar char="•"/>
+            </a:pPr>
+            <a:r>
+              <a:rPr lang="en-US" sz="1200" dirty="0">
+                <a:solidFill>
+                  <a:srgbClr val="1C2833"/>
+                </a:solidFill>
+                <a:latin typeface="Arial" pitchFamily="34" charset="0"/>
+                <a:ea typeface="Arial" pitchFamily="34" charset="-122"/>
+                <a:cs typeface="Arial" pitchFamily="34" charset="-120"/>
+              </a:rPr>
+              <a:t>Read the 16-sūtra list. Pick ONE sūtra (other than the two we've studied) and find what mathematical operation it's used for. (Sūtras 2, 3, 4, 10, 14 are well-documented in Tirthaji 1965.) Write 3 sentences.</a:t>
+            </a:r>
+            <a:endParaRPr lang="en-US" sz="1200" dirty="0"/>
+          </a:p>
+        </p:txBody>
+      </p:sp>
+      <p:sp>
+        <p:nvSpPr>
+          <p:cNvPr id="5" name="Text 3"/>
+          <p:cNvSpPr/>
+          <p:nvPr/>
+        </p:nvSpPr>
+        <p:spPr>
+          <a:xfrm>
+            <a:off x="406301" y="4434929"/>
+            <a:ext cx="8498026" cy="213271"/>
+          </a:xfrm>
+          <a:prstGeom prst="rect">
+            <a:avLst/>
+          </a:prstGeom>
+          <a:noFill/>
+          <a:ln/>
+        </p:spPr>
+        <p:txBody>
+          <a:bodyPr wrap="square" lIns="0" tIns="0" rIns="0" bIns="0" rtlCol="0" anchor="t"/>
+          <a:lstStyle/>
+          <a:p>
+            <a:pPr algn="l" indent="0" marL="0">
+              <a:lnSpc>
+                <a:spcPts val="1680"/>
+              </a:lnSpc>
+              <a:spcBef>
+                <a:spcPts val="300"/>
+              </a:spcBef>
+              <a:spcAft>
+                <a:spcPts val="300"/>
+              </a:spcAft>
+              <a:buNone/>
+            </a:pPr>
+            <a:r>
+              <a:rPr lang="en-US" sz="1200" dirty="0">
+                <a:solidFill>
+                  <a:srgbClr val="1C2833"/>
+                </a:solidFill>
+                <a:latin typeface="Arial" pitchFamily="34" charset="0"/>
+                <a:ea typeface="Arial" pitchFamily="34" charset="-122"/>
+                <a:cs typeface="Arial" pitchFamily="34" charset="-120"/>
+              </a:rPr>
+              <a:t>Middle ·  · IKS Curriculum</a:t>
+            </a:r>
+            <a:endParaRPr lang="en-US" sz="1200" dirty="0"/>
+          </a:p>
+        </p:txBody>
+      </p:sp>
+    </p:spTree>
+  </p:cSld>
+  <p:clrMapOvr>
+    <a:masterClrMapping/>
+  </p:clrMapOvr>
+</p:sld>
+</file>
+
+<file path=ppt/slides/slide21.xml><?xml version="1.0" encoding="utf-8"?>
+<p:sld xmlns:a="http://schemas.openxmlformats.org/drawingml/2006/main" xmlns:r="http://schemas.openxmlformats.org/officeDocument/2006/relationships" xmlns:p="http://schemas.openxmlformats.org/presentationml/2006/main">
+  <p:cSld name="Slide 21">
+    <p:bg>
+      <p:bgPr>
+        <a:solidFill>
+          <a:srgbClr val="FFFFFF"/>
+        </a:solidFill>
+      </p:bgPr>
+    </p:bg>
+    <p:spTree>
+      <p:nvGrpSpPr>
+        <p:cNvPr id="1" name=""/>
+        <p:cNvGrpSpPr/>
+        <p:nvPr/>
+      </p:nvGrpSpPr>
+      <p:grpSpPr>
+        <a:xfrm>
+          <a:off x="0" y="0"/>
+          <a:ext cx="0" cy="0"/>
+          <a:chOff x="0" y="0"/>
+          <a:chExt cx="0" cy="0"/>
+        </a:xfrm>
+      </p:grpSpPr>
+      <p:sp>
+        <p:nvSpPr>
+          <p:cNvPr id="2" name="Text 0"/>
+          <p:cNvSpPr/>
+          <p:nvPr/>
+        </p:nvSpPr>
+        <p:spPr>
+          <a:xfrm>
+            <a:off x="0" y="0"/>
+            <a:ext cx="9144000" cy="101501"/>
+          </a:xfrm>
+          <a:prstGeom prst="rect">
+            <a:avLst/>
+          </a:prstGeom>
+          <a:solidFill>
+            <a:srgbClr val="277884"/>
+          </a:solidFill>
+          <a:ln/>
+        </p:spPr>
+        <p:txBody>
+          <a:bodyPr wrap="square" rtlCol="0" anchor="ctr"/>
+          <a:lstStyle/>
+          <a:p>
+            <a:pPr indent="0" marL="0">
+              <a:buNone/>
+            </a:pPr>
+            <a:endParaRPr lang="en-US" dirty="0"/>
+          </a:p>
+        </p:txBody>
+      </p:sp>
+      <p:sp>
+        <p:nvSpPr>
+          <p:cNvPr id="3" name="Text 1"/>
+          <p:cNvSpPr/>
+          <p:nvPr/>
+        </p:nvSpPr>
+        <p:spPr>
+          <a:xfrm>
+            <a:off x="406301" y="457051"/>
+            <a:ext cx="8498026" cy="274290"/>
+          </a:xfrm>
+          <a:prstGeom prst="rect">
+            <a:avLst/>
+          </a:prstGeom>
+          <a:noFill/>
+          <a:ln/>
+        </p:spPr>
+        <p:txBody>
+          <a:bodyPr wrap="square" lIns="0" tIns="0" rIns="0" bIns="0" rtlCol="0" anchor="t"/>
+          <a:lstStyle/>
+          <a:p>
+            <a:pPr algn="l" indent="0" marL="0">
+              <a:lnSpc>
+                <a:spcPts val="2160"/>
+              </a:lnSpc>
+              <a:spcBef>
+                <a:spcPts val="600"/>
+              </a:spcBef>
+              <a:spcAft>
+                <a:spcPts val="800"/>
+              </a:spcAft>
+              <a:buNone/>
+            </a:pPr>
+            <a:r>
+              <a:rPr lang="en-US" sz="1800" b="1" dirty="0">
+                <a:solidFill>
+                  <a:srgbClr val="FE4447"/>
+                </a:solidFill>
+                <a:latin typeface="Georgia" pitchFamily="34" charset="0"/>
+                <a:ea typeface="Georgia" pitchFamily="34" charset="-122"/>
+                <a:cs typeface="Georgia" pitchFamily="34" charset="-120"/>
+              </a:rPr>
+              <a:t>Differentiation</a:t>
+            </a:r>
+            <a:endParaRPr lang="en-US" sz="1800" dirty="0"/>
+          </a:p>
+        </p:txBody>
+      </p:sp>
+      <p:sp>
+        <p:nvSpPr>
+          <p:cNvPr id="4" name="Text 2"/>
+          <p:cNvSpPr/>
+          <p:nvPr/>
+        </p:nvSpPr>
+        <p:spPr>
+          <a:xfrm>
+            <a:off x="634901" y="883593"/>
+            <a:ext cx="8102798" cy="937022"/>
+          </a:xfrm>
+          <a:prstGeom prst="rect">
+            <a:avLst/>
+          </a:prstGeom>
+          <a:noFill/>
+          <a:ln/>
+        </p:spPr>
+        <p:txBody>
+          <a:bodyPr wrap="square" lIns="0" tIns="0" rIns="0" bIns="0" rtlCol="0" anchor="t"/>
+          <a:lstStyle/>
+          <a:p>
+            <a:pPr algn="l" marL="342900" indent="-342900">
+              <a:lnSpc>
+                <a:spcPts val="1620"/>
+              </a:lnSpc>
+              <a:spcAft>
+                <a:spcPts val="300"/>
+              </a:spcAft>
+              <a:buSzPct val="100000"/>
+              <a:buChar char="•"/>
+            </a:pPr>
+            <a:r>
+              <a:rPr lang="en-US" sz="1200" b="1" dirty="0">
+                <a:solidFill>
+                  <a:srgbClr val="1C2833"/>
+                </a:solidFill>
+                <a:latin typeface="Arial" pitchFamily="34" charset="0"/>
+                <a:ea typeface="Arial" pitchFamily="34" charset="-122"/>
+                <a:cs typeface="Arial" pitchFamily="34" charset="-120"/>
+              </a:rPr>
+              <a:t>Tier up:</a:t>
+            </a:r>
+            <a:pPr algn="l" indent="0" marL="0">
+              <a:lnSpc>
+                <a:spcPts val="1620"/>
+              </a:lnSpc>
+              <a:spcAft>
+                <a:spcPts val="300"/>
+              </a:spcAft>
+              <a:buNone/>
+            </a:pPr>
+            <a:r>
+              <a:rPr lang="en-US" sz="1200" dirty="0">
+                <a:solidFill>
+                  <a:srgbClr val="1C2833"/>
+                </a:solidFill>
+                <a:latin typeface="Arial" pitchFamily="34" charset="0"/>
+                <a:ea typeface="Arial" pitchFamily="34" charset="-122"/>
+                <a:cs typeface="Arial" pitchFamily="34" charset="-120"/>
+              </a:rPr>
+              <a:t> Read a one-paragraph excerpt from Dani (1993). What is Dani's strongest critique? What does he NOT criticise?</a:t>
+            </a:r>
+            <a:endParaRPr lang="en-US" sz="1200" dirty="0"/>
+          </a:p>
+          <a:p>
+            <a:pPr algn="l" marL="342900" indent="-342900">
+              <a:lnSpc>
+                <a:spcPts val="1620"/>
+              </a:lnSpc>
+              <a:spcAft>
+                <a:spcPts val="300"/>
+              </a:spcAft>
+              <a:buSzPct val="100000"/>
+              <a:buChar char="•"/>
+            </a:pPr>
+            <a:r>
+              <a:rPr lang="en-US" sz="1200" b="1" dirty="0">
+                <a:solidFill>
+                  <a:srgbClr val="1C2833"/>
+                </a:solidFill>
+                <a:latin typeface="Arial" pitchFamily="34" charset="0"/>
+                <a:ea typeface="Arial" pitchFamily="34" charset="-122"/>
+                <a:cs typeface="Arial" pitchFamily="34" charset="-120"/>
+              </a:rPr>
+              <a:t>Tier down:</a:t>
+            </a:r>
+            <a:pPr algn="l" indent="0" marL="0">
+              <a:lnSpc>
+                <a:spcPts val="1620"/>
+              </a:lnSpc>
+              <a:spcAft>
+                <a:spcPts val="300"/>
+              </a:spcAft>
+              <a:buNone/>
+            </a:pPr>
+            <a:r>
+              <a:rPr lang="en-US" sz="1200" dirty="0">
+                <a:solidFill>
+                  <a:srgbClr val="1C2833"/>
+                </a:solidFill>
+                <a:latin typeface="Arial" pitchFamily="34" charset="0"/>
+                <a:ea typeface="Arial" pitchFamily="34" charset="-122"/>
+                <a:cs typeface="Arial" pitchFamily="34" charset="-120"/>
+              </a:rPr>
+              <a:t> Memorise the names of sūtras 1, 2, 3, and 14 (the four most commonly taught). Skip the historicity discussion details.</a:t>
+            </a:r>
+            <a:endParaRPr lang="en-US" sz="1200" dirty="0"/>
+          </a:p>
+        </p:txBody>
+      </p:sp>
+      <p:sp>
+        <p:nvSpPr>
+          <p:cNvPr id="5" name="Text 3"/>
+          <p:cNvSpPr/>
+          <p:nvPr/>
+        </p:nvSpPr>
+        <p:spPr>
+          <a:xfrm>
+            <a:off x="406301" y="4434929"/>
+            <a:ext cx="8498026" cy="213271"/>
+          </a:xfrm>
+          <a:prstGeom prst="rect">
+            <a:avLst/>
+          </a:prstGeom>
+          <a:noFill/>
+          <a:ln/>
+        </p:spPr>
+        <p:txBody>
+          <a:bodyPr wrap="square" lIns="0" tIns="0" rIns="0" bIns="0" rtlCol="0" anchor="t"/>
+          <a:lstStyle/>
+          <a:p>
+            <a:pPr algn="l" indent="0" marL="0">
+              <a:lnSpc>
+                <a:spcPts val="1680"/>
+              </a:lnSpc>
+              <a:spcBef>
+                <a:spcPts val="300"/>
+              </a:spcBef>
+              <a:spcAft>
+                <a:spcPts val="300"/>
+              </a:spcAft>
+              <a:buNone/>
+            </a:pPr>
+            <a:r>
+              <a:rPr lang="en-US" sz="1200" dirty="0">
+                <a:solidFill>
+                  <a:srgbClr val="1C2833"/>
+                </a:solidFill>
+                <a:latin typeface="Arial" pitchFamily="34" charset="0"/>
+                <a:ea typeface="Arial" pitchFamily="34" charset="-122"/>
+                <a:cs typeface="Arial" pitchFamily="34" charset="-120"/>
+              </a:rPr>
+              <a:t>Middle ·  · IKS Curriculum</a:t>
+            </a:r>
+            <a:endParaRPr lang="en-US" sz="1200" dirty="0"/>
+          </a:p>
+        </p:txBody>
+      </p:sp>
+    </p:spTree>
+  </p:cSld>
+  <p:clrMapOvr>
+    <a:masterClrMapping/>
+  </p:clrMapOvr>
+</p:sld>
+</file>
+
+<file path=ppt/slides/slide22.xml><?xml version="1.0" encoding="utf-8"?>
+<p:sld xmlns:a="http://schemas.openxmlformats.org/drawingml/2006/main" xmlns:r="http://schemas.openxmlformats.org/officeDocument/2006/relationships" xmlns:p="http://schemas.openxmlformats.org/presentationml/2006/main">
+  <p:cSld name="Slide 22">
+    <p:bg>
+      <p:bgPr>
+        <a:solidFill>
+          <a:srgbClr val="FFFFFF"/>
+        </a:solidFill>
+      </p:bgPr>
+    </p:bg>
+    <p:spTree>
+      <p:nvGrpSpPr>
+        <p:cNvPr id="1" name=""/>
+        <p:cNvGrpSpPr/>
+        <p:nvPr/>
+      </p:nvGrpSpPr>
+      <p:grpSpPr>
+        <a:xfrm>
+          <a:off x="0" y="0"/>
+          <a:ext cx="0" cy="0"/>
+          <a:chOff x="0" y="0"/>
+          <a:chExt cx="0" cy="0"/>
+        </a:xfrm>
+      </p:grpSpPr>
+      <p:sp>
+        <p:nvSpPr>
+          <p:cNvPr id="2" name="Text 0"/>
+          <p:cNvSpPr/>
+          <p:nvPr/>
+        </p:nvSpPr>
+        <p:spPr>
+          <a:xfrm>
+            <a:off x="0" y="0"/>
+            <a:ext cx="9144000" cy="101501"/>
+          </a:xfrm>
+          <a:prstGeom prst="rect">
+            <a:avLst/>
+          </a:prstGeom>
+          <a:solidFill>
+            <a:srgbClr val="277884"/>
+          </a:solidFill>
+          <a:ln/>
+        </p:spPr>
+        <p:txBody>
+          <a:bodyPr wrap="square" rtlCol="0" anchor="ctr"/>
+          <a:lstStyle/>
+          <a:p>
+            <a:pPr indent="0" marL="0">
+              <a:buNone/>
+            </a:pPr>
+            <a:endParaRPr lang="en-US" dirty="0"/>
+          </a:p>
+        </p:txBody>
+      </p:sp>
+      <p:sp>
+        <p:nvSpPr>
+          <p:cNvPr id="3" name="Text 1"/>
+          <p:cNvSpPr/>
+          <p:nvPr/>
+        </p:nvSpPr>
+        <p:spPr>
+          <a:xfrm>
+            <a:off x="406301" y="457051"/>
+            <a:ext cx="8498026" cy="274290"/>
+          </a:xfrm>
+          <a:prstGeom prst="rect">
+            <a:avLst/>
+          </a:prstGeom>
+          <a:noFill/>
+          <a:ln/>
+        </p:spPr>
+        <p:txBody>
+          <a:bodyPr wrap="square" lIns="0" tIns="0" rIns="0" bIns="0" rtlCol="0" anchor="t"/>
+          <a:lstStyle/>
+          <a:p>
+            <a:pPr algn="l" indent="0" marL="0">
+              <a:lnSpc>
+                <a:spcPts val="2160"/>
+              </a:lnSpc>
+              <a:spcBef>
+                <a:spcPts val="600"/>
+              </a:spcBef>
+              <a:spcAft>
+                <a:spcPts val="800"/>
+              </a:spcAft>
+              <a:buNone/>
+            </a:pPr>
+            <a:r>
+              <a:rPr lang="en-US" sz="1800" b="1" dirty="0">
+                <a:solidFill>
+                  <a:srgbClr val="FE4447"/>
+                </a:solidFill>
+                <a:latin typeface="Georgia" pitchFamily="34" charset="0"/>
+                <a:ea typeface="Georgia" pitchFamily="34" charset="-122"/>
+                <a:cs typeface="Georgia" pitchFamily="34" charset="-120"/>
+              </a:rPr>
+              <a:t>Teacher notes</a:t>
+            </a:r>
+            <a:endParaRPr lang="en-US" sz="1800" dirty="0"/>
+          </a:p>
+        </p:txBody>
+      </p:sp>
+      <p:sp>
+        <p:nvSpPr>
+          <p:cNvPr id="4" name="Text 2"/>
+          <p:cNvSpPr/>
+          <p:nvPr/>
+        </p:nvSpPr>
+        <p:spPr>
+          <a:xfrm>
+            <a:off x="634901" y="883593"/>
+            <a:ext cx="8102798" cy="1592163"/>
+          </a:xfrm>
+          <a:prstGeom prst="rect">
+            <a:avLst/>
+          </a:prstGeom>
+          <a:noFill/>
+          <a:ln/>
+        </p:spPr>
+        <p:txBody>
+          <a:bodyPr wrap="square" lIns="0" tIns="0" rIns="0" bIns="0" rtlCol="0" anchor="t"/>
+          <a:lstStyle/>
+          <a:p>
+            <a:pPr algn="l" marL="342900" indent="-342900">
+              <a:lnSpc>
+                <a:spcPts val="1620"/>
+              </a:lnSpc>
+              <a:spcAft>
+                <a:spcPts val="300"/>
+              </a:spcAft>
+              <a:buSzPct val="100000"/>
+              <a:buChar char="•"/>
+            </a:pPr>
+            <a:r>
+              <a:rPr lang="en-US" sz="1200" dirty="0">
+                <a:solidFill>
+                  <a:srgbClr val="1C2833"/>
+                </a:solidFill>
+                <a:latin typeface="Arial" pitchFamily="34" charset="0"/>
+                <a:ea typeface="Arial" pitchFamily="34" charset="-122"/>
+                <a:cs typeface="Arial" pitchFamily="34" charset="-120"/>
+              </a:rPr>
+              <a:t>Some students (and their families) believe firmly that the trick is "ancient Vedic mathematics." Honour the belief; don't dismiss it. Frame your position as "the academic consensus is more sceptical, and you'll read the evidence at Senior band."</a:t>
+            </a:r>
+            <a:endParaRPr lang="en-US" sz="1200" dirty="0"/>
+          </a:p>
+          <a:p>
+            <a:pPr algn="l" marL="342900" indent="-342900">
+              <a:lnSpc>
+                <a:spcPts val="1620"/>
+              </a:lnSpc>
+              <a:spcAft>
+                <a:spcPts val="300"/>
+              </a:spcAft>
+              <a:buSzPct val="100000"/>
+              <a:buChar char="•"/>
+            </a:pPr>
+            <a:r>
+              <a:rPr lang="en-US" sz="1200" dirty="0">
+                <a:solidFill>
+                  <a:srgbClr val="1C2833"/>
+                </a:solidFill>
+                <a:latin typeface="Arial" pitchFamily="34" charset="0"/>
+                <a:ea typeface="Arial" pitchFamily="34" charset="-122"/>
+                <a:cs typeface="Arial" pitchFamily="34" charset="-120"/>
+              </a:rPr>
+              <a:t>Avoid civilisational chest-thumping ("ancient Indians knew this before everyone"). The Indian achievement here is the synthesis and clarity of Tirthaji's pedagogical work; that's enough to celebrate without overreach.</a:t>
+            </a:r>
+            <a:endParaRPr lang="en-US" sz="1200" dirty="0"/>
+          </a:p>
+          <a:p>
+            <a:pPr algn="l" marL="342900" indent="-342900">
+              <a:lnSpc>
+                <a:spcPts val="1620"/>
+              </a:lnSpc>
+              <a:spcAft>
+                <a:spcPts val="300"/>
+              </a:spcAft>
+              <a:buSzPct val="100000"/>
+              <a:buChar char="•"/>
+            </a:pPr>
+            <a:r>
+              <a:rPr lang="en-US" sz="1200" dirty="0">
+                <a:solidFill>
+                  <a:srgbClr val="1C2833"/>
+                </a:solidFill>
+                <a:latin typeface="Arial" pitchFamily="34" charset="0"/>
+                <a:ea typeface="Arial" pitchFamily="34" charset="-122"/>
+                <a:cs typeface="Arial" pitchFamily="34" charset="-120"/>
+              </a:rPr>
+              <a:t>Avoid the opposite error too — dismissing the trick as "just Western math with Sanskrit labels." The pedagogical insight (the named patterns, the rhythm) is genuinely Tirthaji's.</a:t>
+            </a:r>
+            <a:endParaRPr lang="en-US" sz="1200" dirty="0"/>
+          </a:p>
+        </p:txBody>
+      </p:sp>
+      <p:sp>
+        <p:nvSpPr>
+          <p:cNvPr id="5" name="Text 3"/>
+          <p:cNvSpPr/>
+          <p:nvPr/>
+        </p:nvSpPr>
+        <p:spPr>
+          <a:xfrm>
+            <a:off x="406301" y="4434929"/>
+            <a:ext cx="8498026" cy="213271"/>
+          </a:xfrm>
+          <a:prstGeom prst="rect">
+            <a:avLst/>
+          </a:prstGeom>
+          <a:noFill/>
+          <a:ln/>
+        </p:spPr>
+        <p:txBody>
+          <a:bodyPr wrap="square" lIns="0" tIns="0" rIns="0" bIns="0" rtlCol="0" anchor="t"/>
+          <a:lstStyle/>
+          <a:p>
+            <a:pPr algn="l" indent="0" marL="0">
+              <a:lnSpc>
+                <a:spcPts val="1680"/>
+              </a:lnSpc>
+              <a:spcBef>
+                <a:spcPts val="300"/>
+              </a:spcBef>
+              <a:spcAft>
+                <a:spcPts val="300"/>
+              </a:spcAft>
+              <a:buNone/>
+            </a:pPr>
+            <a:r>
+              <a:rPr lang="en-US" sz="1200" dirty="0">
+                <a:solidFill>
+                  <a:srgbClr val="1C2833"/>
+                </a:solidFill>
+                <a:latin typeface="Arial" pitchFamily="34" charset="0"/>
+                <a:ea typeface="Arial" pitchFamily="34" charset="-122"/>
+                <a:cs typeface="Arial" pitchFamily="34" charset="-120"/>
+              </a:rPr>
+              <a:t>Middle ·  · IKS Curriculum</a:t>
+            </a:r>
+            <a:endParaRPr lang="en-US" sz="1200" dirty="0"/>
+          </a:p>
+        </p:txBody>
+      </p:sp>
+    </p:spTree>
+  </p:cSld>
+  <p:clrMapOvr>
+    <a:masterClrMapping/>
+  </p:clrMapOvr>
+</p:sld>
+</file>
+
+<file path=ppt/slides/slide23.xml><?xml version="1.0" encoding="utf-8"?>
+<p:sld xmlns:a="http://schemas.openxmlformats.org/drawingml/2006/main" xmlns:r="http://schemas.openxmlformats.org/officeDocument/2006/relationships" xmlns:p="http://schemas.openxmlformats.org/presentationml/2006/main">
+  <p:cSld name="Slide 23">
+    <p:bg>
+      <p:bgPr>
+        <a:solidFill>
+          <a:srgbClr val="FFFFFF"/>
+        </a:solidFill>
+      </p:bgPr>
+    </p:bg>
+    <p:spTree>
+      <p:nvGrpSpPr>
+        <p:cNvPr id="1" name=""/>
+        <p:cNvGrpSpPr/>
+        <p:nvPr/>
+      </p:nvGrpSpPr>
+      <p:grpSpPr>
+        <a:xfrm>
+          <a:off x="0" y="0"/>
+          <a:ext cx="0" cy="0"/>
+          <a:chOff x="0" y="0"/>
+          <a:chExt cx="0" cy="0"/>
+        </a:xfrm>
+      </p:grpSpPr>
+      <p:sp>
+        <p:nvSpPr>
+          <p:cNvPr id="2" name="Text 0"/>
+          <p:cNvSpPr/>
+          <p:nvPr/>
+        </p:nvSpPr>
+        <p:spPr>
+          <a:xfrm>
+            <a:off x="0" y="0"/>
+            <a:ext cx="9144000" cy="101501"/>
+          </a:xfrm>
+          <a:prstGeom prst="rect">
+            <a:avLst/>
+          </a:prstGeom>
+          <a:solidFill>
+            <a:srgbClr val="277884"/>
+          </a:solidFill>
+          <a:ln/>
+        </p:spPr>
+        <p:txBody>
+          <a:bodyPr wrap="square" rtlCol="0" anchor="ctr"/>
+          <a:lstStyle/>
+          <a:p>
+            <a:pPr indent="0" marL="0">
+              <a:buNone/>
+            </a:pPr>
+            <a:endParaRPr lang="en-US" dirty="0"/>
+          </a:p>
+        </p:txBody>
+      </p:sp>
+      <p:sp>
+        <p:nvSpPr>
+          <p:cNvPr id="3" name="Text 1"/>
+          <p:cNvSpPr/>
+          <p:nvPr/>
+        </p:nvSpPr>
+        <p:spPr>
+          <a:xfrm>
+            <a:off x="406301" y="457051"/>
+            <a:ext cx="8498026" cy="274290"/>
+          </a:xfrm>
+          <a:prstGeom prst="rect">
+            <a:avLst/>
+          </a:prstGeom>
+          <a:noFill/>
+          <a:ln/>
+        </p:spPr>
+        <p:txBody>
+          <a:bodyPr wrap="square" lIns="0" tIns="0" rIns="0" bIns="0" rtlCol="0" anchor="t"/>
+          <a:lstStyle/>
+          <a:p>
+            <a:pPr algn="l" indent="0" marL="0">
+              <a:lnSpc>
+                <a:spcPts val="2160"/>
+              </a:lnSpc>
+              <a:spcBef>
+                <a:spcPts val="600"/>
+              </a:spcBef>
+              <a:spcAft>
+                <a:spcPts val="800"/>
+              </a:spcAft>
+              <a:buNone/>
+            </a:pPr>
+            <a:r>
+              <a:rPr lang="en-US" sz="1800" b="1" dirty="0">
+                <a:solidFill>
+                  <a:srgbClr val="FE4447"/>
+                </a:solidFill>
+                <a:latin typeface="Georgia" pitchFamily="34" charset="0"/>
+                <a:ea typeface="Georgia" pitchFamily="34" charset="-122"/>
+                <a:cs typeface="Georgia" pitchFamily="34" charset="-120"/>
+              </a:rPr>
+              <a:t>Citation(s) used in this lesson</a:t>
+            </a:r>
+            <a:endParaRPr lang="en-US" sz="1800" dirty="0"/>
+          </a:p>
+        </p:txBody>
+      </p:sp>
+      <p:sp>
+        <p:nvSpPr>
+          <p:cNvPr id="4" name="Text 2"/>
+          <p:cNvSpPr/>
+          <p:nvPr/>
+        </p:nvSpPr>
+        <p:spPr>
+          <a:xfrm>
+            <a:off x="634901" y="883593"/>
+            <a:ext cx="8102798" cy="769441"/>
+          </a:xfrm>
+          <a:prstGeom prst="rect">
+            <a:avLst/>
+          </a:prstGeom>
+          <a:noFill/>
+          <a:ln/>
+        </p:spPr>
+        <p:txBody>
+          <a:bodyPr wrap="square" lIns="0" tIns="0" rIns="0" bIns="0" rtlCol="0" anchor="t"/>
+          <a:lstStyle/>
+          <a:p>
+            <a:pPr algn="l" marL="342900" indent="-342900">
+              <a:lnSpc>
+                <a:spcPts val="1620"/>
+              </a:lnSpc>
+              <a:spcAft>
+                <a:spcPts val="300"/>
+              </a:spcAft>
+              <a:buSzPct val="100000"/>
+              <a:buChar char="•"/>
+            </a:pPr>
+            <a:r>
+              <a:rPr lang="en-US" sz="1200" dirty="0">
+                <a:solidFill>
+                  <a:srgbClr val="1C2833"/>
+                </a:solidFill>
+                <a:latin typeface="Arial" pitchFamily="34" charset="0"/>
+                <a:ea typeface="Arial" pitchFamily="34" charset="-122"/>
+                <a:cs typeface="Arial" pitchFamily="34" charset="-120"/>
+              </a:rPr>
+              <a:t>Tirthaji, B. K. (1965). </a:t>
+            </a:r>
+            <a:pPr algn="l" indent="0" marL="0">
+              <a:lnSpc>
+                <a:spcPts val="1620"/>
+              </a:lnSpc>
+              <a:spcAft>
+                <a:spcPts val="300"/>
+              </a:spcAft>
+              <a:buNone/>
+            </a:pPr>
+            <a:r>
+              <a:rPr lang="en-US" sz="1200" i="1" dirty="0">
+                <a:solidFill>
+                  <a:srgbClr val="1C2833"/>
+                </a:solidFill>
+                <a:latin typeface="Arial" pitchFamily="34" charset="0"/>
+                <a:ea typeface="Arial" pitchFamily="34" charset="-122"/>
+                <a:cs typeface="Arial" pitchFamily="34" charset="-120"/>
+              </a:rPr>
+              <a:t>Vedic Mathematics</a:t>
+            </a:r>
+            <a:pPr algn="l" indent="0" marL="0">
+              <a:lnSpc>
+                <a:spcPts val="1620"/>
+              </a:lnSpc>
+              <a:spcAft>
+                <a:spcPts val="300"/>
+              </a:spcAft>
+              <a:buNone/>
+            </a:pPr>
+            <a:r>
+              <a:rPr lang="en-US" sz="1200" dirty="0">
+                <a:solidFill>
+                  <a:srgbClr val="1C2833"/>
+                </a:solidFill>
+                <a:latin typeface="Arial" pitchFamily="34" charset="0"/>
+                <a:ea typeface="Arial" pitchFamily="34" charset="-122"/>
+                <a:cs typeface="Arial" pitchFamily="34" charset="-120"/>
+              </a:rPr>
+              <a:t>. Motilal Banarsidass. — Sūtra list and preface.</a:t>
+            </a:r>
+            <a:endParaRPr lang="en-US" sz="1200" dirty="0"/>
+          </a:p>
+          <a:p>
+            <a:pPr algn="l" marL="342900" indent="-342900">
+              <a:lnSpc>
+                <a:spcPts val="1620"/>
+              </a:lnSpc>
+              <a:spcAft>
+                <a:spcPts val="300"/>
+              </a:spcAft>
+              <a:buSzPct val="100000"/>
+              <a:buChar char="•"/>
+            </a:pPr>
+            <a:r>
+              <a:rPr lang="en-US" sz="1200" dirty="0">
+                <a:solidFill>
+                  <a:srgbClr val="1C2833"/>
+                </a:solidFill>
+                <a:latin typeface="Arial" pitchFamily="34" charset="0"/>
+                <a:ea typeface="Arial" pitchFamily="34" charset="-122"/>
+                <a:cs typeface="Arial" pitchFamily="34" charset="-120"/>
+              </a:rPr>
+              <a:t>Dani, S. G. (1993). "Myths and Reality: On Vedic Mathematics." Reprinted in </a:t>
+            </a:r>
+            <a:pPr algn="l" indent="0" marL="0">
+              <a:lnSpc>
+                <a:spcPts val="1620"/>
+              </a:lnSpc>
+              <a:spcAft>
+                <a:spcPts val="300"/>
+              </a:spcAft>
+              <a:buNone/>
+            </a:pPr>
+            <a:r>
+              <a:rPr lang="en-US" sz="1200" i="1" dirty="0">
+                <a:solidFill>
+                  <a:srgbClr val="1C2833"/>
+                </a:solidFill>
+                <a:latin typeface="Arial" pitchFamily="34" charset="0"/>
+                <a:ea typeface="Arial" pitchFamily="34" charset="-122"/>
+                <a:cs typeface="Arial" pitchFamily="34" charset="-120"/>
+              </a:rPr>
+              <a:t>Resonance</a:t>
+            </a:r>
+            <a:pPr algn="l" indent="0" marL="0">
+              <a:lnSpc>
+                <a:spcPts val="1620"/>
+              </a:lnSpc>
+              <a:spcAft>
+                <a:spcPts val="300"/>
+              </a:spcAft>
+              <a:buNone/>
+            </a:pPr>
+            <a:r>
+              <a:rPr lang="en-US" sz="1200" dirty="0">
+                <a:solidFill>
+                  <a:srgbClr val="1C2833"/>
+                </a:solidFill>
+                <a:latin typeface="Arial" pitchFamily="34" charset="0"/>
+                <a:ea typeface="Arial" pitchFamily="34" charset="-122"/>
+                <a:cs typeface="Arial" pitchFamily="34" charset="-120"/>
+              </a:rPr>
+              <a:t> (October 2001).</a:t>
+            </a:r>
+            <a:endParaRPr lang="en-US" sz="1200" dirty="0"/>
+          </a:p>
+          <a:p>
+            <a:pPr algn="l" marL="342900" indent="-342900">
+              <a:lnSpc>
+                <a:spcPts val="1620"/>
+              </a:lnSpc>
+              <a:spcAft>
+                <a:spcPts val="300"/>
+              </a:spcAft>
+              <a:buSzPct val="100000"/>
+              <a:buChar char="•"/>
+            </a:pPr>
+            <a:r>
+              <a:rPr lang="en-US" sz="1200" i="1" dirty="0">
+                <a:solidFill>
+                  <a:srgbClr val="1C2833"/>
+                </a:solidFill>
+                <a:latin typeface="Arial" pitchFamily="34" charset="0"/>
+                <a:ea typeface="Arial" pitchFamily="34" charset="-122"/>
+                <a:cs typeface="Arial" pitchFamily="34" charset="-120"/>
+              </a:rPr>
               <a:t>Microsoft Word - sutras1.pdf</a:t>
             </a:r>
             <a:pPr algn="l" indent="0" marL="0">
               <a:lnSpc>
-                <a:spcPts val="1680"/>
-              </a:lnSpc>
-              <a:spcBef>
-                <a:spcPts val="300"/>
-              </a:spcBef>
+                <a:spcPts val="1620"/>
+              </a:lnSpc>
               <a:spcAft>
                 <a:spcPts val="300"/>
               </a:spcAft>
@@ -3007,7 +7858,7 @@
                 <a:ea typeface="Arial" pitchFamily="34" charset="-122"/>
                 <a:cs typeface="Arial" pitchFamily="34" charset="-120"/>
               </a:rPr>
-              <a:t>). – Optional: a paragraph excerpt from Tirthaji's preface (teacher's prepared synopsis).</a:t>
+              <a:t> (SutraGanita corpus) — the 16+13 sūtra list.</a:t>
             </a:r>
             <a:endParaRPr lang="en-US" sz="1200" dirty="0"/>
           </a:p>
@@ -3165,7 +8016,7 @@
                 <a:ea typeface="Georgia" pitchFamily="34" charset="-122"/>
                 <a:cs typeface="Georgia" pitchFamily="34" charset="-120"/>
               </a:rPr>
-              <a:t>Lesson flow</a:t>
+              <a:t>Materials</a:t>
             </a:r>
             <a:endParaRPr lang="en-US" sz="1800" dirty="0"/>
           </a:p>
@@ -3174,6 +8025,116 @@
       <p:sp>
         <p:nvSpPr>
           <p:cNvPr id="4" name="Text 2"/>
+          <p:cNvSpPr/>
+          <p:nvPr/>
+        </p:nvSpPr>
+        <p:spPr>
+          <a:xfrm>
+            <a:off x="634901" y="883593"/>
+            <a:ext cx="8102798" cy="544711"/>
+          </a:xfrm>
+          <a:prstGeom prst="rect">
+            <a:avLst/>
+          </a:prstGeom>
+          <a:noFill/>
+          <a:ln/>
+        </p:spPr>
+        <p:txBody>
+          <a:bodyPr wrap="square" lIns="0" tIns="0" rIns="0" bIns="0" rtlCol="0" anchor="t"/>
+          <a:lstStyle/>
+          <a:p>
+            <a:pPr algn="l" marL="342900" indent="-342900">
+              <a:lnSpc>
+                <a:spcPts val="1620"/>
+              </a:lnSpc>
+              <a:spcAft>
+                <a:spcPts val="300"/>
+              </a:spcAft>
+              <a:buSzPct val="100000"/>
+              <a:buChar char="•"/>
+            </a:pPr>
+            <a:r>
+              <a:rPr lang="en-US" sz="1200" dirty="0">
+                <a:solidFill>
+                  <a:srgbClr val="1C2833"/>
+                </a:solidFill>
+                <a:latin typeface="Arial" pitchFamily="34" charset="0"/>
+                <a:ea typeface="Arial" pitchFamily="34" charset="-122"/>
+                <a:cs typeface="Arial" pitchFamily="34" charset="-120"/>
+              </a:rPr>
+              <a:t>Printed handout: the list of 16 sūtras + 13 sub-sūtras (from </a:t>
+            </a:r>
+            <a:pPr algn="l" indent="0" marL="0">
+              <a:lnSpc>
+                <a:spcPts val="1620"/>
+              </a:lnSpc>
+              <a:spcAft>
+                <a:spcPts val="300"/>
+              </a:spcAft>
+              <a:buNone/>
+            </a:pPr>
+            <a:r>
+              <a:rPr lang="en-US" sz="1200" dirty="0">
+                <a:solidFill>
+                  <a:srgbClr val="1C2833"/>
+                </a:solidFill>
+                <a:latin typeface="Arial" pitchFamily="34" charset="0"/>
+                <a:ea typeface="Arial" pitchFamily="34" charset="-122"/>
+                <a:cs typeface="Arial" pitchFamily="34" charset="-120"/>
+              </a:rPr>
+              <a:t>Microsoft Word - sutras1.pdf</a:t>
+            </a:r>
+            <a:pPr algn="l" indent="0" marL="0">
+              <a:lnSpc>
+                <a:spcPts val="1620"/>
+              </a:lnSpc>
+              <a:spcAft>
+                <a:spcPts val="300"/>
+              </a:spcAft>
+              <a:buNone/>
+            </a:pPr>
+            <a:r>
+              <a:rPr lang="en-US" sz="1200" dirty="0">
+                <a:solidFill>
+                  <a:srgbClr val="1C2833"/>
+                </a:solidFill>
+                <a:latin typeface="Arial" pitchFamily="34" charset="0"/>
+                <a:ea typeface="Arial" pitchFamily="34" charset="-122"/>
+                <a:cs typeface="Arial" pitchFamily="34" charset="-120"/>
+              </a:rPr>
+              <a:t>).</a:t>
+            </a:r>
+            <a:endParaRPr lang="en-US" sz="1200" dirty="0"/>
+          </a:p>
+          <a:p>
+            <a:pPr algn="l" marL="342900" indent="-342900">
+              <a:lnSpc>
+                <a:spcPts val="1620"/>
+              </a:lnSpc>
+              <a:spcAft>
+                <a:spcPts val="300"/>
+              </a:spcAft>
+              <a:buSzPct val="100000"/>
+              <a:buChar char="•"/>
+            </a:pPr>
+            <a:r>
+              <a:rPr lang="en-US" sz="1200" dirty="0">
+                <a:solidFill>
+                  <a:srgbClr val="1C2833"/>
+                </a:solidFill>
+                <a:latin typeface="Arial" pitchFamily="34" charset="0"/>
+                <a:ea typeface="Arial" pitchFamily="34" charset="-122"/>
+                <a:cs typeface="Arial" pitchFamily="34" charset="-120"/>
+              </a:rPr>
+              <a:t>Optional: a paragraph excerpt from Tirthaji's preface (teacher's prepared synopsis).</a:t>
+            </a:r>
+            <a:endParaRPr lang="en-US" sz="1200" dirty="0"/>
+          </a:p>
+        </p:txBody>
+      </p:sp>
+      <p:sp>
+        <p:nvSpPr>
+          <p:cNvPr id="5" name="Text 3"/>
           <p:cNvSpPr/>
           <p:nvPr/>
         </p:nvSpPr>
@@ -3323,7 +8284,7 @@
                 <a:ea typeface="Georgia" pitchFamily="34" charset="-122"/>
                 <a:cs typeface="Georgia" pitchFamily="34" charset="-120"/>
               </a:rPr>
-              <a:t>Warm-up (3 min)</a:t>
+              <a:t>Lesson flow</a:t>
             </a:r>
             <a:endParaRPr lang="en-US" sz="1800" dirty="0"/>
           </a:p>
@@ -3332,146 +8293,6 @@
       <p:sp>
         <p:nvSpPr>
           <p:cNvPr id="4" name="Text 2"/>
-          <p:cNvSpPr/>
-          <p:nvPr/>
-        </p:nvSpPr>
-        <p:spPr>
-          <a:xfrm>
-            <a:off x="406301" y="870942"/>
-            <a:ext cx="8498026" cy="426541"/>
-          </a:xfrm>
-          <a:prstGeom prst="rect">
-            <a:avLst/>
-          </a:prstGeom>
-          <a:noFill/>
-          <a:ln/>
-        </p:spPr>
-        <p:txBody>
-          <a:bodyPr wrap="square" lIns="0" tIns="0" rIns="0" bIns="0" rtlCol="0" anchor="t"/>
-          <a:lstStyle/>
-          <a:p>
-            <a:pPr algn="l" indent="0" marL="0">
-              <a:lnSpc>
-                <a:spcPts val="1680"/>
-              </a:lnSpc>
-              <a:spcBef>
-                <a:spcPts val="300"/>
-              </a:spcBef>
-              <a:spcAft>
-                <a:spcPts val="300"/>
-              </a:spcAft>
-              <a:buNone/>
-            </a:pPr>
-            <a:r>
-              <a:rPr lang="en-US" sz="1200" dirty="0">
-                <a:solidFill>
-                  <a:srgbClr val="1C2833"/>
-                </a:solidFill>
-                <a:latin typeface="Arial" pitchFamily="34" charset="0"/>
-                <a:ea typeface="Arial" pitchFamily="34" charset="-122"/>
-                <a:cs typeface="Arial" pitchFamily="34" charset="-120"/>
-              </a:rPr>
-              <a:t>– Recall: name the sūtra behind the ×11 trick. (</a:t>
-            </a:r>
-            <a:pPr algn="l" indent="0" marL="0">
-              <a:lnSpc>
-                <a:spcPts val="1680"/>
-              </a:lnSpc>
-              <a:spcBef>
-                <a:spcPts val="300"/>
-              </a:spcBef>
-              <a:spcAft>
-                <a:spcPts val="300"/>
-              </a:spcAft>
-              <a:buNone/>
-            </a:pPr>
-            <a:r>
-              <a:rPr lang="en-US" sz="1200" i="1" dirty="0">
-                <a:solidFill>
-                  <a:srgbClr val="1C2833"/>
-                </a:solidFill>
-                <a:latin typeface="Arial" pitchFamily="34" charset="0"/>
-                <a:ea typeface="Arial" pitchFamily="34" charset="-122"/>
-                <a:cs typeface="Arial" pitchFamily="34" charset="-120"/>
-              </a:rPr>
-              <a:t>Ekādhikena Pūrveṇa</a:t>
-            </a:r>
-            <a:pPr algn="l" indent="0" marL="0">
-              <a:lnSpc>
-                <a:spcPts val="1680"/>
-              </a:lnSpc>
-              <a:spcBef>
-                <a:spcPts val="300"/>
-              </a:spcBef>
-              <a:spcAft>
-                <a:spcPts val="300"/>
-              </a:spcAft>
-              <a:buNone/>
-            </a:pPr>
-            <a:r>
-              <a:rPr lang="en-US" sz="1200" dirty="0">
-                <a:solidFill>
-                  <a:srgbClr val="1C2833"/>
-                </a:solidFill>
-                <a:latin typeface="Arial" pitchFamily="34" charset="0"/>
-                <a:ea typeface="Arial" pitchFamily="34" charset="-122"/>
-                <a:cs typeface="Arial" pitchFamily="34" charset="-120"/>
-              </a:rPr>
-              <a:t>.) – Name the sub-sūtra behind ×12–×19. (</a:t>
-            </a:r>
-            <a:pPr algn="l" indent="0" marL="0">
-              <a:lnSpc>
-                <a:spcPts val="1680"/>
-              </a:lnSpc>
-              <a:spcBef>
-                <a:spcPts val="300"/>
-              </a:spcBef>
-              <a:spcAft>
-                <a:spcPts val="300"/>
-              </a:spcAft>
-              <a:buNone/>
-            </a:pPr>
-            <a:r>
-              <a:rPr lang="en-US" sz="1200" i="1" dirty="0">
-                <a:solidFill>
-                  <a:srgbClr val="1C2833"/>
-                </a:solidFill>
-                <a:latin typeface="Arial" pitchFamily="34" charset="0"/>
-                <a:ea typeface="Arial" pitchFamily="34" charset="-122"/>
-                <a:cs typeface="Arial" pitchFamily="34" charset="-120"/>
-              </a:rPr>
-              <a:t>Anurūpyeṇa</a:t>
-            </a:r>
-            <a:pPr algn="l" indent="0" marL="0">
-              <a:lnSpc>
-                <a:spcPts val="1680"/>
-              </a:lnSpc>
-              <a:spcBef>
-                <a:spcPts val="300"/>
-              </a:spcBef>
-              <a:spcAft>
-                <a:spcPts val="300"/>
-              </a:spcAft>
-              <a:buNone/>
-            </a:pPr>
-            <a:r>
-              <a:rPr lang="en-US" sz="1200" dirty="0">
-                <a:solidFill>
-                  <a:srgbClr val="1C2833"/>
-                </a:solidFill>
-                <a:latin typeface="Arial" pitchFamily="34" charset="0"/>
-                <a:ea typeface="Arial" pitchFamily="34" charset="-122"/>
-                <a:cs typeface="Arial" pitchFamily="34" charset="-120"/>
-              </a:rPr>
-              <a:t>.)</a:t>
-            </a:r>
-            <a:endParaRPr lang="en-US" sz="1200" dirty="0"/>
-          </a:p>
-        </p:txBody>
-      </p:sp>
-      <p:sp>
-        <p:nvSpPr>
-          <p:cNvPr id="5" name="Text 3"/>
           <p:cNvSpPr/>
           <p:nvPr/>
         </p:nvSpPr>
@@ -3621,7 +8442,7 @@
                 <a:ea typeface="Georgia" pitchFamily="34" charset="-122"/>
                 <a:cs typeface="Georgia" pitchFamily="34" charset="-120"/>
               </a:rPr>
-              <a:t>Discussion (15 min) — Take a position</a:t>
+              <a:t>Warm-up (3 min)</a:t>
             </a:r>
             <a:endParaRPr lang="en-US" sz="1800" dirty="0"/>
           </a:p>
@@ -3635,55 +8456,7 @@
         </p:nvSpPr>
         <p:spPr>
           <a:xfrm>
-            <a:off x="406301" y="870942"/>
-            <a:ext cx="8498026" cy="213271"/>
-          </a:xfrm>
-          <a:prstGeom prst="rect">
-            <a:avLst/>
-          </a:prstGeom>
-          <a:noFill/>
-          <a:ln/>
-        </p:spPr>
-        <p:txBody>
-          <a:bodyPr wrap="square" lIns="0" tIns="0" rIns="0" bIns="0" rtlCol="0" anchor="t"/>
-          <a:lstStyle/>
-          <a:p>
-            <a:pPr algn="l" indent="0" marL="0">
-              <a:lnSpc>
-                <a:spcPts val="1680"/>
-              </a:lnSpc>
-              <a:spcBef>
-                <a:spcPts val="300"/>
-              </a:spcBef>
-              <a:spcAft>
-                <a:spcPts val="300"/>
-              </a:spcAft>
-              <a:buNone/>
-            </a:pPr>
-            <a:r>
-              <a:rPr lang="en-US" sz="1200" dirty="0">
-                <a:solidFill>
-                  <a:srgbClr val="1C2833"/>
-                </a:solidFill>
-                <a:latin typeface="Arial" pitchFamily="34" charset="0"/>
-                <a:ea typeface="Arial" pitchFamily="34" charset="-122"/>
-                <a:cs typeface="Arial" pitchFamily="34" charset="-120"/>
-              </a:rPr>
-              <a:t>Pose two questions to the class. Take a brief show-of-hands; then take 4–5 student statements (no debate, just listening).</a:t>
-            </a:r>
-            <a:endParaRPr lang="en-US" sz="1200" dirty="0"/>
-          </a:p>
-        </p:txBody>
-      </p:sp>
-      <p:sp>
-        <p:nvSpPr>
-          <p:cNvPr id="5" name="Text 3"/>
-          <p:cNvSpPr/>
-          <p:nvPr/>
-        </p:nvSpPr>
-        <p:spPr>
-          <a:xfrm>
-            <a:off x="634901" y="1173063"/>
+            <a:off x="634901" y="883593"/>
             <a:ext cx="8102798" cy="525661"/>
           </a:xfrm>
           <a:prstGeom prst="rect">
@@ -3707,6 +8480,26 @@
               <a:buChar char="•"/>
             </a:pPr>
             <a:r>
+              <a:rPr lang="en-US" sz="1200" dirty="0">
+                <a:solidFill>
+                  <a:srgbClr val="1C2833"/>
+                </a:solidFill>
+                <a:latin typeface="Arial" pitchFamily="34" charset="0"/>
+                <a:ea typeface="Arial" pitchFamily="34" charset="-122"/>
+                <a:cs typeface="Arial" pitchFamily="34" charset="-120"/>
+              </a:rPr>
+              <a:t>Recall: name the sūtra behind the ×11 trick. (</a:t>
+            </a:r>
+            <a:pPr algn="l" indent="0" marL="0">
+              <a:lnSpc>
+                <a:spcPts val="1620"/>
+              </a:lnSpc>
+              <a:spcAft>
+                <a:spcPts val="300"/>
+              </a:spcAft>
+              <a:buNone/>
+            </a:pPr>
+            <a:r>
               <a:rPr lang="en-US" sz="1200" i="1" dirty="0">
                 <a:solidFill>
                   <a:srgbClr val="1C2833"/>
@@ -3715,7 +8508,27 @@
                 <a:ea typeface="Arial" pitchFamily="34" charset="-122"/>
                 <a:cs typeface="Arial" pitchFamily="34" charset="-120"/>
               </a:rPr>
-              <a:t>"Does it matter whether the trick is 'ancient' or '20th-century'? Why or why not?"</a:t>
+              <a:t>Ekādhikena Pūrveṇa</a:t>
+            </a:r>
+            <a:pPr algn="l" indent="0" marL="0">
+              <a:lnSpc>
+                <a:spcPts val="1620"/>
+              </a:lnSpc>
+              <a:spcAft>
+                <a:spcPts val="300"/>
+              </a:spcAft>
+              <a:buNone/>
+            </a:pPr>
+            <a:r>
+              <a:rPr lang="en-US" sz="1200" dirty="0">
+                <a:solidFill>
+                  <a:srgbClr val="1C2833"/>
+                </a:solidFill>
+                <a:latin typeface="Arial" pitchFamily="34" charset="0"/>
+                <a:ea typeface="Arial" pitchFamily="34" charset="-122"/>
+                <a:cs typeface="Arial" pitchFamily="34" charset="-120"/>
+              </a:rPr>
+              <a:t>.)</a:t>
             </a:r>
             <a:endParaRPr lang="en-US" sz="1200" dirty="0"/>
           </a:p>
@@ -3731,6 +8544,26 @@
               <a:buChar char="•"/>
             </a:pPr>
             <a:r>
+              <a:rPr lang="en-US" sz="1200" dirty="0">
+                <a:solidFill>
+                  <a:srgbClr val="1C2833"/>
+                </a:solidFill>
+                <a:latin typeface="Arial" pitchFamily="34" charset="0"/>
+                <a:ea typeface="Arial" pitchFamily="34" charset="-122"/>
+                <a:cs typeface="Arial" pitchFamily="34" charset="-120"/>
+              </a:rPr>
+              <a:t>Name the sub-sūtra behind ×12–×19. (</a:t>
+            </a:r>
+            <a:pPr algn="l" indent="0" marL="0">
+              <a:lnSpc>
+                <a:spcPts val="1620"/>
+              </a:lnSpc>
+              <a:spcAft>
+                <a:spcPts val="300"/>
+              </a:spcAft>
+              <a:buNone/>
+            </a:pPr>
+            <a:r>
               <a:rPr lang="en-US" sz="1200" i="1" dirty="0">
                 <a:solidFill>
                   <a:srgbClr val="1C2833"/>
@@ -3739,7 +8572,27 @@
                 <a:ea typeface="Arial" pitchFamily="34" charset="-122"/>
                 <a:cs typeface="Arial" pitchFamily="34" charset="-120"/>
               </a:rPr>
-              <a:t>"If it turns out to be 20th-century, should we still teach it as 'Vedic mathematics'? What should we call it?"</a:t>
+              <a:t>Anurūpyeṇa</a:t>
+            </a:r>
+            <a:pPr algn="l" indent="0" marL="0">
+              <a:lnSpc>
+                <a:spcPts val="1620"/>
+              </a:lnSpc>
+              <a:spcAft>
+                <a:spcPts val="300"/>
+              </a:spcAft>
+              <a:buNone/>
+            </a:pPr>
+            <a:r>
+              <a:rPr lang="en-US" sz="1200" dirty="0">
+                <a:solidFill>
+                  <a:srgbClr val="1C2833"/>
+                </a:solidFill>
+                <a:latin typeface="Arial" pitchFamily="34" charset="0"/>
+                <a:ea typeface="Arial" pitchFamily="34" charset="-122"/>
+                <a:cs typeface="Arial" pitchFamily="34" charset="-120"/>
+              </a:rPr>
+              <a:t>.)</a:t>
             </a:r>
             <a:endParaRPr lang="en-US" sz="1200" dirty="0"/>
           </a:p>
@@ -3747,78 +8600,7 @@
       </p:sp>
       <p:sp>
         <p:nvSpPr>
-          <p:cNvPr id="6" name="Text 4"/>
-          <p:cNvSpPr/>
-          <p:nvPr/>
-        </p:nvSpPr>
-        <p:spPr>
-          <a:xfrm>
-            <a:off x="406301" y="1787575"/>
-            <a:ext cx="8498026" cy="213271"/>
-          </a:xfrm>
-          <a:prstGeom prst="rect">
-            <a:avLst/>
-          </a:prstGeom>
-          <a:noFill/>
-          <a:ln/>
-        </p:spPr>
-        <p:txBody>
-          <a:bodyPr wrap="square" lIns="0" tIns="0" rIns="0" bIns="0" rtlCol="0" anchor="t"/>
-          <a:lstStyle/>
-          <a:p>
-            <a:pPr algn="l" indent="0" marL="0">
-              <a:lnSpc>
-                <a:spcPts val="1680"/>
-              </a:lnSpc>
-              <a:spcBef>
-                <a:spcPts val="300"/>
-              </a:spcBef>
-              <a:spcAft>
-                <a:spcPts val="300"/>
-              </a:spcAft>
-              <a:buNone/>
-            </a:pPr>
-            <a:r>
-              <a:rPr lang="en-US" sz="1200" dirty="0">
-                <a:solidFill>
-                  <a:srgbClr val="1C2833"/>
-                </a:solidFill>
-                <a:latin typeface="Arial" pitchFamily="34" charset="0"/>
-                <a:ea typeface="Arial" pitchFamily="34" charset="-122"/>
-                <a:cs typeface="Arial" pitchFamily="34" charset="-120"/>
-              </a:rPr>
-              <a:t>End by noting: </a:t>
-            </a:r>
-            <a:pPr algn="l" indent="0" marL="0">
-              <a:lnSpc>
-                <a:spcPts val="1680"/>
-              </a:lnSpc>
-              <a:spcBef>
-                <a:spcPts val="300"/>
-              </a:spcBef>
-              <a:spcAft>
-                <a:spcPts val="300"/>
-              </a:spcAft>
-              <a:buNone/>
-            </a:pPr>
-            <a:r>
-              <a:rPr lang="en-US" sz="1200" i="1" dirty="0">
-                <a:solidFill>
-                  <a:srgbClr val="1C2833"/>
-                </a:solidFill>
-                <a:latin typeface="Arial" pitchFamily="34" charset="0"/>
-                <a:ea typeface="Arial" pitchFamily="34" charset="-122"/>
-                <a:cs typeface="Arial" pitchFamily="34" charset="-120"/>
-              </a:rPr>
-              <a:t>"At Senior band you'll read Dani's critique in full and form a deeper position."</a:t>
-            </a:r>
-            <a:endParaRPr lang="en-US" sz="1200" dirty="0"/>
-          </a:p>
-        </p:txBody>
-      </p:sp>
-      <p:sp>
-        <p:nvSpPr>
-          <p:cNvPr id="7" name="Text 5"/>
+          <p:cNvPr id="5" name="Text 3"/>
           <p:cNvSpPr/>
           <p:nvPr/>
         </p:nvSpPr>
@@ -3968,7 +8750,7 @@
                 <a:ea typeface="Georgia" pitchFamily="34" charset="-122"/>
                 <a:cs typeface="Georgia" pitchFamily="34" charset="-120"/>
               </a:rPr>
-              <a:t>Wrap-up (2 min)</a:t>
+              <a:t>Core (25 min) — The 16 sūtras and the provenance question</a:t>
             </a:r>
             <a:endParaRPr lang="en-US" sz="1800" dirty="0"/>
           </a:p>
@@ -3982,7 +8764,73 @@
         </p:nvSpPr>
         <p:spPr>
           <a:xfrm>
-            <a:off x="406301" y="870942"/>
+            <a:off x="634901" y="883593"/>
+            <a:ext cx="8102798" cy="281880"/>
+          </a:xfrm>
+          <a:prstGeom prst="rect">
+            <a:avLst/>
+          </a:prstGeom>
+          <a:noFill/>
+          <a:ln/>
+        </p:spPr>
+        <p:txBody>
+          <a:bodyPr wrap="square" lIns="0" tIns="0" rIns="0" bIns="0" rtlCol="0" anchor="t"/>
+          <a:lstStyle/>
+          <a:p>
+            <a:pPr algn="l" marL="342900" indent="-342900">
+              <a:lnSpc>
+                <a:spcPts val="1620"/>
+              </a:lnSpc>
+              <a:spcAft>
+                <a:spcPts val="300"/>
+              </a:spcAft>
+              <a:buSzPct val="100000"/>
+              <a:buChar char="•"/>
+            </a:pPr>
+            <a:r>
+              <a:rPr lang="en-US" sz="1200" b="1" dirty="0">
+                <a:solidFill>
+                  <a:srgbClr val="1C2833"/>
+                </a:solidFill>
+                <a:latin typeface="Arial" pitchFamily="34" charset="0"/>
+                <a:ea typeface="Arial" pitchFamily="34" charset="-122"/>
+                <a:cs typeface="Arial" pitchFamily="34" charset="-120"/>
+              </a:rPr>
+              <a:t>The 16 sūtras.</a:t>
+            </a:r>
+            <a:pPr algn="l" indent="0" marL="0">
+              <a:lnSpc>
+                <a:spcPts val="1620"/>
+              </a:lnSpc>
+              <a:spcAft>
+                <a:spcPts val="300"/>
+              </a:spcAft>
+              <a:buNone/>
+            </a:pPr>
+            <a:r>
+              <a:rPr lang="en-US" sz="1200" dirty="0">
+                <a:solidFill>
+                  <a:srgbClr val="1C2833"/>
+                </a:solidFill>
+                <a:latin typeface="Arial" pitchFamily="34" charset="0"/>
+                <a:ea typeface="Arial" pitchFamily="34" charset="-122"/>
+                <a:cs typeface="Arial" pitchFamily="34" charset="-120"/>
+              </a:rPr>
+              <a:t> Hand out the list. Walk through abbreviated:</a:t>
+            </a:r>
+            <a:endParaRPr lang="en-US" sz="1200" dirty="0"/>
+          </a:p>
+        </p:txBody>
+      </p:sp>
+      <p:sp>
+        <p:nvSpPr>
+          <p:cNvPr id="5" name="Text 3"/>
+          <p:cNvSpPr/>
+          <p:nvPr/>
+        </p:nvSpPr>
+        <p:spPr>
+          <a:xfrm>
+            <a:off x="406301" y="1254323"/>
             <a:ext cx="8498026" cy="213271"/>
           </a:xfrm>
           <a:prstGeom prst="rect">
@@ -4008,29 +8856,6 @@
               <a:buNone/>
             </a:pPr>
             <a:r>
-              <a:rPr lang="en-US" sz="1200" dirty="0">
-                <a:solidFill>
-                  <a:srgbClr val="1C2833"/>
-                </a:solidFill>
-                <a:latin typeface="Arial" pitchFamily="34" charset="0"/>
-                <a:ea typeface="Arial" pitchFamily="34" charset="-122"/>
-                <a:cs typeface="Arial" pitchFamily="34" charset="-120"/>
-              </a:rPr>
-              <a:t>– Preview Day 9: </a:t>
-            </a:r>
-            <a:pPr algn="l" indent="0" marL="0">
-              <a:lnSpc>
-                <a:spcPts val="1680"/>
-              </a:lnSpc>
-              <a:spcBef>
-                <a:spcPts val="300"/>
-              </a:spcBef>
-              <a:spcAft>
-                <a:spcPts val="300"/>
-              </a:spcAft>
-              <a:buNone/>
-            </a:pPr>
-            <a:r>
               <a:rPr lang="en-US" sz="1200" i="1" dirty="0">
                 <a:solidFill>
                   <a:srgbClr val="1C2833"/>
@@ -4039,7 +8864,7 @@
                 <a:ea typeface="Arial" pitchFamily="34" charset="-122"/>
                 <a:cs typeface="Arial" pitchFamily="34" charset="-120"/>
               </a:rPr>
-              <a:t>"Tomorrow — mixed-practice day plus project work. Friday is the final assessment."</a:t>
+              <a:t>Each row: # · Sanskrit · English gloss.</a:t>
             </a:r>
             <a:endParaRPr lang="en-US" sz="1200" dirty="0"/>
           </a:p>
@@ -4047,7 +8872,7 @@
       </p:sp>
       <p:sp>
         <p:nvSpPr>
-          <p:cNvPr id="5" name="Text 3"/>
+          <p:cNvPr id="6" name="Text 4"/>
           <p:cNvSpPr/>
           <p:nvPr/>
         </p:nvSpPr>
@@ -4197,7 +9022,7 @@
                 <a:ea typeface="Georgia" pitchFamily="34" charset="-122"/>
                 <a:cs typeface="Georgia" pitchFamily="34" charset="-120"/>
               </a:rPr>
-              <a:t>Student-facing content</a:t>
+              <a:t>Core (25 min) — The 16 sūtras and the provenance question (cont.)</a:t>
             </a:r>
             <a:endParaRPr lang="en-US" sz="1800" dirty="0"/>
           </a:p>
@@ -4211,61 +9036,8 @@
         </p:nvSpPr>
         <p:spPr>
           <a:xfrm>
-            <a:off x="406301" y="883593"/>
-            <a:ext cx="8331398" cy="2574131"/>
-          </a:xfrm>
-          <a:prstGeom prst="rect">
-            <a:avLst/>
-          </a:prstGeom>
-          <a:solidFill>
-            <a:srgbClr val="F4F8F9"/>
-          </a:solidFill>
-          <a:ln/>
-        </p:spPr>
-        <p:txBody>
-          <a:bodyPr wrap="square" rtlCol="0" anchor="ctr"/>
-          <a:lstStyle/>
-          <a:p>
-            <a:pPr indent="0" marL="0">
-              <a:buNone/>
-            </a:pPr>
-            <a:endParaRPr lang="en-US" dirty="0"/>
-          </a:p>
-        </p:txBody>
-      </p:sp>
-      <p:sp>
-        <p:nvSpPr>
-          <p:cNvPr id="5" name="Shape 3"/>
-          <p:cNvSpPr/>
-          <p:nvPr/>
-        </p:nvSpPr>
-        <p:spPr>
-          <a:xfrm>
-            <a:off x="434876" y="883593"/>
-            <a:ext cx="0" cy="2574131"/>
-          </a:xfrm>
-          <a:prstGeom prst="line">
-            <a:avLst/>
-          </a:prstGeom>
-          <a:noFill/>
-          <a:ln w="57150">
-            <a:solidFill>
-              <a:srgbClr val="FE4447"/>
-            </a:solidFill>
-            <a:prstDash val="solid"/>
-          </a:ln>
-        </p:spPr>
-      </p:sp>
-      <p:sp>
-        <p:nvSpPr>
-          <p:cNvPr id="6" name="Text 4"/>
-          <p:cNvSpPr/>
-          <p:nvPr/>
-        </p:nvSpPr>
-        <p:spPr>
-          <a:xfrm>
-            <a:off x="692051" y="1074093"/>
-            <a:ext cx="7973389" cy="230981"/>
+            <a:off x="634901" y="883593"/>
+            <a:ext cx="8102798" cy="1988344"/>
           </a:xfrm>
           <a:prstGeom prst="rect">
             <a:avLst/>
@@ -4277,318 +9049,682 @@
           <a:bodyPr wrap="square" lIns="0" tIns="0" rIns="0" bIns="0" rtlCol="0" anchor="t"/>
           <a:lstStyle/>
           <a:p>
-            <a:pPr algn="l" indent="0" marL="0">
-              <a:lnSpc>
-                <a:spcPts val="1820"/>
-              </a:lnSpc>
-              <a:spcBef>
-                <a:spcPts val="300"/>
-              </a:spcBef>
-              <a:spcAft>
-                <a:spcPts val="300"/>
-              </a:spcAft>
-              <a:buNone/>
-            </a:pPr>
-            <a:r>
-              <a:rPr lang="en-US" sz="1300" b="1" i="1" dirty="0">
-                <a:solidFill>
-                  <a:srgbClr val="1C2833"/>
-                </a:solidFill>
-                <a:latin typeface="Georgia" pitchFamily="34" charset="0"/>
-                <a:ea typeface="Georgia" pitchFamily="34" charset="-122"/>
-                <a:cs typeface="Georgia" pitchFamily="34" charset="-120"/>
-              </a:rPr>
-              <a:t>Tirthaji and the 16 sūtras</a:t>
-            </a:r>
-            <a:endParaRPr lang="en-US" sz="1300" dirty="0"/>
-          </a:p>
-        </p:txBody>
-      </p:sp>
-      <p:sp>
-        <p:nvSpPr>
-          <p:cNvPr id="7" name="Text 5"/>
-          <p:cNvSpPr/>
-          <p:nvPr/>
-        </p:nvSpPr>
-        <p:spPr>
-          <a:xfrm>
-            <a:off x="692051" y="1343174"/>
-            <a:ext cx="7973389" cy="461963"/>
-          </a:xfrm>
-          <a:prstGeom prst="rect">
-            <a:avLst/>
-          </a:prstGeom>
-          <a:noFill/>
-          <a:ln/>
-        </p:spPr>
-        <p:txBody>
-          <a:bodyPr wrap="square" lIns="0" tIns="0" rIns="0" bIns="0" rtlCol="0" anchor="t"/>
-          <a:lstStyle/>
-          <a:p>
-            <a:pPr algn="l" indent="0" marL="0">
-              <a:lnSpc>
-                <a:spcPts val="1820"/>
-              </a:lnSpc>
-              <a:spcBef>
-                <a:spcPts val="300"/>
-              </a:spcBef>
-              <a:spcAft>
-                <a:spcPts val="300"/>
-              </a:spcAft>
-              <a:buNone/>
-            </a:pPr>
-            <a:r>
-              <a:rPr lang="en-US" sz="1300" dirty="0">
-                <a:solidFill>
-                  <a:srgbClr val="1C2833"/>
-                </a:solidFill>
-                <a:latin typeface="Georgia" pitchFamily="34" charset="0"/>
-                <a:ea typeface="Georgia" pitchFamily="34" charset="-122"/>
-                <a:cs typeface="Georgia" pitchFamily="34" charset="-120"/>
-              </a:rPr>
-              <a:t>Bharati Krishna Tirthaji (1884–1960), Śaṅkarācārya of Govardhana Maṭha, wrote </a:t>
-            </a:r>
-            <a:pPr algn="l" indent="0" marL="0">
-              <a:lnSpc>
-                <a:spcPts val="1820"/>
-              </a:lnSpc>
-              <a:spcBef>
-                <a:spcPts val="300"/>
-              </a:spcBef>
-              <a:spcAft>
-                <a:spcPts val="300"/>
-              </a:spcAft>
-              <a:buNone/>
-            </a:pPr>
-            <a:r>
-              <a:rPr lang="en-US" sz="1300" i="1" dirty="0">
-                <a:solidFill>
-                  <a:srgbClr val="1C2833"/>
-                </a:solidFill>
-                <a:latin typeface="Georgia" pitchFamily="34" charset="0"/>
-                <a:ea typeface="Georgia" pitchFamily="34" charset="-122"/>
-                <a:cs typeface="Georgia" pitchFamily="34" charset="-120"/>
-              </a:rPr>
-              <a:t>Vedic Mathematics</a:t>
-            </a:r>
-            <a:pPr algn="l" indent="0" marL="0">
-              <a:lnSpc>
-                <a:spcPts val="1820"/>
-              </a:lnSpc>
-              <a:spcBef>
-                <a:spcPts val="300"/>
-              </a:spcBef>
-              <a:spcAft>
-                <a:spcPts val="300"/>
-              </a:spcAft>
-              <a:buNone/>
-            </a:pPr>
-            <a:r>
-              <a:rPr lang="en-US" sz="1300" dirty="0">
-                <a:solidFill>
-                  <a:srgbClr val="1C2833"/>
-                </a:solidFill>
-                <a:latin typeface="Georgia" pitchFamily="34" charset="0"/>
-                <a:ea typeface="Georgia" pitchFamily="34" charset="-122"/>
-                <a:cs typeface="Georgia" pitchFamily="34" charset="-120"/>
-              </a:rPr>
-              <a:t> between roughly 1911 and 1918. The book was published in 1965, five years after his death.</a:t>
-            </a:r>
-            <a:endParaRPr lang="en-US" sz="1300" dirty="0"/>
-          </a:p>
-        </p:txBody>
-      </p:sp>
-      <p:sp>
-        <p:nvSpPr>
-          <p:cNvPr id="8" name="Text 6"/>
-          <p:cNvSpPr/>
-          <p:nvPr/>
-        </p:nvSpPr>
-        <p:spPr>
-          <a:xfrm>
-            <a:off x="692051" y="1843236"/>
-            <a:ext cx="7973389" cy="923925"/>
-          </a:xfrm>
-          <a:prstGeom prst="rect">
-            <a:avLst/>
-          </a:prstGeom>
-          <a:noFill/>
-          <a:ln/>
-        </p:spPr>
-        <p:txBody>
-          <a:bodyPr wrap="square" lIns="0" tIns="0" rIns="0" bIns="0" rtlCol="0" anchor="t"/>
-          <a:lstStyle/>
-          <a:p>
-            <a:pPr algn="l" indent="0" marL="0">
-              <a:lnSpc>
-                <a:spcPts val="1820"/>
-              </a:lnSpc>
-              <a:spcBef>
-                <a:spcPts val="300"/>
-              </a:spcBef>
-              <a:spcAft>
-                <a:spcPts val="300"/>
-              </a:spcAft>
-              <a:buNone/>
-            </a:pPr>
-            <a:r>
-              <a:rPr lang="en-US" sz="1300" dirty="0">
-                <a:solidFill>
-                  <a:srgbClr val="1C2833"/>
-                </a:solidFill>
-                <a:latin typeface="Georgia" pitchFamily="34" charset="0"/>
-                <a:ea typeface="Georgia" pitchFamily="34" charset="-122"/>
-                <a:cs typeface="Georgia" pitchFamily="34" charset="-120"/>
-              </a:rPr>
-              <a:t>Tirthaji claimed the 16 sūtras (including our </a:t>
-            </a:r>
-            <a:pPr algn="l" indent="0" marL="0">
-              <a:lnSpc>
-                <a:spcPts val="1820"/>
-              </a:lnSpc>
-              <a:spcBef>
-                <a:spcPts val="300"/>
-              </a:spcBef>
-              <a:spcAft>
-                <a:spcPts val="300"/>
-              </a:spcAft>
-              <a:buNone/>
-            </a:pPr>
-            <a:r>
-              <a:rPr lang="en-US" sz="1300" i="1" dirty="0">
-                <a:solidFill>
-                  <a:srgbClr val="1C2833"/>
-                </a:solidFill>
-                <a:latin typeface="Georgia" pitchFamily="34" charset="0"/>
-                <a:ea typeface="Georgia" pitchFamily="34" charset="-122"/>
-                <a:cs typeface="Georgia" pitchFamily="34" charset="-120"/>
+            <a:pPr algn="l" marL="342900" indent="-342900">
+              <a:lnSpc>
+                <a:spcPts val="1620"/>
+              </a:lnSpc>
+              <a:spcAft>
+                <a:spcPts val="300"/>
+              </a:spcAft>
+              <a:buSzPct val="100000"/>
+              <a:buChar char="•"/>
+            </a:pPr>
+            <a:r>
+              <a:rPr lang="en-US" sz="1200" b="1" dirty="0">
+                <a:solidFill>
+                  <a:srgbClr val="1C2833"/>
+                </a:solidFill>
+                <a:latin typeface="Arial" pitchFamily="34" charset="0"/>
+                <a:ea typeface="Arial" pitchFamily="34" charset="-122"/>
+                <a:cs typeface="Arial" pitchFamily="34" charset="-120"/>
+              </a:rPr>
+              <a:t>1</a:t>
+            </a:r>
+            <a:pPr algn="l" indent="0" marL="0">
+              <a:lnSpc>
+                <a:spcPts val="1620"/>
+              </a:lnSpc>
+              <a:spcAft>
+                <a:spcPts val="300"/>
+              </a:spcAft>
+              <a:buNone/>
+            </a:pPr>
+            <a:r>
+              <a:rPr lang="en-US" sz="1200" dirty="0">
+                <a:solidFill>
+                  <a:srgbClr val="1C2833"/>
+                </a:solidFill>
+                <a:latin typeface="Arial" pitchFamily="34" charset="0"/>
+                <a:ea typeface="Arial" pitchFamily="34" charset="-122"/>
+                <a:cs typeface="Arial" pitchFamily="34" charset="-120"/>
+              </a:rPr>
+              <a:t> — </a:t>
+            </a:r>
+            <a:pPr algn="l" indent="0" marL="0">
+              <a:lnSpc>
+                <a:spcPts val="1620"/>
+              </a:lnSpc>
+              <a:spcAft>
+                <a:spcPts val="300"/>
+              </a:spcAft>
+              <a:buNone/>
+            </a:pPr>
+            <a:r>
+              <a:rPr lang="en-US" sz="1200" i="1" dirty="0">
+                <a:solidFill>
+                  <a:srgbClr val="1C2833"/>
+                </a:solidFill>
+                <a:latin typeface="Arial" pitchFamily="34" charset="0"/>
+                <a:ea typeface="Arial" pitchFamily="34" charset="-122"/>
+                <a:cs typeface="Arial" pitchFamily="34" charset="-120"/>
               </a:rPr>
               <a:t>Ekādhikena Pūrveṇa</a:t>
             </a:r>
             <a:pPr algn="l" indent="0" marL="0">
               <a:lnSpc>
-                <a:spcPts val="1820"/>
-              </a:lnSpc>
-              <a:spcBef>
-                <a:spcPts val="300"/>
-              </a:spcBef>
-              <a:spcAft>
-                <a:spcPts val="300"/>
-              </a:spcAft>
-              <a:buNone/>
-            </a:pPr>
-            <a:r>
-              <a:rPr lang="en-US" sz="1300" dirty="0">
-                <a:solidFill>
-                  <a:srgbClr val="1C2833"/>
-                </a:solidFill>
-                <a:latin typeface="Georgia" pitchFamily="34" charset="0"/>
-                <a:ea typeface="Georgia" pitchFamily="34" charset="-122"/>
-                <a:cs typeface="Georgia" pitchFamily="34" charset="-120"/>
-              </a:rPr>
-              <a:t>) come from a Vedic appendix-text. </a:t>
-            </a:r>
-            <a:pPr algn="l" indent="0" marL="0">
-              <a:lnSpc>
-                <a:spcPts val="1820"/>
-              </a:lnSpc>
-              <a:spcBef>
-                <a:spcPts val="300"/>
-              </a:spcBef>
-              <a:spcAft>
-                <a:spcPts val="300"/>
-              </a:spcAft>
-              <a:buNone/>
-            </a:pPr>
-            <a:r>
-              <a:rPr lang="en-US" sz="1300" b="1" i="1" dirty="0">
-                <a:solidFill>
-                  <a:srgbClr val="1C2833"/>
-                </a:solidFill>
-                <a:latin typeface="Georgia" pitchFamily="34" charset="0"/>
-                <a:ea typeface="Georgia" pitchFamily="34" charset="-122"/>
-                <a:cs typeface="Georgia" pitchFamily="34" charset="-120"/>
-              </a:rPr>
-              <a:t>No other Sanskritist has produced this manuscript.</a:t>
-            </a:r>
-            <a:pPr algn="l" indent="0" marL="0">
-              <a:lnSpc>
-                <a:spcPts val="1820"/>
-              </a:lnSpc>
-              <a:spcBef>
-                <a:spcPts val="300"/>
-              </a:spcBef>
-              <a:spcAft>
-                <a:spcPts val="300"/>
-              </a:spcAft>
-              <a:buNone/>
-            </a:pPr>
-            <a:r>
-              <a:rPr lang="en-US" sz="1300" dirty="0">
-                <a:solidFill>
-                  <a:srgbClr val="1C2833"/>
-                </a:solidFill>
-                <a:latin typeface="Georgia" pitchFamily="34" charset="0"/>
-                <a:ea typeface="Georgia" pitchFamily="34" charset="-122"/>
-                <a:cs typeface="Georgia" pitchFamily="34" charset="-120"/>
-              </a:rPr>
-              <a:t> S. G. Dani (1993) argues the sūtras are best understood as a 20th-century synthesis with Indian-mathematics roots, not a verifiably ancient Vedic teaching.</a:t>
-            </a:r>
-            <a:endParaRPr lang="en-US" sz="1300" dirty="0"/>
-          </a:p>
-        </p:txBody>
-      </p:sp>
-      <p:sp>
-        <p:nvSpPr>
-          <p:cNvPr id="9" name="Text 7"/>
-          <p:cNvSpPr/>
-          <p:nvPr/>
-        </p:nvSpPr>
-        <p:spPr>
-          <a:xfrm>
-            <a:off x="692051" y="2805261"/>
-            <a:ext cx="7973389" cy="461963"/>
-          </a:xfrm>
-          <a:prstGeom prst="rect">
-            <a:avLst/>
-          </a:prstGeom>
-          <a:noFill/>
-          <a:ln/>
-        </p:spPr>
-        <p:txBody>
-          <a:bodyPr wrap="square" lIns="0" tIns="0" rIns="0" bIns="0" rtlCol="0" anchor="t"/>
-          <a:lstStyle/>
-          <a:p>
-            <a:pPr algn="l" indent="0" marL="0">
-              <a:lnSpc>
-                <a:spcPts val="1820"/>
-              </a:lnSpc>
-              <a:spcBef>
-                <a:spcPts val="300"/>
-              </a:spcBef>
-              <a:spcAft>
-                <a:spcPts val="300"/>
-              </a:spcAft>
-              <a:buNone/>
-            </a:pPr>
-            <a:r>
-              <a:rPr lang="en-US" sz="1300" i="1" dirty="0">
-                <a:solidFill>
-                  <a:srgbClr val="1C2833"/>
-                </a:solidFill>
-                <a:latin typeface="Georgia" pitchFamily="34" charset="0"/>
-                <a:ea typeface="Georgia" pitchFamily="34" charset="-122"/>
-                <a:cs typeface="Georgia" pitchFamily="34" charset="-120"/>
-              </a:rPr>
-              <a:t>The trick works. The history is contested. Both can be true. The Indian intellectual achievement is real either way.</a:t>
-            </a:r>
-            <a:endParaRPr lang="en-US" sz="1300" dirty="0"/>
-          </a:p>
-        </p:txBody>
-      </p:sp>
-      <p:sp>
-        <p:nvSpPr>
-          <p:cNvPr id="10" name="Text 8"/>
+                <a:spcPts val="1620"/>
+              </a:lnSpc>
+              <a:spcAft>
+                <a:spcPts val="300"/>
+              </a:spcAft>
+              <a:buNone/>
+            </a:pPr>
+            <a:r>
+              <a:rPr lang="en-US" sz="1200" dirty="0">
+                <a:solidFill>
+                  <a:srgbClr val="1C2833"/>
+                </a:solidFill>
+                <a:latin typeface="Arial" pitchFamily="34" charset="0"/>
+                <a:ea typeface="Arial" pitchFamily="34" charset="-122"/>
+                <a:cs typeface="Arial" pitchFamily="34" charset="-120"/>
+              </a:rPr>
+              <a:t> · "By one more than the previous"</a:t>
+            </a:r>
+            <a:endParaRPr lang="en-US" sz="1200" dirty="0"/>
+          </a:p>
+          <a:p>
+            <a:pPr algn="l" marL="342900" indent="-342900">
+              <a:lnSpc>
+                <a:spcPts val="1620"/>
+              </a:lnSpc>
+              <a:spcAft>
+                <a:spcPts val="300"/>
+              </a:spcAft>
+              <a:buSzPct val="100000"/>
+              <a:buChar char="•"/>
+            </a:pPr>
+            <a:r>
+              <a:rPr lang="en-US" sz="1200" b="1" dirty="0">
+                <a:solidFill>
+                  <a:srgbClr val="1C2833"/>
+                </a:solidFill>
+                <a:latin typeface="Arial" pitchFamily="34" charset="0"/>
+                <a:ea typeface="Arial" pitchFamily="34" charset="-122"/>
+                <a:cs typeface="Arial" pitchFamily="34" charset="-120"/>
+              </a:rPr>
+              <a:t>2</a:t>
+            </a:r>
+            <a:pPr algn="l" indent="0" marL="0">
+              <a:lnSpc>
+                <a:spcPts val="1620"/>
+              </a:lnSpc>
+              <a:spcAft>
+                <a:spcPts val="300"/>
+              </a:spcAft>
+              <a:buNone/>
+            </a:pPr>
+            <a:r>
+              <a:rPr lang="en-US" sz="1200" dirty="0">
+                <a:solidFill>
+                  <a:srgbClr val="1C2833"/>
+                </a:solidFill>
+                <a:latin typeface="Arial" pitchFamily="34" charset="0"/>
+                <a:ea typeface="Arial" pitchFamily="34" charset="-122"/>
+                <a:cs typeface="Arial" pitchFamily="34" charset="-120"/>
+              </a:rPr>
+              <a:t> — </a:t>
+            </a:r>
+            <a:pPr algn="l" indent="0" marL="0">
+              <a:lnSpc>
+                <a:spcPts val="1620"/>
+              </a:lnSpc>
+              <a:spcAft>
+                <a:spcPts val="300"/>
+              </a:spcAft>
+              <a:buNone/>
+            </a:pPr>
+            <a:r>
+              <a:rPr lang="en-US" sz="1200" i="1" dirty="0">
+                <a:solidFill>
+                  <a:srgbClr val="1C2833"/>
+                </a:solidFill>
+                <a:latin typeface="Arial" pitchFamily="34" charset="0"/>
+                <a:ea typeface="Arial" pitchFamily="34" charset="-122"/>
+                <a:cs typeface="Arial" pitchFamily="34" charset="-120"/>
+              </a:rPr>
+              <a:t>Nikhilam Navataścaramaṁ Daśataḥ</a:t>
+            </a:r>
+            <a:pPr algn="l" indent="0" marL="0">
+              <a:lnSpc>
+                <a:spcPts val="1620"/>
+              </a:lnSpc>
+              <a:spcAft>
+                <a:spcPts val="300"/>
+              </a:spcAft>
+              <a:buNone/>
+            </a:pPr>
+            <a:r>
+              <a:rPr lang="en-US" sz="1200" dirty="0">
+                <a:solidFill>
+                  <a:srgbClr val="1C2833"/>
+                </a:solidFill>
+                <a:latin typeface="Arial" pitchFamily="34" charset="0"/>
+                <a:ea typeface="Arial" pitchFamily="34" charset="-122"/>
+                <a:cs typeface="Arial" pitchFamily="34" charset="-120"/>
+              </a:rPr>
+              <a:t> · "All from 9 and the last from 10"</a:t>
+            </a:r>
+            <a:endParaRPr lang="en-US" sz="1200" dirty="0"/>
+          </a:p>
+          <a:p>
+            <a:pPr algn="l" marL="342900" indent="-342900">
+              <a:lnSpc>
+                <a:spcPts val="1620"/>
+              </a:lnSpc>
+              <a:spcAft>
+                <a:spcPts val="300"/>
+              </a:spcAft>
+              <a:buSzPct val="100000"/>
+              <a:buChar char="•"/>
+            </a:pPr>
+            <a:r>
+              <a:rPr lang="en-US" sz="1200" b="1" dirty="0">
+                <a:solidFill>
+                  <a:srgbClr val="1C2833"/>
+                </a:solidFill>
+                <a:latin typeface="Arial" pitchFamily="34" charset="0"/>
+                <a:ea typeface="Arial" pitchFamily="34" charset="-122"/>
+                <a:cs typeface="Arial" pitchFamily="34" charset="-120"/>
+              </a:rPr>
+              <a:t>3</a:t>
+            </a:r>
+            <a:pPr algn="l" indent="0" marL="0">
+              <a:lnSpc>
+                <a:spcPts val="1620"/>
+              </a:lnSpc>
+              <a:spcAft>
+                <a:spcPts val="300"/>
+              </a:spcAft>
+              <a:buNone/>
+            </a:pPr>
+            <a:r>
+              <a:rPr lang="en-US" sz="1200" dirty="0">
+                <a:solidFill>
+                  <a:srgbClr val="1C2833"/>
+                </a:solidFill>
+                <a:latin typeface="Arial" pitchFamily="34" charset="0"/>
+                <a:ea typeface="Arial" pitchFamily="34" charset="-122"/>
+                <a:cs typeface="Arial" pitchFamily="34" charset="-120"/>
+              </a:rPr>
+              <a:t> — </a:t>
+            </a:r>
+            <a:pPr algn="l" indent="0" marL="0">
+              <a:lnSpc>
+                <a:spcPts val="1620"/>
+              </a:lnSpc>
+              <a:spcAft>
+                <a:spcPts val="300"/>
+              </a:spcAft>
+              <a:buNone/>
+            </a:pPr>
+            <a:r>
+              <a:rPr lang="en-US" sz="1200" i="1" dirty="0">
+                <a:solidFill>
+                  <a:srgbClr val="1C2833"/>
+                </a:solidFill>
+                <a:latin typeface="Arial" pitchFamily="34" charset="0"/>
+                <a:ea typeface="Arial" pitchFamily="34" charset="-122"/>
+                <a:cs typeface="Arial" pitchFamily="34" charset="-120"/>
+              </a:rPr>
+              <a:t>Ūrdhva-tiryagbhyāṁ</a:t>
+            </a:r>
+            <a:pPr algn="l" indent="0" marL="0">
+              <a:lnSpc>
+                <a:spcPts val="1620"/>
+              </a:lnSpc>
+              <a:spcAft>
+                <a:spcPts val="300"/>
+              </a:spcAft>
+              <a:buNone/>
+            </a:pPr>
+            <a:r>
+              <a:rPr lang="en-US" sz="1200" dirty="0">
+                <a:solidFill>
+                  <a:srgbClr val="1C2833"/>
+                </a:solidFill>
+                <a:latin typeface="Arial" pitchFamily="34" charset="0"/>
+                <a:ea typeface="Arial" pitchFamily="34" charset="-122"/>
+                <a:cs typeface="Arial" pitchFamily="34" charset="-120"/>
+              </a:rPr>
+              <a:t> · "Vertically and crosswise"</a:t>
+            </a:r>
+            <a:endParaRPr lang="en-US" sz="1200" dirty="0"/>
+          </a:p>
+          <a:p>
+            <a:pPr algn="l" marL="342900" indent="-342900">
+              <a:lnSpc>
+                <a:spcPts val="1620"/>
+              </a:lnSpc>
+              <a:spcAft>
+                <a:spcPts val="300"/>
+              </a:spcAft>
+              <a:buSzPct val="100000"/>
+              <a:buChar char="•"/>
+            </a:pPr>
+            <a:r>
+              <a:rPr lang="en-US" sz="1200" b="1" dirty="0">
+                <a:solidFill>
+                  <a:srgbClr val="1C2833"/>
+                </a:solidFill>
+                <a:latin typeface="Arial" pitchFamily="34" charset="0"/>
+                <a:ea typeface="Arial" pitchFamily="34" charset="-122"/>
+                <a:cs typeface="Arial" pitchFamily="34" charset="-120"/>
+              </a:rPr>
+              <a:t>4</a:t>
+            </a:r>
+            <a:pPr algn="l" indent="0" marL="0">
+              <a:lnSpc>
+                <a:spcPts val="1620"/>
+              </a:lnSpc>
+              <a:spcAft>
+                <a:spcPts val="300"/>
+              </a:spcAft>
+              <a:buNone/>
+            </a:pPr>
+            <a:r>
+              <a:rPr lang="en-US" sz="1200" dirty="0">
+                <a:solidFill>
+                  <a:srgbClr val="1C2833"/>
+                </a:solidFill>
+                <a:latin typeface="Arial" pitchFamily="34" charset="0"/>
+                <a:ea typeface="Arial" pitchFamily="34" charset="-122"/>
+                <a:cs typeface="Arial" pitchFamily="34" charset="-120"/>
+              </a:rPr>
+              <a:t> — </a:t>
+            </a:r>
+            <a:pPr algn="l" indent="0" marL="0">
+              <a:lnSpc>
+                <a:spcPts val="1620"/>
+              </a:lnSpc>
+              <a:spcAft>
+                <a:spcPts val="300"/>
+              </a:spcAft>
+              <a:buNone/>
+            </a:pPr>
+            <a:r>
+              <a:rPr lang="en-US" sz="1200" i="1" dirty="0">
+                <a:solidFill>
+                  <a:srgbClr val="1C2833"/>
+                </a:solidFill>
+                <a:latin typeface="Arial" pitchFamily="34" charset="0"/>
+                <a:ea typeface="Arial" pitchFamily="34" charset="-122"/>
+                <a:cs typeface="Arial" pitchFamily="34" charset="-120"/>
+              </a:rPr>
+              <a:t>Parāvartya Yojayet</a:t>
+            </a:r>
+            <a:pPr algn="l" indent="0" marL="0">
+              <a:lnSpc>
+                <a:spcPts val="1620"/>
+              </a:lnSpc>
+              <a:spcAft>
+                <a:spcPts val="300"/>
+              </a:spcAft>
+              <a:buNone/>
+            </a:pPr>
+            <a:r>
+              <a:rPr lang="en-US" sz="1200" dirty="0">
+                <a:solidFill>
+                  <a:srgbClr val="1C2833"/>
+                </a:solidFill>
+                <a:latin typeface="Arial" pitchFamily="34" charset="0"/>
+                <a:ea typeface="Arial" pitchFamily="34" charset="-122"/>
+                <a:cs typeface="Arial" pitchFamily="34" charset="-120"/>
+              </a:rPr>
+              <a:t> · "Transpose and apply"</a:t>
+            </a:r>
+            <a:endParaRPr lang="en-US" sz="1200" dirty="0"/>
+          </a:p>
+          <a:p>
+            <a:pPr algn="l" marL="342900" indent="-342900">
+              <a:lnSpc>
+                <a:spcPts val="1620"/>
+              </a:lnSpc>
+              <a:spcAft>
+                <a:spcPts val="300"/>
+              </a:spcAft>
+              <a:buSzPct val="100000"/>
+              <a:buChar char="•"/>
+            </a:pPr>
+            <a:r>
+              <a:rPr lang="en-US" sz="1200" b="1" dirty="0">
+                <a:solidFill>
+                  <a:srgbClr val="1C2833"/>
+                </a:solidFill>
+                <a:latin typeface="Arial" pitchFamily="34" charset="0"/>
+                <a:ea typeface="Arial" pitchFamily="34" charset="-122"/>
+                <a:cs typeface="Arial" pitchFamily="34" charset="-120"/>
+              </a:rPr>
+              <a:t>5</a:t>
+            </a:r>
+            <a:pPr algn="l" indent="0" marL="0">
+              <a:lnSpc>
+                <a:spcPts val="1620"/>
+              </a:lnSpc>
+              <a:spcAft>
+                <a:spcPts val="300"/>
+              </a:spcAft>
+              <a:buNone/>
+            </a:pPr>
+            <a:r>
+              <a:rPr lang="en-US" sz="1200" dirty="0">
+                <a:solidFill>
+                  <a:srgbClr val="1C2833"/>
+                </a:solidFill>
+                <a:latin typeface="Arial" pitchFamily="34" charset="0"/>
+                <a:ea typeface="Arial" pitchFamily="34" charset="-122"/>
+                <a:cs typeface="Arial" pitchFamily="34" charset="-120"/>
+              </a:rPr>
+              <a:t> — </a:t>
+            </a:r>
+            <a:pPr algn="l" indent="0" marL="0">
+              <a:lnSpc>
+                <a:spcPts val="1620"/>
+              </a:lnSpc>
+              <a:spcAft>
+                <a:spcPts val="300"/>
+              </a:spcAft>
+              <a:buNone/>
+            </a:pPr>
+            <a:r>
+              <a:rPr lang="en-US" sz="1200" i="1" dirty="0">
+                <a:solidFill>
+                  <a:srgbClr val="1C2833"/>
+                </a:solidFill>
+                <a:latin typeface="Arial" pitchFamily="34" charset="0"/>
+                <a:ea typeface="Arial" pitchFamily="34" charset="-122"/>
+                <a:cs typeface="Arial" pitchFamily="34" charset="-120"/>
+              </a:rPr>
+              <a:t>Śūnyaṁ Sāmyasamuccaye</a:t>
+            </a:r>
+            <a:pPr algn="l" indent="0" marL="0">
+              <a:lnSpc>
+                <a:spcPts val="1620"/>
+              </a:lnSpc>
+              <a:spcAft>
+                <a:spcPts val="300"/>
+              </a:spcAft>
+              <a:buNone/>
+            </a:pPr>
+            <a:r>
+              <a:rPr lang="en-US" sz="1200" dirty="0">
+                <a:solidFill>
+                  <a:srgbClr val="1C2833"/>
+                </a:solidFill>
+                <a:latin typeface="Arial" pitchFamily="34" charset="0"/>
+                <a:ea typeface="Arial" pitchFamily="34" charset="-122"/>
+                <a:cs typeface="Arial" pitchFamily="34" charset="-120"/>
+              </a:rPr>
+              <a:t> · "When the sum is the same, that sum is zero"</a:t>
+            </a:r>
+            <a:endParaRPr lang="en-US" sz="1200" dirty="0"/>
+          </a:p>
+          <a:p>
+            <a:pPr algn="l" marL="342900" indent="-342900">
+              <a:lnSpc>
+                <a:spcPts val="1620"/>
+              </a:lnSpc>
+              <a:spcAft>
+                <a:spcPts val="300"/>
+              </a:spcAft>
+              <a:buSzPct val="100000"/>
+              <a:buChar char="•"/>
+            </a:pPr>
+            <a:r>
+              <a:rPr lang="en-US" sz="1200" b="1" dirty="0">
+                <a:solidFill>
+                  <a:srgbClr val="1C2833"/>
+                </a:solidFill>
+                <a:latin typeface="Arial" pitchFamily="34" charset="0"/>
+                <a:ea typeface="Arial" pitchFamily="34" charset="-122"/>
+                <a:cs typeface="Arial" pitchFamily="34" charset="-120"/>
+              </a:rPr>
+              <a:t>6</a:t>
+            </a:r>
+            <a:pPr algn="l" indent="0" marL="0">
+              <a:lnSpc>
+                <a:spcPts val="1620"/>
+              </a:lnSpc>
+              <a:spcAft>
+                <a:spcPts val="300"/>
+              </a:spcAft>
+              <a:buNone/>
+            </a:pPr>
+            <a:r>
+              <a:rPr lang="en-US" sz="1200" dirty="0">
+                <a:solidFill>
+                  <a:srgbClr val="1C2833"/>
+                </a:solidFill>
+                <a:latin typeface="Arial" pitchFamily="34" charset="0"/>
+                <a:ea typeface="Arial" pitchFamily="34" charset="-122"/>
+                <a:cs typeface="Arial" pitchFamily="34" charset="-120"/>
+              </a:rPr>
+              <a:t> — </a:t>
+            </a:r>
+            <a:pPr algn="l" indent="0" marL="0">
+              <a:lnSpc>
+                <a:spcPts val="1620"/>
+              </a:lnSpc>
+              <a:spcAft>
+                <a:spcPts val="300"/>
+              </a:spcAft>
+              <a:buNone/>
+            </a:pPr>
+            <a:r>
+              <a:rPr lang="en-US" sz="1200" i="1" dirty="0">
+                <a:solidFill>
+                  <a:srgbClr val="1C2833"/>
+                </a:solidFill>
+                <a:latin typeface="Arial" pitchFamily="34" charset="0"/>
+                <a:ea typeface="Arial" pitchFamily="34" charset="-122"/>
+                <a:cs typeface="Arial" pitchFamily="34" charset="-120"/>
+              </a:rPr>
+              <a:t>(Ānurūpye) Śūnyam Anyat</a:t>
+            </a:r>
+            <a:pPr algn="l" indent="0" marL="0">
+              <a:lnSpc>
+                <a:spcPts val="1620"/>
+              </a:lnSpc>
+              <a:spcAft>
+                <a:spcPts val="300"/>
+              </a:spcAft>
+              <a:buNone/>
+            </a:pPr>
+            <a:r>
+              <a:rPr lang="en-US" sz="1200" dirty="0">
+                <a:solidFill>
+                  <a:srgbClr val="1C2833"/>
+                </a:solidFill>
+                <a:latin typeface="Arial" pitchFamily="34" charset="0"/>
+                <a:ea typeface="Arial" pitchFamily="34" charset="-122"/>
+                <a:cs typeface="Arial" pitchFamily="34" charset="-120"/>
+              </a:rPr>
+              <a:t> · "If one is in ratio, the other is zero"</a:t>
+            </a:r>
+            <a:endParaRPr lang="en-US" sz="1200" dirty="0"/>
+          </a:p>
+          <a:p>
+            <a:pPr algn="l" marL="342900" indent="-342900">
+              <a:lnSpc>
+                <a:spcPts val="1620"/>
+              </a:lnSpc>
+              <a:spcAft>
+                <a:spcPts val="300"/>
+              </a:spcAft>
+              <a:buSzPct val="100000"/>
+              <a:buChar char="•"/>
+            </a:pPr>
+            <a:r>
+              <a:rPr lang="en-US" sz="1200" b="1" dirty="0">
+                <a:solidFill>
+                  <a:srgbClr val="1C2833"/>
+                </a:solidFill>
+                <a:latin typeface="Arial" pitchFamily="34" charset="0"/>
+                <a:ea typeface="Arial" pitchFamily="34" charset="-122"/>
+                <a:cs typeface="Arial" pitchFamily="34" charset="-120"/>
+              </a:rPr>
+              <a:t>7</a:t>
+            </a:r>
+            <a:pPr algn="l" indent="0" marL="0">
+              <a:lnSpc>
+                <a:spcPts val="1620"/>
+              </a:lnSpc>
+              <a:spcAft>
+                <a:spcPts val="300"/>
+              </a:spcAft>
+              <a:buNone/>
+            </a:pPr>
+            <a:r>
+              <a:rPr lang="en-US" sz="1200" dirty="0">
+                <a:solidFill>
+                  <a:srgbClr val="1C2833"/>
+                </a:solidFill>
+                <a:latin typeface="Arial" pitchFamily="34" charset="0"/>
+                <a:ea typeface="Arial" pitchFamily="34" charset="-122"/>
+                <a:cs typeface="Arial" pitchFamily="34" charset="-120"/>
+              </a:rPr>
+              <a:t> — </a:t>
+            </a:r>
+            <a:pPr algn="l" indent="0" marL="0">
+              <a:lnSpc>
+                <a:spcPts val="1620"/>
+              </a:lnSpc>
+              <a:spcAft>
+                <a:spcPts val="300"/>
+              </a:spcAft>
+              <a:buNone/>
+            </a:pPr>
+            <a:r>
+              <a:rPr lang="en-US" sz="1200" i="1" dirty="0">
+                <a:solidFill>
+                  <a:srgbClr val="1C2833"/>
+                </a:solidFill>
+                <a:latin typeface="Arial" pitchFamily="34" charset="0"/>
+                <a:ea typeface="Arial" pitchFamily="34" charset="-122"/>
+                <a:cs typeface="Arial" pitchFamily="34" charset="-120"/>
+              </a:rPr>
+              <a:t>Sankalana Vyavakalanābhyām</a:t>
+            </a:r>
+            <a:pPr algn="l" indent="0" marL="0">
+              <a:lnSpc>
+                <a:spcPts val="1620"/>
+              </a:lnSpc>
+              <a:spcAft>
+                <a:spcPts val="300"/>
+              </a:spcAft>
+              <a:buNone/>
+            </a:pPr>
+            <a:r>
+              <a:rPr lang="en-US" sz="1200" dirty="0">
+                <a:solidFill>
+                  <a:srgbClr val="1C2833"/>
+                </a:solidFill>
+                <a:latin typeface="Arial" pitchFamily="34" charset="0"/>
+                <a:ea typeface="Arial" pitchFamily="34" charset="-122"/>
+                <a:cs typeface="Arial" pitchFamily="34" charset="-120"/>
+              </a:rPr>
+              <a:t> · "By addition and by subtraction"</a:t>
+            </a:r>
+            <a:endParaRPr lang="en-US" sz="1200" dirty="0"/>
+          </a:p>
+          <a:p>
+            <a:pPr algn="l" marL="342900" indent="-342900">
+              <a:lnSpc>
+                <a:spcPts val="1620"/>
+              </a:lnSpc>
+              <a:spcAft>
+                <a:spcPts val="300"/>
+              </a:spcAft>
+              <a:buSzPct val="100000"/>
+              <a:buChar char="•"/>
+            </a:pPr>
+            <a:r>
+              <a:rPr lang="en-US" sz="1200" b="1" dirty="0">
+                <a:solidFill>
+                  <a:srgbClr val="1C2833"/>
+                </a:solidFill>
+                <a:latin typeface="Arial" pitchFamily="34" charset="0"/>
+                <a:ea typeface="Arial" pitchFamily="34" charset="-122"/>
+                <a:cs typeface="Arial" pitchFamily="34" charset="-120"/>
+              </a:rPr>
+              <a:t>8</a:t>
+            </a:r>
+            <a:pPr algn="l" indent="0" marL="0">
+              <a:lnSpc>
+                <a:spcPts val="1620"/>
+              </a:lnSpc>
+              <a:spcAft>
+                <a:spcPts val="300"/>
+              </a:spcAft>
+              <a:buNone/>
+            </a:pPr>
+            <a:r>
+              <a:rPr lang="en-US" sz="1200" dirty="0">
+                <a:solidFill>
+                  <a:srgbClr val="1C2833"/>
+                </a:solidFill>
+                <a:latin typeface="Arial" pitchFamily="34" charset="0"/>
+                <a:ea typeface="Arial" pitchFamily="34" charset="-122"/>
+                <a:cs typeface="Arial" pitchFamily="34" charset="-120"/>
+              </a:rPr>
+              <a:t> — </a:t>
+            </a:r>
+            <a:pPr algn="l" indent="0" marL="0">
+              <a:lnSpc>
+                <a:spcPts val="1620"/>
+              </a:lnSpc>
+              <a:spcAft>
+                <a:spcPts val="300"/>
+              </a:spcAft>
+              <a:buNone/>
+            </a:pPr>
+            <a:r>
+              <a:rPr lang="en-US" sz="1200" i="1" dirty="0">
+                <a:solidFill>
+                  <a:srgbClr val="1C2833"/>
+                </a:solidFill>
+                <a:latin typeface="Arial" pitchFamily="34" charset="0"/>
+                <a:ea typeface="Arial" pitchFamily="34" charset="-122"/>
+                <a:cs typeface="Arial" pitchFamily="34" charset="-120"/>
+              </a:rPr>
+              <a:t>Pūraṇāpūraṇābhyām</a:t>
+            </a:r>
+            <a:pPr algn="l" indent="0" marL="0">
+              <a:lnSpc>
+                <a:spcPts val="1620"/>
+              </a:lnSpc>
+              <a:spcAft>
+                <a:spcPts val="300"/>
+              </a:spcAft>
+              <a:buNone/>
+            </a:pPr>
+            <a:r>
+              <a:rPr lang="en-US" sz="1200" dirty="0">
+                <a:solidFill>
+                  <a:srgbClr val="1C2833"/>
+                </a:solidFill>
+                <a:latin typeface="Arial" pitchFamily="34" charset="0"/>
+                <a:ea typeface="Arial" pitchFamily="34" charset="-122"/>
+                <a:cs typeface="Arial" pitchFamily="34" charset="-120"/>
+              </a:rPr>
+              <a:t> · "By completing or non-completing"</a:t>
+            </a:r>
+            <a:endParaRPr lang="en-US" sz="1200" dirty="0"/>
+          </a:p>
+        </p:txBody>
+      </p:sp>
+      <p:sp>
+        <p:nvSpPr>
+          <p:cNvPr id="5" name="Text 3"/>
           <p:cNvSpPr/>
           <p:nvPr/>
         </p:nvSpPr>
@@ -4738,7 +9874,7 @@
                 <a:ea typeface="Georgia" pitchFamily="34" charset="-122"/>
                 <a:cs typeface="Georgia" pitchFamily="34" charset="-120"/>
               </a:rPr>
-              <a:t>Homework</a:t>
+              <a:t>Core (25 min) — The 16 sūtras and the provenance question (cont.)</a:t>
             </a:r>
             <a:endParaRPr lang="en-US" sz="1800" dirty="0"/>
           </a:p>
@@ -4752,8 +9888,8 @@
         </p:nvSpPr>
         <p:spPr>
           <a:xfrm>
-            <a:off x="406301" y="870942"/>
-            <a:ext cx="8498026" cy="426541"/>
+            <a:off x="634901" y="883593"/>
+            <a:ext cx="8102798" cy="1988344"/>
           </a:xfrm>
           <a:prstGeom prst="rect">
             <a:avLst/>
@@ -4765,13 +9901,31 @@
           <a:bodyPr wrap="square" lIns="0" tIns="0" rIns="0" bIns="0" rtlCol="0" anchor="t"/>
           <a:lstStyle/>
           <a:p>
-            <a:pPr algn="l" indent="0" marL="0">
-              <a:lnSpc>
-                <a:spcPts val="1680"/>
-              </a:lnSpc>
-              <a:spcBef>
-                <a:spcPts val="300"/>
-              </a:spcBef>
+            <a:pPr algn="l" marL="342900" indent="-342900">
+              <a:lnSpc>
+                <a:spcPts val="1620"/>
+              </a:lnSpc>
+              <a:spcAft>
+                <a:spcPts val="300"/>
+              </a:spcAft>
+              <a:buSzPct val="100000"/>
+              <a:buChar char="•"/>
+            </a:pPr>
+            <a:r>
+              <a:rPr lang="en-US" sz="1200" b="1" dirty="0">
+                <a:solidFill>
+                  <a:srgbClr val="1C2833"/>
+                </a:solidFill>
+                <a:latin typeface="Arial" pitchFamily="34" charset="0"/>
+                <a:ea typeface="Arial" pitchFamily="34" charset="-122"/>
+                <a:cs typeface="Arial" pitchFamily="34" charset="-120"/>
+              </a:rPr>
+              <a:t>9</a:t>
+            </a:r>
+            <a:pPr algn="l" indent="0" marL="0">
+              <a:lnSpc>
+                <a:spcPts val="1620"/>
+              </a:lnSpc>
               <a:spcAft>
                 <a:spcPts val="300"/>
               </a:spcAft>
@@ -4786,7 +9940,635 @@
                 <a:ea typeface="Arial" pitchFamily="34" charset="-122"/>
                 <a:cs typeface="Arial" pitchFamily="34" charset="-120"/>
               </a:rPr>
-              <a:t>– Read the 16-sūtra list. Pick ONE sūtra (other than the two we've studied) and find what mathematical operation it's used for. (Sūtras 2, 3, 4, 10, 14 are well-documented in Tirthaji 1965.) Write 3 sentences.</a:t>
+              <a:t> — </a:t>
+            </a:r>
+            <a:pPr algn="l" indent="0" marL="0">
+              <a:lnSpc>
+                <a:spcPts val="1620"/>
+              </a:lnSpc>
+              <a:spcAft>
+                <a:spcPts val="300"/>
+              </a:spcAft>
+              <a:buNone/>
+            </a:pPr>
+            <a:r>
+              <a:rPr lang="en-US" sz="1200" i="1" dirty="0">
+                <a:solidFill>
+                  <a:srgbClr val="1C2833"/>
+                </a:solidFill>
+                <a:latin typeface="Arial" pitchFamily="34" charset="0"/>
+                <a:ea typeface="Arial" pitchFamily="34" charset="-122"/>
+                <a:cs typeface="Arial" pitchFamily="34" charset="-120"/>
+              </a:rPr>
+              <a:t>Calana-Kalanābhyām</a:t>
+            </a:r>
+            <a:pPr algn="l" indent="0" marL="0">
+              <a:lnSpc>
+                <a:spcPts val="1620"/>
+              </a:lnSpc>
+              <a:spcAft>
+                <a:spcPts val="300"/>
+              </a:spcAft>
+              <a:buNone/>
+            </a:pPr>
+            <a:r>
+              <a:rPr lang="en-US" sz="1200" dirty="0">
+                <a:solidFill>
+                  <a:srgbClr val="1C2833"/>
+                </a:solidFill>
+                <a:latin typeface="Arial" pitchFamily="34" charset="0"/>
+                <a:ea typeface="Arial" pitchFamily="34" charset="-122"/>
+                <a:cs typeface="Arial" pitchFamily="34" charset="-120"/>
+              </a:rPr>
+              <a:t> · "By differentiation and integration"</a:t>
+            </a:r>
+            <a:endParaRPr lang="en-US" sz="1200" dirty="0"/>
+          </a:p>
+          <a:p>
+            <a:pPr algn="l" marL="342900" indent="-342900">
+              <a:lnSpc>
+                <a:spcPts val="1620"/>
+              </a:lnSpc>
+              <a:spcAft>
+                <a:spcPts val="300"/>
+              </a:spcAft>
+              <a:buSzPct val="100000"/>
+              <a:buChar char="•"/>
+            </a:pPr>
+            <a:r>
+              <a:rPr lang="en-US" sz="1200" b="1" dirty="0">
+                <a:solidFill>
+                  <a:srgbClr val="1C2833"/>
+                </a:solidFill>
+                <a:latin typeface="Arial" pitchFamily="34" charset="0"/>
+                <a:ea typeface="Arial" pitchFamily="34" charset="-122"/>
+                <a:cs typeface="Arial" pitchFamily="34" charset="-120"/>
+              </a:rPr>
+              <a:t>10</a:t>
+            </a:r>
+            <a:pPr algn="l" indent="0" marL="0">
+              <a:lnSpc>
+                <a:spcPts val="1620"/>
+              </a:lnSpc>
+              <a:spcAft>
+                <a:spcPts val="300"/>
+              </a:spcAft>
+              <a:buNone/>
+            </a:pPr>
+            <a:r>
+              <a:rPr lang="en-US" sz="1200" dirty="0">
+                <a:solidFill>
+                  <a:srgbClr val="1C2833"/>
+                </a:solidFill>
+                <a:latin typeface="Arial" pitchFamily="34" charset="0"/>
+                <a:ea typeface="Arial" pitchFamily="34" charset="-122"/>
+                <a:cs typeface="Arial" pitchFamily="34" charset="-120"/>
+              </a:rPr>
+              <a:t> — </a:t>
+            </a:r>
+            <a:pPr algn="l" indent="0" marL="0">
+              <a:lnSpc>
+                <a:spcPts val="1620"/>
+              </a:lnSpc>
+              <a:spcAft>
+                <a:spcPts val="300"/>
+              </a:spcAft>
+              <a:buNone/>
+            </a:pPr>
+            <a:r>
+              <a:rPr lang="en-US" sz="1200" i="1" dirty="0">
+                <a:solidFill>
+                  <a:srgbClr val="1C2833"/>
+                </a:solidFill>
+                <a:latin typeface="Arial" pitchFamily="34" charset="0"/>
+                <a:ea typeface="Arial" pitchFamily="34" charset="-122"/>
+                <a:cs typeface="Arial" pitchFamily="34" charset="-120"/>
+              </a:rPr>
+              <a:t>Yāvadūnam</a:t>
+            </a:r>
+            <a:pPr algn="l" indent="0" marL="0">
+              <a:lnSpc>
+                <a:spcPts val="1620"/>
+              </a:lnSpc>
+              <a:spcAft>
+                <a:spcPts val="300"/>
+              </a:spcAft>
+              <a:buNone/>
+            </a:pPr>
+            <a:r>
+              <a:rPr lang="en-US" sz="1200" dirty="0">
+                <a:solidFill>
+                  <a:srgbClr val="1C2833"/>
+                </a:solidFill>
+                <a:latin typeface="Arial" pitchFamily="34" charset="0"/>
+                <a:ea typeface="Arial" pitchFamily="34" charset="-122"/>
+                <a:cs typeface="Arial" pitchFamily="34" charset="-120"/>
+              </a:rPr>
+              <a:t> · "Whatever the extent of its deficiency"</a:t>
+            </a:r>
+            <a:endParaRPr lang="en-US" sz="1200" dirty="0"/>
+          </a:p>
+          <a:p>
+            <a:pPr algn="l" marL="342900" indent="-342900">
+              <a:lnSpc>
+                <a:spcPts val="1620"/>
+              </a:lnSpc>
+              <a:spcAft>
+                <a:spcPts val="300"/>
+              </a:spcAft>
+              <a:buSzPct val="100000"/>
+              <a:buChar char="•"/>
+            </a:pPr>
+            <a:r>
+              <a:rPr lang="en-US" sz="1200" b="1" dirty="0">
+                <a:solidFill>
+                  <a:srgbClr val="1C2833"/>
+                </a:solidFill>
+                <a:latin typeface="Arial" pitchFamily="34" charset="0"/>
+                <a:ea typeface="Arial" pitchFamily="34" charset="-122"/>
+                <a:cs typeface="Arial" pitchFamily="34" charset="-120"/>
+              </a:rPr>
+              <a:t>11</a:t>
+            </a:r>
+            <a:pPr algn="l" indent="0" marL="0">
+              <a:lnSpc>
+                <a:spcPts val="1620"/>
+              </a:lnSpc>
+              <a:spcAft>
+                <a:spcPts val="300"/>
+              </a:spcAft>
+              <a:buNone/>
+            </a:pPr>
+            <a:r>
+              <a:rPr lang="en-US" sz="1200" dirty="0">
+                <a:solidFill>
+                  <a:srgbClr val="1C2833"/>
+                </a:solidFill>
+                <a:latin typeface="Arial" pitchFamily="34" charset="0"/>
+                <a:ea typeface="Arial" pitchFamily="34" charset="-122"/>
+                <a:cs typeface="Arial" pitchFamily="34" charset="-120"/>
+              </a:rPr>
+              <a:t> — </a:t>
+            </a:r>
+            <a:pPr algn="l" indent="0" marL="0">
+              <a:lnSpc>
+                <a:spcPts val="1620"/>
+              </a:lnSpc>
+              <a:spcAft>
+                <a:spcPts val="300"/>
+              </a:spcAft>
+              <a:buNone/>
+            </a:pPr>
+            <a:r>
+              <a:rPr lang="en-US" sz="1200" i="1" dirty="0">
+                <a:solidFill>
+                  <a:srgbClr val="1C2833"/>
+                </a:solidFill>
+                <a:latin typeface="Arial" pitchFamily="34" charset="0"/>
+                <a:ea typeface="Arial" pitchFamily="34" charset="-122"/>
+                <a:cs typeface="Arial" pitchFamily="34" charset="-120"/>
+              </a:rPr>
+              <a:t>Vyaṣṭi-Samaṣṭiḥ</a:t>
+            </a:r>
+            <a:pPr algn="l" indent="0" marL="0">
+              <a:lnSpc>
+                <a:spcPts val="1620"/>
+              </a:lnSpc>
+              <a:spcAft>
+                <a:spcPts val="300"/>
+              </a:spcAft>
+              <a:buNone/>
+            </a:pPr>
+            <a:r>
+              <a:rPr lang="en-US" sz="1200" dirty="0">
+                <a:solidFill>
+                  <a:srgbClr val="1C2833"/>
+                </a:solidFill>
+                <a:latin typeface="Arial" pitchFamily="34" charset="0"/>
+                <a:ea typeface="Arial" pitchFamily="34" charset="-122"/>
+                <a:cs typeface="Arial" pitchFamily="34" charset="-120"/>
+              </a:rPr>
+              <a:t> · "Specific and general"</a:t>
+            </a:r>
+            <a:endParaRPr lang="en-US" sz="1200" dirty="0"/>
+          </a:p>
+          <a:p>
+            <a:pPr algn="l" marL="342900" indent="-342900">
+              <a:lnSpc>
+                <a:spcPts val="1620"/>
+              </a:lnSpc>
+              <a:spcAft>
+                <a:spcPts val="300"/>
+              </a:spcAft>
+              <a:buSzPct val="100000"/>
+              <a:buChar char="•"/>
+            </a:pPr>
+            <a:r>
+              <a:rPr lang="en-US" sz="1200" b="1" dirty="0">
+                <a:solidFill>
+                  <a:srgbClr val="1C2833"/>
+                </a:solidFill>
+                <a:latin typeface="Arial" pitchFamily="34" charset="0"/>
+                <a:ea typeface="Arial" pitchFamily="34" charset="-122"/>
+                <a:cs typeface="Arial" pitchFamily="34" charset="-120"/>
+              </a:rPr>
+              <a:t>12</a:t>
+            </a:r>
+            <a:pPr algn="l" indent="0" marL="0">
+              <a:lnSpc>
+                <a:spcPts val="1620"/>
+              </a:lnSpc>
+              <a:spcAft>
+                <a:spcPts val="300"/>
+              </a:spcAft>
+              <a:buNone/>
+            </a:pPr>
+            <a:r>
+              <a:rPr lang="en-US" sz="1200" dirty="0">
+                <a:solidFill>
+                  <a:srgbClr val="1C2833"/>
+                </a:solidFill>
+                <a:latin typeface="Arial" pitchFamily="34" charset="0"/>
+                <a:ea typeface="Arial" pitchFamily="34" charset="-122"/>
+                <a:cs typeface="Arial" pitchFamily="34" charset="-120"/>
+              </a:rPr>
+              <a:t> — </a:t>
+            </a:r>
+            <a:pPr algn="l" indent="0" marL="0">
+              <a:lnSpc>
+                <a:spcPts val="1620"/>
+              </a:lnSpc>
+              <a:spcAft>
+                <a:spcPts val="300"/>
+              </a:spcAft>
+              <a:buNone/>
+            </a:pPr>
+            <a:r>
+              <a:rPr lang="en-US" sz="1200" i="1" dirty="0">
+                <a:solidFill>
+                  <a:srgbClr val="1C2833"/>
+                </a:solidFill>
+                <a:latin typeface="Arial" pitchFamily="34" charset="0"/>
+                <a:ea typeface="Arial" pitchFamily="34" charset="-122"/>
+                <a:cs typeface="Arial" pitchFamily="34" charset="-120"/>
+              </a:rPr>
+              <a:t>Śeṣānyaṅkena Caramena</a:t>
+            </a:r>
+            <a:pPr algn="l" indent="0" marL="0">
+              <a:lnSpc>
+                <a:spcPts val="1620"/>
+              </a:lnSpc>
+              <a:spcAft>
+                <a:spcPts val="300"/>
+              </a:spcAft>
+              <a:buNone/>
+            </a:pPr>
+            <a:r>
+              <a:rPr lang="en-US" sz="1200" dirty="0">
+                <a:solidFill>
+                  <a:srgbClr val="1C2833"/>
+                </a:solidFill>
+                <a:latin typeface="Arial" pitchFamily="34" charset="0"/>
+                <a:ea typeface="Arial" pitchFamily="34" charset="-122"/>
+                <a:cs typeface="Arial" pitchFamily="34" charset="-120"/>
+              </a:rPr>
+              <a:t> · "The remainders by the last digit"</a:t>
+            </a:r>
+            <a:endParaRPr lang="en-US" sz="1200" dirty="0"/>
+          </a:p>
+          <a:p>
+            <a:pPr algn="l" marL="342900" indent="-342900">
+              <a:lnSpc>
+                <a:spcPts val="1620"/>
+              </a:lnSpc>
+              <a:spcAft>
+                <a:spcPts val="300"/>
+              </a:spcAft>
+              <a:buSzPct val="100000"/>
+              <a:buChar char="•"/>
+            </a:pPr>
+            <a:r>
+              <a:rPr lang="en-US" sz="1200" b="1" dirty="0">
+                <a:solidFill>
+                  <a:srgbClr val="1C2833"/>
+                </a:solidFill>
+                <a:latin typeface="Arial" pitchFamily="34" charset="0"/>
+                <a:ea typeface="Arial" pitchFamily="34" charset="-122"/>
+                <a:cs typeface="Arial" pitchFamily="34" charset="-120"/>
+              </a:rPr>
+              <a:t>13</a:t>
+            </a:r>
+            <a:pPr algn="l" indent="0" marL="0">
+              <a:lnSpc>
+                <a:spcPts val="1620"/>
+              </a:lnSpc>
+              <a:spcAft>
+                <a:spcPts val="300"/>
+              </a:spcAft>
+              <a:buNone/>
+            </a:pPr>
+            <a:r>
+              <a:rPr lang="en-US" sz="1200" dirty="0">
+                <a:solidFill>
+                  <a:srgbClr val="1C2833"/>
+                </a:solidFill>
+                <a:latin typeface="Arial" pitchFamily="34" charset="0"/>
+                <a:ea typeface="Arial" pitchFamily="34" charset="-122"/>
+                <a:cs typeface="Arial" pitchFamily="34" charset="-120"/>
+              </a:rPr>
+              <a:t> — </a:t>
+            </a:r>
+            <a:pPr algn="l" indent="0" marL="0">
+              <a:lnSpc>
+                <a:spcPts val="1620"/>
+              </a:lnSpc>
+              <a:spcAft>
+                <a:spcPts val="300"/>
+              </a:spcAft>
+              <a:buNone/>
+            </a:pPr>
+            <a:r>
+              <a:rPr lang="en-US" sz="1200" i="1" dirty="0">
+                <a:solidFill>
+                  <a:srgbClr val="1C2833"/>
+                </a:solidFill>
+                <a:latin typeface="Arial" pitchFamily="34" charset="0"/>
+                <a:ea typeface="Arial" pitchFamily="34" charset="-122"/>
+                <a:cs typeface="Arial" pitchFamily="34" charset="-120"/>
+              </a:rPr>
+              <a:t>Sopāntya-dvayam Antyam</a:t>
+            </a:r>
+            <a:pPr algn="l" indent="0" marL="0">
+              <a:lnSpc>
+                <a:spcPts val="1620"/>
+              </a:lnSpc>
+              <a:spcAft>
+                <a:spcPts val="300"/>
+              </a:spcAft>
+              <a:buNone/>
+            </a:pPr>
+            <a:r>
+              <a:rPr lang="en-US" sz="1200" dirty="0">
+                <a:solidFill>
+                  <a:srgbClr val="1C2833"/>
+                </a:solidFill>
+                <a:latin typeface="Arial" pitchFamily="34" charset="0"/>
+                <a:ea typeface="Arial" pitchFamily="34" charset="-122"/>
+                <a:cs typeface="Arial" pitchFamily="34" charset="-120"/>
+              </a:rPr>
+              <a:t> · "The penultimate and the last"</a:t>
+            </a:r>
+            <a:endParaRPr lang="en-US" sz="1200" dirty="0"/>
+          </a:p>
+          <a:p>
+            <a:pPr algn="l" marL="342900" indent="-342900">
+              <a:lnSpc>
+                <a:spcPts val="1620"/>
+              </a:lnSpc>
+              <a:spcAft>
+                <a:spcPts val="300"/>
+              </a:spcAft>
+              <a:buSzPct val="100000"/>
+              <a:buChar char="•"/>
+            </a:pPr>
+            <a:r>
+              <a:rPr lang="en-US" sz="1200" b="1" dirty="0">
+                <a:solidFill>
+                  <a:srgbClr val="1C2833"/>
+                </a:solidFill>
+                <a:latin typeface="Arial" pitchFamily="34" charset="0"/>
+                <a:ea typeface="Arial" pitchFamily="34" charset="-122"/>
+                <a:cs typeface="Arial" pitchFamily="34" charset="-120"/>
+              </a:rPr>
+              <a:t>14</a:t>
+            </a:r>
+            <a:pPr algn="l" indent="0" marL="0">
+              <a:lnSpc>
+                <a:spcPts val="1620"/>
+              </a:lnSpc>
+              <a:spcAft>
+                <a:spcPts val="300"/>
+              </a:spcAft>
+              <a:buNone/>
+            </a:pPr>
+            <a:r>
+              <a:rPr lang="en-US" sz="1200" dirty="0">
+                <a:solidFill>
+                  <a:srgbClr val="1C2833"/>
+                </a:solidFill>
+                <a:latin typeface="Arial" pitchFamily="34" charset="0"/>
+                <a:ea typeface="Arial" pitchFamily="34" charset="-122"/>
+                <a:cs typeface="Arial" pitchFamily="34" charset="-120"/>
+              </a:rPr>
+              <a:t> — </a:t>
+            </a:r>
+            <a:pPr algn="l" indent="0" marL="0">
+              <a:lnSpc>
+                <a:spcPts val="1620"/>
+              </a:lnSpc>
+              <a:spcAft>
+                <a:spcPts val="300"/>
+              </a:spcAft>
+              <a:buNone/>
+            </a:pPr>
+            <a:r>
+              <a:rPr lang="en-US" sz="1200" i="1" dirty="0">
+                <a:solidFill>
+                  <a:srgbClr val="1C2833"/>
+                </a:solidFill>
+                <a:latin typeface="Arial" pitchFamily="34" charset="0"/>
+                <a:ea typeface="Arial" pitchFamily="34" charset="-122"/>
+                <a:cs typeface="Arial" pitchFamily="34" charset="-120"/>
+              </a:rPr>
+              <a:t>Ekanyūnena Pūrveṇa</a:t>
+            </a:r>
+            <a:pPr algn="l" indent="0" marL="0">
+              <a:lnSpc>
+                <a:spcPts val="1620"/>
+              </a:lnSpc>
+              <a:spcAft>
+                <a:spcPts val="300"/>
+              </a:spcAft>
+              <a:buNone/>
+            </a:pPr>
+            <a:r>
+              <a:rPr lang="en-US" sz="1200" dirty="0">
+                <a:solidFill>
+                  <a:srgbClr val="1C2833"/>
+                </a:solidFill>
+                <a:latin typeface="Arial" pitchFamily="34" charset="0"/>
+                <a:ea typeface="Arial" pitchFamily="34" charset="-122"/>
+                <a:cs typeface="Arial" pitchFamily="34" charset="-120"/>
+              </a:rPr>
+              <a:t> · "By one less than the previous"</a:t>
+            </a:r>
+            <a:endParaRPr lang="en-US" sz="1200" dirty="0"/>
+          </a:p>
+          <a:p>
+            <a:pPr algn="l" marL="342900" indent="-342900">
+              <a:lnSpc>
+                <a:spcPts val="1620"/>
+              </a:lnSpc>
+              <a:spcAft>
+                <a:spcPts val="300"/>
+              </a:spcAft>
+              <a:buSzPct val="100000"/>
+              <a:buChar char="•"/>
+            </a:pPr>
+            <a:r>
+              <a:rPr lang="en-US" sz="1200" b="1" dirty="0">
+                <a:solidFill>
+                  <a:srgbClr val="1C2833"/>
+                </a:solidFill>
+                <a:latin typeface="Arial" pitchFamily="34" charset="0"/>
+                <a:ea typeface="Arial" pitchFamily="34" charset="-122"/>
+                <a:cs typeface="Arial" pitchFamily="34" charset="-120"/>
+              </a:rPr>
+              <a:t>15</a:t>
+            </a:r>
+            <a:pPr algn="l" indent="0" marL="0">
+              <a:lnSpc>
+                <a:spcPts val="1620"/>
+              </a:lnSpc>
+              <a:spcAft>
+                <a:spcPts val="300"/>
+              </a:spcAft>
+              <a:buNone/>
+            </a:pPr>
+            <a:r>
+              <a:rPr lang="en-US" sz="1200" dirty="0">
+                <a:solidFill>
+                  <a:srgbClr val="1C2833"/>
+                </a:solidFill>
+                <a:latin typeface="Arial" pitchFamily="34" charset="0"/>
+                <a:ea typeface="Arial" pitchFamily="34" charset="-122"/>
+                <a:cs typeface="Arial" pitchFamily="34" charset="-120"/>
+              </a:rPr>
+              <a:t> — </a:t>
+            </a:r>
+            <a:pPr algn="l" indent="0" marL="0">
+              <a:lnSpc>
+                <a:spcPts val="1620"/>
+              </a:lnSpc>
+              <a:spcAft>
+                <a:spcPts val="300"/>
+              </a:spcAft>
+              <a:buNone/>
+            </a:pPr>
+            <a:r>
+              <a:rPr lang="en-US" sz="1200" i="1" dirty="0">
+                <a:solidFill>
+                  <a:srgbClr val="1C2833"/>
+                </a:solidFill>
+                <a:latin typeface="Arial" pitchFamily="34" charset="0"/>
+                <a:ea typeface="Arial" pitchFamily="34" charset="-122"/>
+                <a:cs typeface="Arial" pitchFamily="34" charset="-120"/>
+              </a:rPr>
+              <a:t>Guṇitasamuccayaḥ</a:t>
+            </a:r>
+            <a:pPr algn="l" indent="0" marL="0">
+              <a:lnSpc>
+                <a:spcPts val="1620"/>
+              </a:lnSpc>
+              <a:spcAft>
+                <a:spcPts val="300"/>
+              </a:spcAft>
+              <a:buNone/>
+            </a:pPr>
+            <a:r>
+              <a:rPr lang="en-US" sz="1200" dirty="0">
+                <a:solidFill>
+                  <a:srgbClr val="1C2833"/>
+                </a:solidFill>
+                <a:latin typeface="Arial" pitchFamily="34" charset="0"/>
+                <a:ea typeface="Arial" pitchFamily="34" charset="-122"/>
+                <a:cs typeface="Arial" pitchFamily="34" charset="-120"/>
+              </a:rPr>
+              <a:t> · "The product of the sum is the sum of the products"</a:t>
+            </a:r>
+            <a:endParaRPr lang="en-US" sz="1200" dirty="0"/>
+          </a:p>
+          <a:p>
+            <a:pPr algn="l" marL="342900" indent="-342900">
+              <a:lnSpc>
+                <a:spcPts val="1620"/>
+              </a:lnSpc>
+              <a:spcAft>
+                <a:spcPts val="300"/>
+              </a:spcAft>
+              <a:buSzPct val="100000"/>
+              <a:buChar char="•"/>
+            </a:pPr>
+            <a:r>
+              <a:rPr lang="en-US" sz="1200" b="1" dirty="0">
+                <a:solidFill>
+                  <a:srgbClr val="1C2833"/>
+                </a:solidFill>
+                <a:latin typeface="Arial" pitchFamily="34" charset="0"/>
+                <a:ea typeface="Arial" pitchFamily="34" charset="-122"/>
+                <a:cs typeface="Arial" pitchFamily="34" charset="-120"/>
+              </a:rPr>
+              <a:t>16</a:t>
+            </a:r>
+            <a:pPr algn="l" indent="0" marL="0">
+              <a:lnSpc>
+                <a:spcPts val="1620"/>
+              </a:lnSpc>
+              <a:spcAft>
+                <a:spcPts val="300"/>
+              </a:spcAft>
+              <a:buNone/>
+            </a:pPr>
+            <a:r>
+              <a:rPr lang="en-US" sz="1200" dirty="0">
+                <a:solidFill>
+                  <a:srgbClr val="1C2833"/>
+                </a:solidFill>
+                <a:latin typeface="Arial" pitchFamily="34" charset="0"/>
+                <a:ea typeface="Arial" pitchFamily="34" charset="-122"/>
+                <a:cs typeface="Arial" pitchFamily="34" charset="-120"/>
+              </a:rPr>
+              <a:t> — </a:t>
+            </a:r>
+            <a:pPr algn="l" indent="0" marL="0">
+              <a:lnSpc>
+                <a:spcPts val="1620"/>
+              </a:lnSpc>
+              <a:spcAft>
+                <a:spcPts val="300"/>
+              </a:spcAft>
+              <a:buNone/>
+            </a:pPr>
+            <a:r>
+              <a:rPr lang="en-US" sz="1200" i="1" dirty="0">
+                <a:solidFill>
+                  <a:srgbClr val="1C2833"/>
+                </a:solidFill>
+                <a:latin typeface="Arial" pitchFamily="34" charset="0"/>
+                <a:ea typeface="Arial" pitchFamily="34" charset="-122"/>
+                <a:cs typeface="Arial" pitchFamily="34" charset="-120"/>
+              </a:rPr>
+              <a:t>Guṇaka Samuccayaḥ</a:t>
+            </a:r>
+            <a:pPr algn="l" indent="0" marL="0">
+              <a:lnSpc>
+                <a:spcPts val="1620"/>
+              </a:lnSpc>
+              <a:spcAft>
+                <a:spcPts val="300"/>
+              </a:spcAft>
+              <a:buNone/>
+            </a:pPr>
+            <a:r>
+              <a:rPr lang="en-US" sz="1200" dirty="0">
+                <a:solidFill>
+                  <a:srgbClr val="1C2833"/>
+                </a:solidFill>
+                <a:latin typeface="Arial" pitchFamily="34" charset="0"/>
+                <a:ea typeface="Arial" pitchFamily="34" charset="-122"/>
+                <a:cs typeface="Arial" pitchFamily="34" charset="-120"/>
+              </a:rPr>
+              <a:t> · "All the multipliers"</a:t>
             </a:r>
             <a:endParaRPr lang="en-US" sz="1200" dirty="0"/>
           </a:p>
@@ -4944,7 +10726,7 @@
                 <a:ea typeface="Georgia" pitchFamily="34" charset="-122"/>
                 <a:cs typeface="Georgia" pitchFamily="34" charset="-120"/>
               </a:rPr>
-              <a:t>Differentiation</a:t>
+              <a:t>Core (25 min) — The 16 sūtras and the provenance question (cont.)</a:t>
             </a:r>
             <a:endParaRPr lang="en-US" sz="1800" dirty="0"/>
           </a:p>
@@ -4958,8 +10740,8 @@
         </p:nvSpPr>
         <p:spPr>
           <a:xfrm>
-            <a:off x="634901" y="883593"/>
-            <a:ext cx="8102798" cy="937022"/>
+            <a:off x="406301" y="870942"/>
+            <a:ext cx="8498026" cy="213271"/>
           </a:xfrm>
           <a:prstGeom prst="rect">
             <a:avLst/>
@@ -4971,31 +10753,13 @@
           <a:bodyPr wrap="square" lIns="0" tIns="0" rIns="0" bIns="0" rtlCol="0" anchor="t"/>
           <a:lstStyle/>
           <a:p>
-            <a:pPr algn="l" marL="342900" indent="-342900">
-              <a:lnSpc>
-                <a:spcPts val="1620"/>
-              </a:lnSpc>
-              <a:spcAft>
-                <a:spcPts val="300"/>
-              </a:spcAft>
-              <a:buSzPct val="100000"/>
-              <a:buChar char="•"/>
-            </a:pPr>
-            <a:r>
-              <a:rPr lang="en-US" sz="1200" b="1" dirty="0">
-                <a:solidFill>
-                  <a:srgbClr val="1C2833"/>
-                </a:solidFill>
-                <a:latin typeface="Arial" pitchFamily="34" charset="0"/>
-                <a:ea typeface="Arial" pitchFamily="34" charset="-122"/>
-                <a:cs typeface="Arial" pitchFamily="34" charset="-120"/>
-              </a:rPr>
-              <a:t>Tier up:</a:t>
-            </a:r>
-            <a:pPr algn="l" indent="0" marL="0">
-              <a:lnSpc>
-                <a:spcPts val="1620"/>
-              </a:lnSpc>
+            <a:pPr algn="l" indent="0" marL="0">
+              <a:lnSpc>
+                <a:spcPts val="1680"/>
+              </a:lnSpc>
+              <a:spcBef>
+                <a:spcPts val="300"/>
+              </a:spcBef>
               <a:spcAft>
                 <a:spcPts val="300"/>
               </a:spcAft>
@@ -5010,36 +10774,38 @@
                 <a:ea typeface="Arial" pitchFamily="34" charset="-122"/>
                 <a:cs typeface="Arial" pitchFamily="34" charset="-120"/>
               </a:rPr>
-              <a:t> Read a one-paragraph excerpt from Dani (1993). What is Dani's strongest critique? What does he NOT criticise?</a:t>
-            </a:r>
-            <a:endParaRPr lang="en-US" sz="1200" dirty="0"/>
-          </a:p>
-          <a:p>
-            <a:pPr algn="l" marL="342900" indent="-342900">
-              <a:lnSpc>
-                <a:spcPts val="1620"/>
-              </a:lnSpc>
-              <a:spcAft>
-                <a:spcPts val="300"/>
-              </a:spcAft>
-              <a:buSzPct val="100000"/>
-              <a:buChar char="•"/>
-            </a:pPr>
-            <a:r>
-              <a:rPr lang="en-US" sz="1200" b="1" dirty="0">
-                <a:solidFill>
-                  <a:srgbClr val="1C2833"/>
-                </a:solidFill>
-                <a:latin typeface="Arial" pitchFamily="34" charset="0"/>
-                <a:ea typeface="Arial" pitchFamily="34" charset="-122"/>
-                <a:cs typeface="Arial" pitchFamily="34" charset="-120"/>
-              </a:rPr>
-              <a:t>Tier down:</a:t>
-            </a:r>
-            <a:pPr algn="l" indent="0" marL="0">
-              <a:lnSpc>
-                <a:spcPts val="1620"/>
-              </a:lnSpc>
+              <a:t>Plus 13 sub-sūtras (including </a:t>
+            </a:r>
+            <a:pPr algn="l" indent="0" marL="0">
+              <a:lnSpc>
+                <a:spcPts val="1680"/>
+              </a:lnSpc>
+              <a:spcBef>
+                <a:spcPts val="300"/>
+              </a:spcBef>
+              <a:spcAft>
+                <a:spcPts val="300"/>
+              </a:spcAft>
+              <a:buNone/>
+            </a:pPr>
+            <a:r>
+              <a:rPr lang="en-US" sz="1200" i="1" dirty="0">
+                <a:solidFill>
+                  <a:srgbClr val="1C2833"/>
+                </a:solidFill>
+                <a:latin typeface="Arial" pitchFamily="34" charset="0"/>
+                <a:ea typeface="Arial" pitchFamily="34" charset="-122"/>
+                <a:cs typeface="Arial" pitchFamily="34" charset="-120"/>
+              </a:rPr>
+              <a:t>Anurūpyeṇa</a:t>
+            </a:r>
+            <a:pPr algn="l" indent="0" marL="0">
+              <a:lnSpc>
+                <a:spcPts val="1680"/>
+              </a:lnSpc>
+              <a:spcBef>
+                <a:spcPts val="300"/>
+              </a:spcBef>
               <a:spcAft>
                 <a:spcPts val="300"/>
               </a:spcAft>
@@ -5054,7 +10820,7 @@
                 <a:ea typeface="Arial" pitchFamily="34" charset="-122"/>
                 <a:cs typeface="Arial" pitchFamily="34" charset="-120"/>
               </a:rPr>
-              <a:t> Memorise the names of sūtras 1, 2, 3, and 14 (the four most commonly taught). Skip the historicity discussion details.</a:t>
+              <a:t>).</a:t>
             </a:r>
             <a:endParaRPr lang="en-US" sz="1200" dirty="0"/>
           </a:p>
